--- a/presentaciones/indotel-ciudades-inteligentes/INDOTEL-Estrategia-Nacional-Ciudades-Inteligentes.pptx
+++ b/presentaciones/indotel-ciudades-inteligentes/INDOTEL-Estrategia-Nacional-Ciudades-Inteligentes.pptx
@@ -513,7 +513,7 @@
           <a:p>
             <a:r>
               <a:rPr lang="en-US" dirty="0"/>
-              <a:t>Portada del informe estratégico ante el Consejo Directivo del INDOTEL. Los cinco pilares de la franja inferior — datos, interoperabilidad, estándares, conectividad y sostenibilidad — son los ejes que estructuran toda la presentación.</a:t>
+              <a:t>Portada del informe estratégico ante el Consejo Directivo. Los cinco pilares de la franja inferior — datos, interoperabilidad, estándares, conectividad y sostenibilidad — estructuran toda la presentación.</a:t>
             </a:r>
             <a:endParaRPr lang="en-US" dirty="0"/>
           </a:p>
@@ -777,7 +777,7 @@
           <a:p>
             <a:r>
               <a:rPr lang="en-US" dirty="0"/>
-              <a:t>Lámina de cierre y de solicitud formal: el Consejo Directivo autoriza convertir la cooperación InDiCo/OASC/U4SSC en un instrumento permanente del INDOTEL.</a:t>
+              <a:t>Lámina de cierre y solicitud formal: el Consejo Directivo autoriza convertir la cooperación InDiCo/OASC/U4SSC en un instrumento permanente del INDOTEL.</a:t>
             </a:r>
             <a:endParaRPr lang="en-US" dirty="0"/>
           </a:p>
@@ -865,7 +865,7 @@
           <a:p>
             <a:r>
               <a:rPr lang="en-US" dirty="0"/>
-              <a:t>La visión ordena el discurso: conectividad, eficiencia municipal y mejor servicio al ciudadano. Los cuatro indicadores de la banda inferior son las metas de referencia del instrumento estratégico.</a:t>
+              <a:t>La visión ordena el discurso: conectividad, eficiencia municipal y mejor servicio al ciudadano. Los cuatro indicadores de la banda inferior son las metas de referencia del instrumento.</a:t>
             </a:r>
             <a:endParaRPr lang="en-US" dirty="0"/>
           </a:p>
@@ -953,7 +953,7 @@
           <a:p>
             <a:r>
               <a:rPr lang="en-US" dirty="0"/>
-              <a:t>Tres actores, tres aportes distintos y complementarios. Es la lámina que evita la confusión más común: creer que InDiCo, OASC y U4SSC son lo mismo.</a:t>
+              <a:t>Tres actores, tres aportes distintos y complementarios. Evita la confusión más común: creer que InDiCo, OASC y U4SSC son lo mismo.</a:t>
             </a:r>
             <a:endParaRPr lang="en-US" dirty="0"/>
           </a:p>
@@ -1041,7 +1041,7 @@
           <a:p>
             <a:r>
               <a:rPr lang="en-US" dirty="0"/>
-              <a:t>InDiCo Global no aporta solo financiamiento: aporta acceso a estándares, capacitación y una red de pares. La aplicación en RD ya tiene metas concretas — de 3 a 5 ciudades piloto y un hub sostenible.</a:t>
+              <a:t>InDiCo Global no aporta solo financiamiento: aporta acceso a estándares, capacitación y una red de pares. En RD ya hay metas concretas: 3 a 5 ciudades piloto y un hub sostenible.</a:t>
             </a:r>
             <a:endParaRPr lang="en-US" dirty="0"/>
           </a:p>
@@ -1129,7 +1129,7 @@
           <a:p>
             <a:r>
               <a:rPr lang="en-US" dirty="0"/>
-              <a:t>El punto clave a comunicar: OASC no es un proveedor. Es una red que define reglas comunes. Eso protege al Estado de la dependencia tecnológica.</a:t>
+              <a:t>El punto clave: OASC no es un proveedor, es una red que define reglas comunes. Eso protege al Estado de la dependencia tecnológica.</a:t>
             </a:r>
             <a:endParaRPr lang="en-US" dirty="0"/>
           </a:p>
@@ -1217,7 +1217,7 @@
           <a:p>
             <a:r>
               <a:rPr lang="en-US" dirty="0"/>
-              <a:t>Cuatro mecanismos de operación. El acuerdo con la UIT de 2024 es el que da respaldo institucional al vínculo con el sistema de Naciones Unidas.</a:t>
+              <a:t>Cuatro mecanismos de operación. El acuerdo con la UIT de 2024 da respaldo institucional al vínculo con el sistema de Naciones Unidas.</a:t>
             </a:r>
             <a:endParaRPr lang="en-US" dirty="0"/>
           </a:p>
@@ -1836,7 +1836,7 @@
     <p:bg>
       <p:bgPr>
         <a:solidFill>
-          <a:srgbClr val="07203F"/>
+          <a:srgbClr val="04173F"/>
         </a:solidFill>
       </p:bgPr>
     </p:bg>
@@ -1879,7 +1879,7 @@
       </p:pic>
       <p:pic>
         <p:nvPicPr>
-          <p:cNvPr id="3" name="Image 1" descr="/home/user/bolt.diy/presentaciones/indotel-ciudades-inteligentes/src/derived/veil_left.png">    </p:cNvPr>
+          <p:cNvPr id="3" name="Image 1" descr="/home/user/bolt.diy/presentaciones/indotel-ciudades-inteligentes/src/derived/veil_cover.png">    </p:cNvPr>
           <p:cNvPicPr>
             <a:picLocks noChangeAspect="1"/>
           </p:cNvPicPr>
@@ -1948,7 +1948,7 @@
         </p:nvSpPr>
         <p:spPr>
           <a:xfrm>
-            <a:off x="566928" y="1371600"/>
+            <a:off x="566928" y="1389888"/>
             <a:ext cx="5486400" cy="274320"/>
           </a:xfrm>
           <a:prstGeom prst="rect">
@@ -1967,7 +1967,7 @@
             <a:r>
               <a:rPr lang="en-US" sz="1250" b="1" spc="260" kern="0" dirty="0">
                 <a:solidFill>
-                  <a:srgbClr val="2E9BF0"/>
+                  <a:srgbClr val="4FA8F0"/>
                 </a:solidFill>
                 <a:latin typeface="Calibri" pitchFamily="34" charset="0"/>
                 <a:ea typeface="Calibri" pitchFamily="34" charset="-122"/>
@@ -1987,7 +1987,7 @@
         </p:nvSpPr>
         <p:spPr>
           <a:xfrm>
-            <a:off x="566928" y="1700784"/>
+            <a:off x="566928" y="1719072"/>
             <a:ext cx="7589520" cy="1234440"/>
           </a:xfrm>
           <a:prstGeom prst="rect">
@@ -2049,7 +2049,7 @@
         </p:nvSpPr>
         <p:spPr>
           <a:xfrm>
-            <a:off x="566928" y="2962656"/>
+            <a:off x="566928" y="2980944"/>
             <a:ext cx="6949440" cy="411480"/>
           </a:xfrm>
           <a:prstGeom prst="rect">
@@ -2068,7 +2068,7 @@
             <a:r>
               <a:rPr lang="en-US" sz="2100" dirty="0">
                 <a:solidFill>
-                  <a:srgbClr val="2E9BF0"/>
+                  <a:srgbClr val="4FA8F0"/>
                 </a:solidFill>
                 <a:latin typeface="Calibri" pitchFamily="34" charset="0"/>
                 <a:ea typeface="Calibri" pitchFamily="34" charset="-122"/>
@@ -2088,7 +2088,7 @@
         </p:nvSpPr>
         <p:spPr>
           <a:xfrm>
-            <a:off x="566928" y="3547872"/>
+            <a:off x="566928" y="3566160"/>
             <a:ext cx="6035040" cy="731520"/>
           </a:xfrm>
           <a:prstGeom prst="rect">
@@ -2110,7 +2110,7 @@
             <a:r>
               <a:rPr lang="en-US" sz="1350" dirty="0">
                 <a:solidFill>
-                  <a:srgbClr val="E6EEF7"/>
+                  <a:srgbClr val="E4EDF8"/>
                 </a:solidFill>
                 <a:latin typeface="Calibri" pitchFamily="34" charset="0"/>
                 <a:ea typeface="Calibri" pitchFamily="34" charset="-122"/>
@@ -2130,7 +2130,7 @@
             <a:r>
               <a:rPr lang="en-US" sz="1350" dirty="0">
                 <a:solidFill>
-                  <a:srgbClr val="E6EEF7"/>
+                  <a:srgbClr val="E4EDF8"/>
                 </a:solidFill>
                 <a:latin typeface="Calibri" pitchFamily="34" charset="0"/>
                 <a:ea typeface="Calibri" pitchFamily="34" charset="-122"/>
@@ -2158,8 +2158,8 @@
         </p:blipFill>
         <p:spPr>
           <a:xfrm>
-            <a:off x="621792" y="4864608"/>
-            <a:ext cx="365760" cy="365760"/>
+            <a:off x="603504" y="4846320"/>
+            <a:ext cx="402336" cy="402336"/>
           </a:xfrm>
           <a:prstGeom prst="rect">
             <a:avLst/>
@@ -2174,7 +2174,7 @@
         </p:nvSpPr>
         <p:spPr>
           <a:xfrm>
-            <a:off x="566928" y="5358384"/>
+            <a:off x="566928" y="5394960"/>
             <a:ext cx="1472184" cy="219456"/>
           </a:xfrm>
           <a:prstGeom prst="rect">
@@ -2193,7 +2193,7 @@
             <a:r>
               <a:rPr lang="en-US" sz="750" b="1" spc="40" kern="0" dirty="0">
                 <a:solidFill>
-                  <a:srgbClr val="D7E5F4"/>
+                  <a:srgbClr val="D3E3F5"/>
                 </a:solidFill>
                 <a:latin typeface="Calibri" pitchFamily="34" charset="0"/>
                 <a:ea typeface="Calibri" pitchFamily="34" charset="-122"/>
@@ -2221,8 +2221,8 @@
         </p:blipFill>
         <p:spPr>
           <a:xfrm>
-            <a:off x="2139696" y="4864608"/>
-            <a:ext cx="365760" cy="365760"/>
+            <a:off x="2121408" y="4846320"/>
+            <a:ext cx="402336" cy="402336"/>
           </a:xfrm>
           <a:prstGeom prst="rect">
             <a:avLst/>
@@ -2237,7 +2237,7 @@
         </p:nvSpPr>
         <p:spPr>
           <a:xfrm>
-            <a:off x="2084832" y="5358384"/>
+            <a:off x="2084832" y="5394960"/>
             <a:ext cx="1472184" cy="219456"/>
           </a:xfrm>
           <a:prstGeom prst="rect">
@@ -2256,7 +2256,7 @@
             <a:r>
               <a:rPr lang="en-US" sz="750" b="1" spc="40" kern="0" dirty="0">
                 <a:solidFill>
-                  <a:srgbClr val="D7E5F4"/>
+                  <a:srgbClr val="D3E3F5"/>
                 </a:solidFill>
                 <a:latin typeface="Calibri" pitchFamily="34" charset="0"/>
                 <a:ea typeface="Calibri" pitchFamily="34" charset="-122"/>
@@ -2284,8 +2284,8 @@
         </p:blipFill>
         <p:spPr>
           <a:xfrm>
-            <a:off x="3657600" y="4864608"/>
-            <a:ext cx="365760" cy="365760"/>
+            <a:off x="3639312" y="4846320"/>
+            <a:ext cx="402336" cy="402336"/>
           </a:xfrm>
           <a:prstGeom prst="rect">
             <a:avLst/>
@@ -2300,7 +2300,7 @@
         </p:nvSpPr>
         <p:spPr>
           <a:xfrm>
-            <a:off x="3602736" y="5358384"/>
+            <a:off x="3602736" y="5394960"/>
             <a:ext cx="1472184" cy="219456"/>
           </a:xfrm>
           <a:prstGeom prst="rect">
@@ -2319,7 +2319,7 @@
             <a:r>
               <a:rPr lang="en-US" sz="750" b="1" spc="40" kern="0" dirty="0">
                 <a:solidFill>
-                  <a:srgbClr val="D7E5F4"/>
+                  <a:srgbClr val="D3E3F5"/>
                 </a:solidFill>
                 <a:latin typeface="Calibri" pitchFamily="34" charset="0"/>
                 <a:ea typeface="Calibri" pitchFamily="34" charset="-122"/>
@@ -2347,8 +2347,8 @@
         </p:blipFill>
         <p:spPr>
           <a:xfrm>
-            <a:off x="5175504" y="4864608"/>
-            <a:ext cx="365760" cy="365760"/>
+            <a:off x="5157216" y="4846320"/>
+            <a:ext cx="402336" cy="402336"/>
           </a:xfrm>
           <a:prstGeom prst="rect">
             <a:avLst/>
@@ -2363,7 +2363,7 @@
         </p:nvSpPr>
         <p:spPr>
           <a:xfrm>
-            <a:off x="5120640" y="5358384"/>
+            <a:off x="5120640" y="5394960"/>
             <a:ext cx="1472184" cy="219456"/>
           </a:xfrm>
           <a:prstGeom prst="rect">
@@ -2382,7 +2382,7 @@
             <a:r>
               <a:rPr lang="en-US" sz="750" b="1" spc="40" kern="0" dirty="0">
                 <a:solidFill>
-                  <a:srgbClr val="D7E5F4"/>
+                  <a:srgbClr val="D3E3F5"/>
                 </a:solidFill>
                 <a:latin typeface="Calibri" pitchFamily="34" charset="0"/>
                 <a:ea typeface="Calibri" pitchFamily="34" charset="-122"/>
@@ -2410,8 +2410,8 @@
         </p:blipFill>
         <p:spPr>
           <a:xfrm>
-            <a:off x="6693408" y="4864608"/>
-            <a:ext cx="365760" cy="365760"/>
+            <a:off x="6675120" y="4846320"/>
+            <a:ext cx="402336" cy="402336"/>
           </a:xfrm>
           <a:prstGeom prst="rect">
             <a:avLst/>
@@ -2426,7 +2426,7 @@
         </p:nvSpPr>
         <p:spPr>
           <a:xfrm>
-            <a:off x="6638544" y="5358384"/>
+            <a:off x="6638544" y="5394960"/>
             <a:ext cx="1472184" cy="219456"/>
           </a:xfrm>
           <a:prstGeom prst="rect">
@@ -2445,7 +2445,7 @@
             <a:r>
               <a:rPr lang="en-US" sz="750" b="1" spc="40" kern="0" dirty="0">
                 <a:solidFill>
-                  <a:srgbClr val="D7E5F4"/>
+                  <a:srgbClr val="D3E3F5"/>
                 </a:solidFill>
                 <a:latin typeface="Calibri" pitchFamily="34" charset="0"/>
                 <a:ea typeface="Calibri" pitchFamily="34" charset="-122"/>
@@ -2472,7 +2472,7 @@
             <a:avLst/>
           </a:prstGeom>
           <a:solidFill>
-            <a:srgbClr val="0B2C5E"/>
+            <a:srgbClr val="0A2E7A"/>
           </a:solidFill>
           <a:ln/>
         </p:spPr>
@@ -2539,7 +2539,7 @@
         <p:spPr>
           <a:xfrm>
             <a:off x="7223760" y="6272784"/>
-            <a:ext cx="4206240" cy="585216"/>
+            <a:ext cx="4114800" cy="585216"/>
           </a:xfrm>
           <a:prstGeom prst="rect">
             <a:avLst/>
@@ -2591,7 +2591,7 @@
         </p:nvSpPr>
         <p:spPr>
           <a:xfrm>
-            <a:off x="11521440" y="6272784"/>
+            <a:off x="11475720" y="6272784"/>
             <a:ext cx="365760" cy="585216"/>
           </a:xfrm>
           <a:prstGeom prst="rect">
@@ -2608,9 +2608,9 @@
               <a:buNone/>
             </a:pPr>
             <a:r>
-              <a:rPr lang="en-US" sz="950" b="1" dirty="0">
-                <a:solidFill>
-                  <a:srgbClr val="2E9BF0"/>
+              <a:rPr lang="en-US" sz="1000" b="1" dirty="0">
+                <a:solidFill>
+                  <a:srgbClr val="9CC4EE"/>
                 </a:solidFill>
                 <a:latin typeface="Calibri" pitchFamily="34" charset="0"/>
                 <a:ea typeface="Calibri" pitchFamily="34" charset="-122"/>
@@ -2618,7 +2618,7 @@
               </a:rPr>
               <a:t>1</a:t>
             </a:r>
-            <a:endParaRPr lang="en-US" sz="950" dirty="0"/>
+            <a:endParaRPr lang="en-US" sz="1000" dirty="0"/>
           </a:p>
         </p:txBody>
       </p:sp>
@@ -2636,7 +2636,7 @@
     <p:bg>
       <p:bgPr>
         <a:solidFill>
-          <a:srgbClr val="FFFFFF"/>
+          <a:srgbClr val="F2F3F8"/>
         </a:solidFill>
       </p:bgPr>
     </p:bg>
@@ -2662,7 +2662,7 @@
         </p:nvSpPr>
         <p:spPr>
           <a:xfrm>
-            <a:off x="566928" y="256032"/>
+            <a:off x="566928" y="237744"/>
             <a:ext cx="3657600" cy="274320"/>
           </a:xfrm>
           <a:prstGeom prst="rect">
@@ -2679,9 +2679,9 @@
               <a:buNone/>
             </a:pPr>
             <a:r>
-              <a:rPr lang="en-US" sz="1500" b="1" spc="140" kern="0" dirty="0">
-                <a:solidFill>
-                  <a:srgbClr val="0B2C5E"/>
+              <a:rPr lang="en-US" sz="1500" b="1" spc="130" kern="0" dirty="0">
+                <a:solidFill>
+                  <a:srgbClr val="0D1B5E"/>
                 </a:solidFill>
                 <a:latin typeface="Arial" pitchFamily="34" charset="0"/>
                 <a:ea typeface="Arial" pitchFamily="34" charset="-122"/>
@@ -2701,7 +2701,7 @@
         </p:nvSpPr>
         <p:spPr>
           <a:xfrm>
-            <a:off x="566928" y="534924"/>
+            <a:off x="566928" y="516636"/>
             <a:ext cx="3657600" cy="219456"/>
           </a:xfrm>
           <a:prstGeom prst="rect">
@@ -2720,7 +2720,7 @@
             <a:r>
               <a:rPr lang="en-US" sz="950" dirty="0">
                 <a:solidFill>
-                  <a:srgbClr val="8494A5"/>
+                  <a:srgbClr val="8A93A5"/>
                 </a:solidFill>
                 <a:latin typeface="Calibri" pitchFamily="34" charset="0"/>
                 <a:ea typeface="Calibri" pitchFamily="34" charset="-122"/>
@@ -2740,7 +2740,7 @@
         </p:nvSpPr>
         <p:spPr>
           <a:xfrm>
-            <a:off x="566928" y="822960"/>
+            <a:off x="566928" y="768096"/>
             <a:ext cx="11057839" cy="420624"/>
           </a:xfrm>
           <a:prstGeom prst="rect">
@@ -2757,9 +2757,9 @@
               <a:buNone/>
             </a:pPr>
             <a:r>
-              <a:rPr lang="en-US" sz="2500" b="1" dirty="0">
-                <a:solidFill>
-                  <a:srgbClr val="0B2C5E"/>
+              <a:rPr lang="en-US" sz="2450" b="1" dirty="0">
+                <a:solidFill>
+                  <a:srgbClr val="0D1B5E"/>
                 </a:solidFill>
                 <a:latin typeface="Calibri" pitchFamily="34" charset="0"/>
                 <a:ea typeface="Calibri" pitchFamily="34" charset="-122"/>
@@ -2767,7 +2767,7 @@
               </a:rPr>
               <a:t>Hoja de ruta INDOTEL</a:t>
             </a:r>
-            <a:endParaRPr lang="en-US" sz="2500" dirty="0"/>
+            <a:endParaRPr lang="en-US" sz="2450" dirty="0"/>
           </a:p>
         </p:txBody>
       </p:sp>
@@ -2779,8 +2779,8 @@
         </p:nvSpPr>
         <p:spPr>
           <a:xfrm>
-            <a:off x="566928" y="1280160"/>
-            <a:ext cx="11057839" cy="457200"/>
+            <a:off x="566928" y="1234440"/>
+            <a:ext cx="11057839" cy="475488"/>
           </a:xfrm>
           <a:prstGeom prst="rect">
             <a:avLst/>
@@ -2794,14 +2794,14 @@
           <a:p>
             <a:pPr indent="0" marL="0">
               <a:lnSpc>
-                <a:spcPts val="1600"/>
+                <a:spcPts val="1650"/>
               </a:lnSpc>
               <a:buNone/>
             </a:pPr>
             <a:r>
-              <a:rPr lang="en-US" sz="1250" dirty="0">
-                <a:solidFill>
-                  <a:srgbClr val="44566B"/>
+              <a:rPr lang="en-US" sz="1250" b="1" dirty="0">
+                <a:solidFill>
+                  <a:srgbClr val="243C8F"/>
                 </a:solidFill>
                 <a:latin typeface="Calibri" pitchFamily="34" charset="0"/>
                 <a:ea typeface="Calibri" pitchFamily="34" charset="-122"/>
@@ -2821,14 +2821,14 @@
         </p:nvSpPr>
         <p:spPr>
           <a:xfrm>
-            <a:off x="11624767" y="6327648"/>
-            <a:ext cx="274320" cy="274320"/>
+            <a:off x="11661343" y="6364224"/>
+            <a:ext cx="310896" cy="310896"/>
           </a:xfrm>
           <a:prstGeom prst="rect">
             <a:avLst/>
           </a:prstGeom>
           <a:solidFill>
-            <a:srgbClr val="0B2C5E"/>
+            <a:srgbClr val="0A2E7A"/>
           </a:solidFill>
           <a:ln/>
         </p:spPr>
@@ -2841,8 +2841,8 @@
         </p:nvSpPr>
         <p:spPr>
           <a:xfrm>
-            <a:off x="11624767" y="6327648"/>
-            <a:ext cx="274320" cy="274320"/>
+            <a:off x="11661343" y="6364224"/>
+            <a:ext cx="310896" cy="310896"/>
           </a:xfrm>
           <a:prstGeom prst="rect">
             <a:avLst/>
@@ -2858,7 +2858,7 @@
               <a:buNone/>
             </a:pPr>
             <a:r>
-              <a:rPr lang="en-US" sz="950" b="1" dirty="0">
+              <a:rPr lang="en-US" sz="1000" b="1" dirty="0">
                 <a:solidFill>
                   <a:srgbClr val="FFFFFF"/>
                 </a:solidFill>
@@ -2868,7 +2868,7 @@
               </a:rPr>
               <a:t>10</a:t>
             </a:r>
-            <a:endParaRPr lang="en-US" sz="950" dirty="0"/>
+            <a:endParaRPr lang="en-US" sz="1000" dirty="0"/>
           </a:p>
         </p:txBody>
       </p:sp>
@@ -2880,18 +2880,20 @@
         </p:nvSpPr>
         <p:spPr>
           <a:xfrm>
-            <a:off x="566928" y="2286000"/>
-            <a:ext cx="11057839" cy="3291840"/>
-          </a:xfrm>
-          <a:prstGeom prst="roundRect">
-            <a:avLst>
-              <a:gd name="adj" fmla="val 1944"/>
-            </a:avLst>
-          </a:prstGeom>
-          <a:solidFill>
-            <a:srgbClr val="F3F7FB"/>
-          </a:solidFill>
-          <a:ln/>
+            <a:off x="566928" y="3072384"/>
+            <a:ext cx="703448" cy="0"/>
+          </a:xfrm>
+          <a:prstGeom prst="line">
+            <a:avLst/>
+          </a:prstGeom>
+          <a:noFill/>
+          <a:ln w="19050">
+            <a:solidFill>
+              <a:srgbClr val="8FA9C6"/>
+            </a:solidFill>
+            <a:prstDash val="solid"/>
+            <a:headEnd type="triangle"/>
+          </a:ln>
         </p:spPr>
       </p:sp>
       <p:sp>
@@ -2902,16 +2904,16 @@
         </p:nvSpPr>
         <p:spPr>
           <a:xfrm>
-            <a:off x="2102480" y="3246120"/>
-            <a:ext cx="1352032" cy="0"/>
+            <a:off x="10921319" y="3072384"/>
+            <a:ext cx="703448" cy="0"/>
           </a:xfrm>
           <a:prstGeom prst="line">
             <a:avLst/>
           </a:prstGeom>
           <a:noFill/>
-          <a:ln w="24130">
+          <a:ln w="19050">
             <a:solidFill>
-              <a:srgbClr val="AEC2D6"/>
+              <a:srgbClr val="8FA9C6"/>
             </a:solidFill>
             <a:prstDash val="solid"/>
             <a:tailEnd type="triangle"/>
@@ -2926,28 +2928,124 @@
         </p:nvSpPr>
         <p:spPr>
           <a:xfrm>
-            <a:off x="1242944" y="2816352"/>
-            <a:ext cx="859536" cy="859536"/>
+            <a:off x="2075048" y="3072384"/>
+            <a:ext cx="1406896" cy="0"/>
+          </a:xfrm>
+          <a:prstGeom prst="line">
+            <a:avLst/>
+          </a:prstGeom>
+          <a:noFill/>
+          <a:ln w="19050">
+            <a:solidFill>
+              <a:srgbClr val="8FA9C6"/>
+            </a:solidFill>
+            <a:prstDash val="solid"/>
+            <a:tailEnd type="triangle"/>
+          </a:ln>
+        </p:spPr>
+      </p:sp>
+      <p:sp>
+        <p:nvSpPr>
+          <p:cNvPr id="11" name="Shape 9"/>
+          <p:cNvSpPr/>
+          <p:nvPr/>
+        </p:nvSpPr>
+        <p:spPr>
+          <a:xfrm>
+            <a:off x="4286616" y="3072384"/>
+            <a:ext cx="1406896" cy="0"/>
+          </a:xfrm>
+          <a:prstGeom prst="line">
+            <a:avLst/>
+          </a:prstGeom>
+          <a:noFill/>
+          <a:ln w="19050">
+            <a:solidFill>
+              <a:srgbClr val="8FA9C6"/>
+            </a:solidFill>
+            <a:prstDash val="solid"/>
+            <a:tailEnd type="triangle"/>
+          </a:ln>
+        </p:spPr>
+      </p:sp>
+      <p:sp>
+        <p:nvSpPr>
+          <p:cNvPr id="12" name="Shape 10"/>
+          <p:cNvSpPr/>
+          <p:nvPr/>
+        </p:nvSpPr>
+        <p:spPr>
+          <a:xfrm>
+            <a:off x="6498184" y="3072384"/>
+            <a:ext cx="1406896" cy="0"/>
+          </a:xfrm>
+          <a:prstGeom prst="line">
+            <a:avLst/>
+          </a:prstGeom>
+          <a:noFill/>
+          <a:ln w="19050">
+            <a:solidFill>
+              <a:srgbClr val="8FA9C6"/>
+            </a:solidFill>
+            <a:prstDash val="solid"/>
+            <a:tailEnd type="triangle"/>
+          </a:ln>
+        </p:spPr>
+      </p:sp>
+      <p:sp>
+        <p:nvSpPr>
+          <p:cNvPr id="13" name="Shape 11"/>
+          <p:cNvSpPr/>
+          <p:nvPr/>
+        </p:nvSpPr>
+        <p:spPr>
+          <a:xfrm>
+            <a:off x="8709751" y="3072384"/>
+            <a:ext cx="1406896" cy="0"/>
+          </a:xfrm>
+          <a:prstGeom prst="line">
+            <a:avLst/>
+          </a:prstGeom>
+          <a:noFill/>
+          <a:ln w="19050">
+            <a:solidFill>
+              <a:srgbClr val="8FA9C6"/>
+            </a:solidFill>
+            <a:prstDash val="solid"/>
+            <a:tailEnd type="triangle"/>
+          </a:ln>
+        </p:spPr>
+      </p:sp>
+      <p:sp>
+        <p:nvSpPr>
+          <p:cNvPr id="14" name="Shape 12"/>
+          <p:cNvSpPr/>
+          <p:nvPr/>
+        </p:nvSpPr>
+        <p:spPr>
+          <a:xfrm>
+            <a:off x="1270376" y="2670048"/>
+            <a:ext cx="804672" cy="804672"/>
           </a:xfrm>
           <a:prstGeom prst="ellipse">
             <a:avLst/>
           </a:prstGeom>
           <a:solidFill>
-            <a:srgbClr val="0B2C5E"/>
+            <a:srgbClr val="0A2456"/>
           </a:solidFill>
           <a:ln/>
         </p:spPr>
       </p:sp>
       <p:sp>
         <p:nvSpPr>
-          <p:cNvPr id="11" name="Text 9"/>
-          <p:cNvSpPr/>
-          <p:nvPr/>
-        </p:nvSpPr>
-        <p:spPr>
-          <a:xfrm>
-            <a:off x="1242944" y="2816352"/>
-            <a:ext cx="859536" cy="859536"/>
+          <p:cNvPr id="15" name="Text 13"/>
+          <p:cNvSpPr/>
+          <p:nvPr/>
+        </p:nvSpPr>
+        <p:spPr>
+          <a:xfrm>
+            <a:off x="1270376" y="2670048"/>
+            <a:ext cx="804672" cy="804672"/>
           </a:xfrm>
           <a:prstGeom prst="rect">
             <a:avLst/>
@@ -2963,7 +3061,7 @@
               <a:buNone/>
             </a:pPr>
             <a:r>
-              <a:rPr lang="en-US" sz="2700" b="1" dirty="0">
+              <a:rPr lang="en-US" sz="2600" b="1" dirty="0">
                 <a:solidFill>
                   <a:srgbClr val="FFFFFF"/>
                 </a:solidFill>
@@ -2973,20 +3071,20 @@
               </a:rPr>
               <a:t>1</a:t>
             </a:r>
-            <a:endParaRPr lang="en-US" sz="2700" dirty="0"/>
-          </a:p>
-        </p:txBody>
-      </p:sp>
-      <p:sp>
-        <p:nvSpPr>
-          <p:cNvPr id="12" name="Text 10"/>
-          <p:cNvSpPr/>
-          <p:nvPr/>
-        </p:nvSpPr>
-        <p:spPr>
-          <a:xfrm>
-            <a:off x="658368" y="3895344"/>
-            <a:ext cx="2028688" cy="274320"/>
+            <a:endParaRPr lang="en-US" sz="2600" dirty="0"/>
+          </a:p>
+        </p:txBody>
+      </p:sp>
+      <p:sp>
+        <p:nvSpPr>
+          <p:cNvPr id="16" name="Text 14"/>
+          <p:cNvSpPr/>
+          <p:nvPr/>
+        </p:nvSpPr>
+        <p:spPr>
+          <a:xfrm>
+            <a:off x="566928" y="3767328"/>
+            <a:ext cx="2211568" cy="292608"/>
           </a:xfrm>
           <a:prstGeom prst="rect">
             <a:avLst/>
@@ -3002,9 +3100,9 @@
               <a:buNone/>
             </a:pPr>
             <a:r>
-              <a:rPr lang="en-US" sz="1300" b="1" spc="70" kern="0" dirty="0">
-                <a:solidFill>
-                  <a:srgbClr val="0B2C5E"/>
+              <a:rPr lang="en-US" sz="1250" b="1" spc="70" kern="0" dirty="0">
+                <a:solidFill>
+                  <a:srgbClr val="243C8F"/>
                 </a:solidFill>
                 <a:latin typeface="Calibri" pitchFamily="34" charset="0"/>
                 <a:ea typeface="Calibri" pitchFamily="34" charset="-122"/>
@@ -3012,20 +3110,20 @@
               </a:rPr>
               <a:t>DIAGNÓSTICO</a:t>
             </a:r>
-            <a:endParaRPr lang="en-US" sz="1300" dirty="0"/>
-          </a:p>
-        </p:txBody>
-      </p:sp>
-      <p:sp>
-        <p:nvSpPr>
-          <p:cNvPr id="13" name="Text 11"/>
-          <p:cNvSpPr/>
-          <p:nvPr/>
-        </p:nvSpPr>
-        <p:spPr>
-          <a:xfrm>
-            <a:off x="768096" y="4297680"/>
-            <a:ext cx="1809232" cy="1188720"/>
+            <a:endParaRPr lang="en-US" sz="1250" dirty="0"/>
+          </a:p>
+        </p:txBody>
+      </p:sp>
+      <p:sp>
+        <p:nvSpPr>
+          <p:cNvPr id="17" name="Text 15"/>
+          <p:cNvSpPr/>
+          <p:nvPr/>
+        </p:nvSpPr>
+        <p:spPr>
+          <a:xfrm>
+            <a:off x="786384" y="4206240"/>
+            <a:ext cx="1772656" cy="1188720"/>
           </a:xfrm>
           <a:prstGeom prst="rect">
             <a:avLst/>
@@ -3046,7 +3144,7 @@
             <a:r>
               <a:rPr lang="en-US" sz="1150" dirty="0">
                 <a:solidFill>
-                  <a:srgbClr val="44566B"/>
+                  <a:srgbClr val="3B4356"/>
                 </a:solidFill>
                 <a:latin typeface="Calibri" pitchFamily="34" charset="0"/>
                 <a:ea typeface="Calibri" pitchFamily="34" charset="-122"/>
@@ -3060,58 +3158,34 @@
       </p:sp>
       <p:sp>
         <p:nvSpPr>
-          <p:cNvPr id="14" name="Shape 12"/>
-          <p:cNvSpPr/>
-          <p:nvPr/>
-        </p:nvSpPr>
-        <p:spPr>
-          <a:xfrm>
-            <a:off x="4314048" y="3246120"/>
-            <a:ext cx="1352032" cy="0"/>
-          </a:xfrm>
-          <a:prstGeom prst="line">
-            <a:avLst/>
-          </a:prstGeom>
-          <a:noFill/>
-          <a:ln w="24130">
-            <a:solidFill>
-              <a:srgbClr val="AEC2D6"/>
-            </a:solidFill>
-            <a:prstDash val="solid"/>
-            <a:tailEnd type="triangle"/>
-          </a:ln>
-        </p:spPr>
-      </p:sp>
-      <p:sp>
-        <p:nvSpPr>
-          <p:cNvPr id="15" name="Shape 13"/>
-          <p:cNvSpPr/>
-          <p:nvPr/>
-        </p:nvSpPr>
-        <p:spPr>
-          <a:xfrm>
-            <a:off x="3454512" y="2816352"/>
-            <a:ext cx="859536" cy="859536"/>
+          <p:cNvPr id="18" name="Shape 16"/>
+          <p:cNvSpPr/>
+          <p:nvPr/>
+        </p:nvSpPr>
+        <p:spPr>
+          <a:xfrm>
+            <a:off x="3481944" y="2670048"/>
+            <a:ext cx="804672" cy="804672"/>
           </a:xfrm>
           <a:prstGeom prst="ellipse">
             <a:avLst/>
           </a:prstGeom>
           <a:solidFill>
-            <a:srgbClr val="0F4382"/>
+            <a:srgbClr val="0A3070"/>
           </a:solidFill>
           <a:ln/>
         </p:spPr>
       </p:sp>
       <p:sp>
         <p:nvSpPr>
-          <p:cNvPr id="16" name="Text 14"/>
-          <p:cNvSpPr/>
-          <p:nvPr/>
-        </p:nvSpPr>
-        <p:spPr>
-          <a:xfrm>
-            <a:off x="3454512" y="2816352"/>
-            <a:ext cx="859536" cy="859536"/>
+          <p:cNvPr id="19" name="Text 17"/>
+          <p:cNvSpPr/>
+          <p:nvPr/>
+        </p:nvSpPr>
+        <p:spPr>
+          <a:xfrm>
+            <a:off x="3481944" y="2670048"/>
+            <a:ext cx="804672" cy="804672"/>
           </a:xfrm>
           <a:prstGeom prst="rect">
             <a:avLst/>
@@ -3127,7 +3201,7 @@
               <a:buNone/>
             </a:pPr>
             <a:r>
-              <a:rPr lang="en-US" sz="2700" b="1" dirty="0">
+              <a:rPr lang="en-US" sz="2600" b="1" dirty="0">
                 <a:solidFill>
                   <a:srgbClr val="FFFFFF"/>
                 </a:solidFill>
@@ -3137,20 +3211,20 @@
               </a:rPr>
               <a:t>2</a:t>
             </a:r>
-            <a:endParaRPr lang="en-US" sz="2700" dirty="0"/>
-          </a:p>
-        </p:txBody>
-      </p:sp>
-      <p:sp>
-        <p:nvSpPr>
-          <p:cNvPr id="17" name="Text 15"/>
-          <p:cNvSpPr/>
-          <p:nvPr/>
-        </p:nvSpPr>
-        <p:spPr>
-          <a:xfrm>
-            <a:off x="2869936" y="3895344"/>
-            <a:ext cx="2028688" cy="274320"/>
+            <a:endParaRPr lang="en-US" sz="2600" dirty="0"/>
+          </a:p>
+        </p:txBody>
+      </p:sp>
+      <p:sp>
+        <p:nvSpPr>
+          <p:cNvPr id="20" name="Text 18"/>
+          <p:cNvSpPr/>
+          <p:nvPr/>
+        </p:nvSpPr>
+        <p:spPr>
+          <a:xfrm>
+            <a:off x="2778496" y="3767328"/>
+            <a:ext cx="2211568" cy="292608"/>
           </a:xfrm>
           <a:prstGeom prst="rect">
             <a:avLst/>
@@ -3166,9 +3240,9 @@
               <a:buNone/>
             </a:pPr>
             <a:r>
-              <a:rPr lang="en-US" sz="1300" b="1" spc="70" kern="0" dirty="0">
-                <a:solidFill>
-                  <a:srgbClr val="0B2C5E"/>
+              <a:rPr lang="en-US" sz="1250" b="1" spc="70" kern="0" dirty="0">
+                <a:solidFill>
+                  <a:srgbClr val="243C8F"/>
                 </a:solidFill>
                 <a:latin typeface="Calibri" pitchFamily="34" charset="0"/>
                 <a:ea typeface="Calibri" pitchFamily="34" charset="-122"/>
@@ -3176,20 +3250,20 @@
               </a:rPr>
               <a:t>ESTÁNDARES</a:t>
             </a:r>
-            <a:endParaRPr lang="en-US" sz="1300" dirty="0"/>
-          </a:p>
-        </p:txBody>
-      </p:sp>
-      <p:sp>
-        <p:nvSpPr>
-          <p:cNvPr id="18" name="Text 16"/>
-          <p:cNvSpPr/>
-          <p:nvPr/>
-        </p:nvSpPr>
-        <p:spPr>
-          <a:xfrm>
-            <a:off x="2979664" y="4297680"/>
-            <a:ext cx="1809232" cy="1188720"/>
+            <a:endParaRPr lang="en-US" sz="1250" dirty="0"/>
+          </a:p>
+        </p:txBody>
+      </p:sp>
+      <p:sp>
+        <p:nvSpPr>
+          <p:cNvPr id="21" name="Text 19"/>
+          <p:cNvSpPr/>
+          <p:nvPr/>
+        </p:nvSpPr>
+        <p:spPr>
+          <a:xfrm>
+            <a:off x="2997952" y="4206240"/>
+            <a:ext cx="1772656" cy="1188720"/>
           </a:xfrm>
           <a:prstGeom prst="rect">
             <a:avLst/>
@@ -3210,7 +3284,7 @@
             <a:r>
               <a:rPr lang="en-US" sz="1150" dirty="0">
                 <a:solidFill>
-                  <a:srgbClr val="44566B"/>
+                  <a:srgbClr val="3B4356"/>
                 </a:solidFill>
                 <a:latin typeface="Calibri" pitchFamily="34" charset="0"/>
                 <a:ea typeface="Calibri" pitchFamily="34" charset="-122"/>
@@ -3224,58 +3298,57 @@
       </p:sp>
       <p:sp>
         <p:nvSpPr>
-          <p:cNvPr id="19" name="Shape 17"/>
-          <p:cNvSpPr/>
-          <p:nvPr/>
-        </p:nvSpPr>
-        <p:spPr>
-          <a:xfrm>
-            <a:off x="6525616" y="3246120"/>
-            <a:ext cx="1352032" cy="0"/>
+          <p:cNvPr id="22" name="Shape 20"/>
+          <p:cNvSpPr/>
+          <p:nvPr/>
+        </p:nvSpPr>
+        <p:spPr>
+          <a:xfrm>
+            <a:off x="2778496" y="3639312"/>
+            <a:ext cx="0" cy="1874520"/>
           </a:xfrm>
           <a:prstGeom prst="line">
             <a:avLst/>
           </a:prstGeom>
           <a:noFill/>
-          <a:ln w="24130">
+          <a:ln w="12700">
             <a:solidFill>
-              <a:srgbClr val="AEC2D6"/>
+              <a:srgbClr val="CBD5E4"/>
             </a:solidFill>
             <a:prstDash val="solid"/>
-            <a:tailEnd type="triangle"/>
           </a:ln>
         </p:spPr>
       </p:sp>
       <p:sp>
         <p:nvSpPr>
-          <p:cNvPr id="20" name="Shape 18"/>
-          <p:cNvSpPr/>
-          <p:nvPr/>
-        </p:nvSpPr>
-        <p:spPr>
-          <a:xfrm>
-            <a:off x="5666080" y="2816352"/>
-            <a:ext cx="859536" cy="859536"/>
+          <p:cNvPr id="23" name="Shape 21"/>
+          <p:cNvSpPr/>
+          <p:nvPr/>
+        </p:nvSpPr>
+        <p:spPr>
+          <a:xfrm>
+            <a:off x="5693512" y="2670048"/>
+            <a:ext cx="804672" cy="804672"/>
           </a:xfrm>
           <a:prstGeom prst="ellipse">
             <a:avLst/>
           </a:prstGeom>
           <a:solidFill>
-            <a:srgbClr val="1257A0"/>
+            <a:srgbClr val="0C4088"/>
           </a:solidFill>
           <a:ln/>
         </p:spPr>
       </p:sp>
       <p:sp>
         <p:nvSpPr>
-          <p:cNvPr id="21" name="Text 19"/>
-          <p:cNvSpPr/>
-          <p:nvPr/>
-        </p:nvSpPr>
-        <p:spPr>
-          <a:xfrm>
-            <a:off x="5666080" y="2816352"/>
-            <a:ext cx="859536" cy="859536"/>
+          <p:cNvPr id="24" name="Text 22"/>
+          <p:cNvSpPr/>
+          <p:nvPr/>
+        </p:nvSpPr>
+        <p:spPr>
+          <a:xfrm>
+            <a:off x="5693512" y="2670048"/>
+            <a:ext cx="804672" cy="804672"/>
           </a:xfrm>
           <a:prstGeom prst="rect">
             <a:avLst/>
@@ -3291,7 +3364,7 @@
               <a:buNone/>
             </a:pPr>
             <a:r>
-              <a:rPr lang="en-US" sz="2700" b="1" dirty="0">
+              <a:rPr lang="en-US" sz="2600" b="1" dirty="0">
                 <a:solidFill>
                   <a:srgbClr val="FFFFFF"/>
                 </a:solidFill>
@@ -3301,20 +3374,20 @@
               </a:rPr>
               <a:t>3</a:t>
             </a:r>
-            <a:endParaRPr lang="en-US" sz="2700" dirty="0"/>
-          </a:p>
-        </p:txBody>
-      </p:sp>
-      <p:sp>
-        <p:nvSpPr>
-          <p:cNvPr id="22" name="Text 20"/>
-          <p:cNvSpPr/>
-          <p:nvPr/>
-        </p:nvSpPr>
-        <p:spPr>
-          <a:xfrm>
-            <a:off x="5081504" y="3895344"/>
-            <a:ext cx="2028688" cy="274320"/>
+            <a:endParaRPr lang="en-US" sz="2600" dirty="0"/>
+          </a:p>
+        </p:txBody>
+      </p:sp>
+      <p:sp>
+        <p:nvSpPr>
+          <p:cNvPr id="25" name="Text 23"/>
+          <p:cNvSpPr/>
+          <p:nvPr/>
+        </p:nvSpPr>
+        <p:spPr>
+          <a:xfrm>
+            <a:off x="4990064" y="3767328"/>
+            <a:ext cx="2211568" cy="292608"/>
           </a:xfrm>
           <a:prstGeom prst="rect">
             <a:avLst/>
@@ -3330,9 +3403,9 @@
               <a:buNone/>
             </a:pPr>
             <a:r>
-              <a:rPr lang="en-US" sz="1300" b="1" spc="70" kern="0" dirty="0">
-                <a:solidFill>
-                  <a:srgbClr val="0B2C5E"/>
+              <a:rPr lang="en-US" sz="1250" b="1" spc="70" kern="0" dirty="0">
+                <a:solidFill>
+                  <a:srgbClr val="243C8F"/>
                 </a:solidFill>
                 <a:latin typeface="Calibri" pitchFamily="34" charset="0"/>
                 <a:ea typeface="Calibri" pitchFamily="34" charset="-122"/>
@@ -3340,20 +3413,20 @@
               </a:rPr>
               <a:t>CAPACIDADES</a:t>
             </a:r>
-            <a:endParaRPr lang="en-US" sz="1300" dirty="0"/>
-          </a:p>
-        </p:txBody>
-      </p:sp>
-      <p:sp>
-        <p:nvSpPr>
-          <p:cNvPr id="23" name="Text 21"/>
-          <p:cNvSpPr/>
-          <p:nvPr/>
-        </p:nvSpPr>
-        <p:spPr>
-          <a:xfrm>
-            <a:off x="5191232" y="4297680"/>
-            <a:ext cx="1809232" cy="1188720"/>
+            <a:endParaRPr lang="en-US" sz="1250" dirty="0"/>
+          </a:p>
+        </p:txBody>
+      </p:sp>
+      <p:sp>
+        <p:nvSpPr>
+          <p:cNvPr id="26" name="Text 24"/>
+          <p:cNvSpPr/>
+          <p:nvPr/>
+        </p:nvSpPr>
+        <p:spPr>
+          <a:xfrm>
+            <a:off x="5209520" y="4206240"/>
+            <a:ext cx="1772656" cy="1188720"/>
           </a:xfrm>
           <a:prstGeom prst="rect">
             <a:avLst/>
@@ -3374,7 +3447,7 @@
             <a:r>
               <a:rPr lang="en-US" sz="1150" dirty="0">
                 <a:solidFill>
-                  <a:srgbClr val="44566B"/>
+                  <a:srgbClr val="3B4356"/>
                 </a:solidFill>
                 <a:latin typeface="Calibri" pitchFamily="34" charset="0"/>
                 <a:ea typeface="Calibri" pitchFamily="34" charset="-122"/>
@@ -3388,58 +3461,57 @@
       </p:sp>
       <p:sp>
         <p:nvSpPr>
-          <p:cNvPr id="24" name="Shape 22"/>
-          <p:cNvSpPr/>
-          <p:nvPr/>
-        </p:nvSpPr>
-        <p:spPr>
-          <a:xfrm>
-            <a:off x="8737183" y="3246120"/>
-            <a:ext cx="1352032" cy="0"/>
+          <p:cNvPr id="27" name="Shape 25"/>
+          <p:cNvSpPr/>
+          <p:nvPr/>
+        </p:nvSpPr>
+        <p:spPr>
+          <a:xfrm>
+            <a:off x="4990064" y="3639312"/>
+            <a:ext cx="0" cy="1874520"/>
           </a:xfrm>
           <a:prstGeom prst="line">
             <a:avLst/>
           </a:prstGeom>
           <a:noFill/>
-          <a:ln w="24130">
+          <a:ln w="12700">
             <a:solidFill>
-              <a:srgbClr val="AEC2D6"/>
+              <a:srgbClr val="CBD5E4"/>
             </a:solidFill>
             <a:prstDash val="solid"/>
-            <a:tailEnd type="triangle"/>
           </a:ln>
         </p:spPr>
       </p:sp>
       <p:sp>
         <p:nvSpPr>
-          <p:cNvPr id="25" name="Shape 23"/>
-          <p:cNvSpPr/>
-          <p:nvPr/>
-        </p:nvSpPr>
-        <p:spPr>
-          <a:xfrm>
-            <a:off x="7877647" y="2816352"/>
-            <a:ext cx="859536" cy="859536"/>
+          <p:cNvPr id="28" name="Shape 26"/>
+          <p:cNvSpPr/>
+          <p:nvPr/>
+        </p:nvSpPr>
+        <p:spPr>
+          <a:xfrm>
+            <a:off x="7905079" y="2670048"/>
+            <a:ext cx="804672" cy="804672"/>
           </a:xfrm>
           <a:prstGeom prst="ellipse">
             <a:avLst/>
           </a:prstGeom>
           <a:solidFill>
-            <a:srgbClr val="1668B8"/>
+            <a:srgbClr val="1055A8"/>
           </a:solidFill>
           <a:ln/>
         </p:spPr>
       </p:sp>
       <p:sp>
         <p:nvSpPr>
-          <p:cNvPr id="26" name="Text 24"/>
-          <p:cNvSpPr/>
-          <p:nvPr/>
-        </p:nvSpPr>
-        <p:spPr>
-          <a:xfrm>
-            <a:off x="7877647" y="2816352"/>
-            <a:ext cx="859536" cy="859536"/>
+          <p:cNvPr id="29" name="Text 27"/>
+          <p:cNvSpPr/>
+          <p:nvPr/>
+        </p:nvSpPr>
+        <p:spPr>
+          <a:xfrm>
+            <a:off x="7905079" y="2670048"/>
+            <a:ext cx="804672" cy="804672"/>
           </a:xfrm>
           <a:prstGeom prst="rect">
             <a:avLst/>
@@ -3455,7 +3527,7 @@
               <a:buNone/>
             </a:pPr>
             <a:r>
-              <a:rPr lang="en-US" sz="2700" b="1" dirty="0">
+              <a:rPr lang="en-US" sz="2600" b="1" dirty="0">
                 <a:solidFill>
                   <a:srgbClr val="FFFFFF"/>
                 </a:solidFill>
@@ -3465,20 +3537,20 @@
               </a:rPr>
               <a:t>4</a:t>
             </a:r>
-            <a:endParaRPr lang="en-US" sz="2700" dirty="0"/>
-          </a:p>
-        </p:txBody>
-      </p:sp>
-      <p:sp>
-        <p:nvSpPr>
-          <p:cNvPr id="27" name="Text 25"/>
-          <p:cNvSpPr/>
-          <p:nvPr/>
-        </p:nvSpPr>
-        <p:spPr>
-          <a:xfrm>
-            <a:off x="7293072" y="3895344"/>
-            <a:ext cx="2028688" cy="274320"/>
+            <a:endParaRPr lang="en-US" sz="2600" dirty="0"/>
+          </a:p>
+        </p:txBody>
+      </p:sp>
+      <p:sp>
+        <p:nvSpPr>
+          <p:cNvPr id="30" name="Text 28"/>
+          <p:cNvSpPr/>
+          <p:nvPr/>
+        </p:nvSpPr>
+        <p:spPr>
+          <a:xfrm>
+            <a:off x="7201632" y="3767328"/>
+            <a:ext cx="2211568" cy="292608"/>
           </a:xfrm>
           <a:prstGeom prst="rect">
             <a:avLst/>
@@ -3494,9 +3566,9 @@
               <a:buNone/>
             </a:pPr>
             <a:r>
-              <a:rPr lang="en-US" sz="1300" b="1" spc="70" kern="0" dirty="0">
-                <a:solidFill>
-                  <a:srgbClr val="0B2C5E"/>
+              <a:rPr lang="en-US" sz="1250" b="1" spc="70" kern="0" dirty="0">
+                <a:solidFill>
+                  <a:srgbClr val="243C8F"/>
                 </a:solidFill>
                 <a:latin typeface="Calibri" pitchFamily="34" charset="0"/>
                 <a:ea typeface="Calibri" pitchFamily="34" charset="-122"/>
@@ -3504,20 +3576,20 @@
               </a:rPr>
               <a:t>PROYECTOS</a:t>
             </a:r>
-            <a:endParaRPr lang="en-US" sz="1300" dirty="0"/>
-          </a:p>
-        </p:txBody>
-      </p:sp>
-      <p:sp>
-        <p:nvSpPr>
-          <p:cNvPr id="28" name="Text 26"/>
-          <p:cNvSpPr/>
-          <p:nvPr/>
-        </p:nvSpPr>
-        <p:spPr>
-          <a:xfrm>
-            <a:off x="7402800" y="4297680"/>
-            <a:ext cx="1809232" cy="1188720"/>
+            <a:endParaRPr lang="en-US" sz="1250" dirty="0"/>
+          </a:p>
+        </p:txBody>
+      </p:sp>
+      <p:sp>
+        <p:nvSpPr>
+          <p:cNvPr id="31" name="Text 29"/>
+          <p:cNvSpPr/>
+          <p:nvPr/>
+        </p:nvSpPr>
+        <p:spPr>
+          <a:xfrm>
+            <a:off x="7421088" y="4206240"/>
+            <a:ext cx="1772656" cy="1188720"/>
           </a:xfrm>
           <a:prstGeom prst="rect">
             <a:avLst/>
@@ -3538,7 +3610,7 @@
             <a:r>
               <a:rPr lang="en-US" sz="1150" dirty="0">
                 <a:solidFill>
-                  <a:srgbClr val="44566B"/>
+                  <a:srgbClr val="3B4356"/>
                 </a:solidFill>
                 <a:latin typeface="Calibri" pitchFamily="34" charset="0"/>
                 <a:ea typeface="Calibri" pitchFamily="34" charset="-122"/>
@@ -3552,34 +3624,57 @@
       </p:sp>
       <p:sp>
         <p:nvSpPr>
-          <p:cNvPr id="29" name="Shape 27"/>
-          <p:cNvSpPr/>
-          <p:nvPr/>
-        </p:nvSpPr>
-        <p:spPr>
-          <a:xfrm>
-            <a:off x="10089215" y="2816352"/>
-            <a:ext cx="859536" cy="859536"/>
+          <p:cNvPr id="32" name="Shape 30"/>
+          <p:cNvSpPr/>
+          <p:nvPr/>
+        </p:nvSpPr>
+        <p:spPr>
+          <a:xfrm>
+            <a:off x="7201632" y="3639312"/>
+            <a:ext cx="0" cy="1874520"/>
+          </a:xfrm>
+          <a:prstGeom prst="line">
+            <a:avLst/>
+          </a:prstGeom>
+          <a:noFill/>
+          <a:ln w="12700">
+            <a:solidFill>
+              <a:srgbClr val="CBD5E4"/>
+            </a:solidFill>
+            <a:prstDash val="solid"/>
+          </a:ln>
+        </p:spPr>
+      </p:sp>
+      <p:sp>
+        <p:nvSpPr>
+          <p:cNvPr id="33" name="Shape 31"/>
+          <p:cNvSpPr/>
+          <p:nvPr/>
+        </p:nvSpPr>
+        <p:spPr>
+          <a:xfrm>
+            <a:off x="10116647" y="2670048"/>
+            <a:ext cx="804672" cy="804672"/>
           </a:xfrm>
           <a:prstGeom prst="ellipse">
             <a:avLst/>
           </a:prstGeom>
           <a:solidFill>
-            <a:srgbClr val="2E9BF0"/>
+            <a:srgbClr val="2E86D8"/>
           </a:solidFill>
           <a:ln/>
         </p:spPr>
       </p:sp>
       <p:sp>
         <p:nvSpPr>
-          <p:cNvPr id="30" name="Text 28"/>
-          <p:cNvSpPr/>
-          <p:nvPr/>
-        </p:nvSpPr>
-        <p:spPr>
-          <a:xfrm>
-            <a:off x="10089215" y="2816352"/>
-            <a:ext cx="859536" cy="859536"/>
+          <p:cNvPr id="34" name="Text 32"/>
+          <p:cNvSpPr/>
+          <p:nvPr/>
+        </p:nvSpPr>
+        <p:spPr>
+          <a:xfrm>
+            <a:off x="10116647" y="2670048"/>
+            <a:ext cx="804672" cy="804672"/>
           </a:xfrm>
           <a:prstGeom prst="rect">
             <a:avLst/>
@@ -3595,7 +3690,7 @@
               <a:buNone/>
             </a:pPr>
             <a:r>
-              <a:rPr lang="en-US" sz="2700" b="1" dirty="0">
+              <a:rPr lang="en-US" sz="2600" b="1" dirty="0">
                 <a:solidFill>
                   <a:srgbClr val="FFFFFF"/>
                 </a:solidFill>
@@ -3605,20 +3700,20 @@
               </a:rPr>
               <a:t>5</a:t>
             </a:r>
-            <a:endParaRPr lang="en-US" sz="2700" dirty="0"/>
-          </a:p>
-        </p:txBody>
-      </p:sp>
-      <p:sp>
-        <p:nvSpPr>
-          <p:cNvPr id="31" name="Text 29"/>
-          <p:cNvSpPr/>
-          <p:nvPr/>
-        </p:nvSpPr>
-        <p:spPr>
-          <a:xfrm>
-            <a:off x="9504639" y="3895344"/>
-            <a:ext cx="2028688" cy="274320"/>
+            <a:endParaRPr lang="en-US" sz="2600" dirty="0"/>
+          </a:p>
+        </p:txBody>
+      </p:sp>
+      <p:sp>
+        <p:nvSpPr>
+          <p:cNvPr id="35" name="Text 33"/>
+          <p:cNvSpPr/>
+          <p:nvPr/>
+        </p:nvSpPr>
+        <p:spPr>
+          <a:xfrm>
+            <a:off x="9413199" y="3767328"/>
+            <a:ext cx="2211568" cy="292608"/>
           </a:xfrm>
           <a:prstGeom prst="rect">
             <a:avLst/>
@@ -3634,9 +3729,9 @@
               <a:buNone/>
             </a:pPr>
             <a:r>
-              <a:rPr lang="en-US" sz="1300" b="1" spc="70" kern="0" dirty="0">
-                <a:solidFill>
-                  <a:srgbClr val="0B2C5E"/>
+              <a:rPr lang="en-US" sz="1250" b="1" spc="70" kern="0" dirty="0">
+                <a:solidFill>
+                  <a:srgbClr val="243C8F"/>
                 </a:solidFill>
                 <a:latin typeface="Calibri" pitchFamily="34" charset="0"/>
                 <a:ea typeface="Calibri" pitchFamily="34" charset="-122"/>
@@ -3644,20 +3739,20 @@
               </a:rPr>
               <a:t>MEDICIÓN</a:t>
             </a:r>
-            <a:endParaRPr lang="en-US" sz="1300" dirty="0"/>
-          </a:p>
-        </p:txBody>
-      </p:sp>
-      <p:sp>
-        <p:nvSpPr>
-          <p:cNvPr id="32" name="Text 30"/>
-          <p:cNvSpPr/>
-          <p:nvPr/>
-        </p:nvSpPr>
-        <p:spPr>
-          <a:xfrm>
-            <a:off x="9614367" y="4297680"/>
-            <a:ext cx="1809232" cy="1188720"/>
+            <a:endParaRPr lang="en-US" sz="1250" dirty="0"/>
+          </a:p>
+        </p:txBody>
+      </p:sp>
+      <p:sp>
+        <p:nvSpPr>
+          <p:cNvPr id="36" name="Text 34"/>
+          <p:cNvSpPr/>
+          <p:nvPr/>
+        </p:nvSpPr>
+        <p:spPr>
+          <a:xfrm>
+            <a:off x="9632655" y="4206240"/>
+            <a:ext cx="1772656" cy="1188720"/>
           </a:xfrm>
           <a:prstGeom prst="rect">
             <a:avLst/>
@@ -3678,7 +3773,7 @@
             <a:r>
               <a:rPr lang="en-US" sz="1150" dirty="0">
                 <a:solidFill>
-                  <a:srgbClr val="44566B"/>
+                  <a:srgbClr val="3B4356"/>
                 </a:solidFill>
                 <a:latin typeface="Calibri" pitchFamily="34" charset="0"/>
                 <a:ea typeface="Calibri" pitchFamily="34" charset="-122"/>
@@ -3689,6 +3784,29 @@
             <a:endParaRPr lang="en-US" sz="1150" dirty="0"/>
           </a:p>
         </p:txBody>
+      </p:sp>
+      <p:sp>
+        <p:nvSpPr>
+          <p:cNvPr id="37" name="Shape 35"/>
+          <p:cNvSpPr/>
+          <p:nvPr/>
+        </p:nvSpPr>
+        <p:spPr>
+          <a:xfrm>
+            <a:off x="9413199" y="3639312"/>
+            <a:ext cx="0" cy="1874520"/>
+          </a:xfrm>
+          <a:prstGeom prst="line">
+            <a:avLst/>
+          </a:prstGeom>
+          <a:noFill/>
+          <a:ln w="12700">
+            <a:solidFill>
+              <a:srgbClr val="CBD5E4"/>
+            </a:solidFill>
+            <a:prstDash val="solid"/>
+          </a:ln>
+        </p:spPr>
       </p:sp>
     </p:spTree>
   </p:cSld>
@@ -3704,7 +3822,7 @@
     <p:bg>
       <p:bgPr>
         <a:solidFill>
-          <a:srgbClr val="07203F"/>
+          <a:srgbClr val="04173F"/>
         </a:solidFill>
       </p:bgPr>
     </p:bg>
@@ -3737,14 +3855,14 @@
             <a:avLst/>
           </a:prstGeom>
           <a:solidFill>
-            <a:srgbClr val="07203F"/>
+            <a:srgbClr val="04173F"/>
           </a:solidFill>
           <a:ln/>
         </p:spPr>
       </p:sp>
       <p:pic>
         <p:nvPicPr>
-          <p:cNvPr id="3" name="Image 0" descr="/home/user/bolt.diy/presentaciones/indotel-ciudades-inteligentes/src/derived/couple_opt.png">    </p:cNvPr>
+          <p:cNvPr id="3" name="Image 0" descr="/home/user/bolt.diy/presentaciones/indotel-ciudades-inteligentes/src/derived/couple_soft.jpg">    </p:cNvPr>
           <p:cNvPicPr>
             <a:picLocks noChangeAspect="1"/>
           </p:cNvPicPr>
@@ -3758,8 +3876,8 @@
         </p:blipFill>
         <p:spPr>
           <a:xfrm>
-            <a:off x="7040880" y="566928"/>
-            <a:ext cx="4617720" cy="4297680"/>
+            <a:off x="6720840" y="0"/>
+            <a:ext cx="5486400" cy="6839712"/>
           </a:xfrm>
           <a:prstGeom prst="rect">
             <a:avLst/>
@@ -3774,7 +3892,7 @@
         </p:nvSpPr>
         <p:spPr>
           <a:xfrm>
-            <a:off x="566928" y="256032"/>
+            <a:off x="566928" y="237744"/>
             <a:ext cx="3657600" cy="274320"/>
           </a:xfrm>
           <a:prstGeom prst="rect">
@@ -3791,7 +3909,7 @@
               <a:buNone/>
             </a:pPr>
             <a:r>
-              <a:rPr lang="en-US" sz="1500" b="1" spc="140" kern="0" dirty="0">
+              <a:rPr lang="en-US" sz="1500" b="1" spc="130" kern="0" dirty="0">
                 <a:solidFill>
                   <a:srgbClr val="FFFFFF"/>
                 </a:solidFill>
@@ -3813,7 +3931,7 @@
         </p:nvSpPr>
         <p:spPr>
           <a:xfrm>
-            <a:off x="566928" y="534924"/>
+            <a:off x="566928" y="516636"/>
             <a:ext cx="3657600" cy="219456"/>
           </a:xfrm>
           <a:prstGeom prst="rect">
@@ -3832,7 +3950,7 @@
             <a:r>
               <a:rPr lang="en-US" sz="950" dirty="0">
                 <a:solidFill>
-                  <a:srgbClr val="BBD7F2"/>
+                  <a:srgbClr val="C3D6EE"/>
                 </a:solidFill>
                 <a:latin typeface="Calibri" pitchFamily="34" charset="0"/>
                 <a:ea typeface="Calibri" pitchFamily="34" charset="-122"/>
@@ -3853,7 +3971,7 @@
         <p:spPr>
           <a:xfrm>
             <a:off x="566928" y="1572768"/>
-            <a:ext cx="5852160" cy="548640"/>
+            <a:ext cx="5943600" cy="530352"/>
           </a:xfrm>
           <a:prstGeom prst="rect">
             <a:avLst/>
@@ -3891,8 +4009,8 @@
         </p:nvSpPr>
         <p:spPr>
           <a:xfrm>
-            <a:off x="566928" y="2249424"/>
-            <a:ext cx="5852160" cy="411480"/>
+            <a:off x="566928" y="2212848"/>
+            <a:ext cx="5943600" cy="457200"/>
           </a:xfrm>
           <a:prstGeom prst="rect">
             <a:avLst/>
@@ -3908,9 +4026,9 @@
               <a:buNone/>
             </a:pPr>
             <a:r>
-              <a:rPr lang="en-US" sz="1800" dirty="0">
-                <a:solidFill>
-                  <a:srgbClr val="2E9BF0"/>
+              <a:rPr lang="en-US" sz="1900" b="1" dirty="0">
+                <a:solidFill>
+                  <a:srgbClr val="FFFFFF"/>
                 </a:solidFill>
                 <a:latin typeface="Calibri" pitchFamily="34" charset="0"/>
                 <a:ea typeface="Calibri" pitchFamily="34" charset="-122"/>
@@ -3918,51 +4036,29 @@
               </a:rPr>
               <a:t>Mejores servicios. Mejor calidad de vida.</a:t>
             </a:r>
-            <a:endParaRPr lang="en-US" sz="1800" dirty="0"/>
-          </a:p>
-        </p:txBody>
-      </p:sp>
-      <p:sp>
-        <p:nvSpPr>
-          <p:cNvPr id="8" name="Text 5"/>
-          <p:cNvSpPr/>
-          <p:nvPr/>
-        </p:nvSpPr>
-        <p:spPr>
-          <a:xfrm>
-            <a:off x="566928" y="2926080"/>
-            <a:ext cx="5212080" cy="822960"/>
-          </a:xfrm>
-          <a:prstGeom prst="rect">
-            <a:avLst/>
-          </a:prstGeom>
-          <a:noFill/>
-          <a:ln/>
-        </p:spPr>
-        <p:txBody>
-          <a:bodyPr wrap="square" lIns="0" tIns="0" rIns="0" bIns="0" rtlCol="0" anchor="t"/>
-          <a:lstStyle/>
-          <a:p>
-            <a:pPr indent="0" marL="0">
-              <a:lnSpc>
-                <a:spcPts val="1800"/>
-              </a:lnSpc>
-              <a:buNone/>
-            </a:pPr>
-            <a:r>
-              <a:rPr lang="en-US" sz="1250" dirty="0">
-                <a:solidFill>
-                  <a:srgbClr val="BBD7F2"/>
-                </a:solidFill>
-                <a:latin typeface="Calibri" pitchFamily="34" charset="0"/>
-                <a:ea typeface="Calibri" pitchFamily="34" charset="-122"/>
-                <a:cs typeface="Calibri" pitchFamily="34" charset="-120"/>
-              </a:rPr>
-              <a:t>El instrumento estratégico se mide donde importa: en el servicio diario que recibe cada ciudadano dominicano.</a:t>
-            </a:r>
-            <a:endParaRPr lang="en-US" sz="1250" dirty="0"/>
-          </a:p>
-        </p:txBody>
+            <a:endParaRPr lang="en-US" sz="1900" dirty="0"/>
+          </a:p>
+        </p:txBody>
+      </p:sp>
+      <p:sp>
+        <p:nvSpPr>
+          <p:cNvPr id="8" name="Shape 5"/>
+          <p:cNvSpPr/>
+          <p:nvPr/>
+        </p:nvSpPr>
+        <p:spPr>
+          <a:xfrm>
+            <a:off x="566928" y="2907792"/>
+            <a:ext cx="1371600" cy="41148"/>
+          </a:xfrm>
+          <a:prstGeom prst="rect">
+            <a:avLst/>
+          </a:prstGeom>
+          <a:solidFill>
+            <a:srgbClr val="3AA0F5"/>
+          </a:solidFill>
+          <a:ln/>
+        </p:spPr>
       </p:sp>
       <p:pic>
         <p:nvPicPr>
@@ -3980,8 +4076,8 @@
         </p:blipFill>
         <p:spPr>
           <a:xfrm>
-            <a:off x="1259815" y="5321808"/>
-            <a:ext cx="457200" cy="457200"/>
+            <a:off x="846582" y="3529584"/>
+            <a:ext cx="438912" cy="438912"/>
           </a:xfrm>
           <a:prstGeom prst="rect">
             <a:avLst/>
@@ -3996,8 +4092,8 @@
         </p:nvSpPr>
         <p:spPr>
           <a:xfrm>
-            <a:off x="621792" y="5925312"/>
-            <a:ext cx="1733245" cy="548640"/>
+            <a:off x="594360" y="4114800"/>
+            <a:ext cx="943356" cy="603504"/>
           </a:xfrm>
           <a:prstGeom prst="rect">
             <a:avLst/>
@@ -4011,14 +4107,14 @@
           <a:p>
             <a:pPr algn="ctr" indent="0" marL="0">
               <a:lnSpc>
-                <a:spcPts val="1400"/>
+                <a:spcPts val="1250"/>
               </a:lnSpc>
               <a:buNone/>
             </a:pPr>
             <a:r>
-              <a:rPr lang="en-US" sz="1050" dirty="0">
-                <a:solidFill>
-                  <a:srgbClr val="E6EEF7"/>
+              <a:rPr lang="en-US" sz="950" dirty="0">
+                <a:solidFill>
+                  <a:srgbClr val="DCE7F5"/>
                 </a:solidFill>
                 <a:latin typeface="Calibri" pitchFamily="34" charset="0"/>
                 <a:ea typeface="Calibri" pitchFamily="34" charset="-122"/>
@@ -4026,19 +4122,19 @@
               </a:rPr>
               <a:t>Salud</a:t>
             </a:r>
-            <a:endParaRPr lang="en-US" sz="1050" dirty="0"/>
+            <a:endParaRPr lang="en-US" sz="950" dirty="0"/>
           </a:p>
           <a:p>
             <a:pPr algn="ctr" indent="0" marL="0">
               <a:lnSpc>
-                <a:spcPts val="1400"/>
+                <a:spcPts val="1250"/>
               </a:lnSpc>
               <a:buNone/>
             </a:pPr>
             <a:r>
-              <a:rPr lang="en-US" sz="1050" dirty="0">
-                <a:solidFill>
-                  <a:srgbClr val="E6EEF7"/>
+              <a:rPr lang="en-US" sz="950" dirty="0">
+                <a:solidFill>
+                  <a:srgbClr val="DCE7F5"/>
                 </a:solidFill>
                 <a:latin typeface="Calibri" pitchFamily="34" charset="0"/>
                 <a:ea typeface="Calibri" pitchFamily="34" charset="-122"/>
@@ -4046,7 +4142,7 @@
               </a:rPr>
               <a:t>digital</a:t>
             </a:r>
-            <a:endParaRPr lang="en-US" sz="1050" dirty="0"/>
+            <a:endParaRPr lang="en-US" sz="950" dirty="0"/>
           </a:p>
         </p:txBody>
       </p:sp>
@@ -4066,8 +4162,8 @@
         </p:blipFill>
         <p:spPr>
           <a:xfrm>
-            <a:off x="3102788" y="5321808"/>
-            <a:ext cx="457200" cy="457200"/>
+            <a:off x="1844802" y="3529584"/>
+            <a:ext cx="438912" cy="438912"/>
           </a:xfrm>
           <a:prstGeom prst="rect">
             <a:avLst/>
@@ -4082,8 +4178,8 @@
         </p:nvSpPr>
         <p:spPr>
           <a:xfrm>
-            <a:off x="2464765" y="5925312"/>
-            <a:ext cx="1733245" cy="548640"/>
+            <a:off x="1592580" y="4114800"/>
+            <a:ext cx="943356" cy="603504"/>
           </a:xfrm>
           <a:prstGeom prst="rect">
             <a:avLst/>
@@ -4097,14 +4193,14 @@
           <a:p>
             <a:pPr algn="ctr" indent="0" marL="0">
               <a:lnSpc>
-                <a:spcPts val="1400"/>
+                <a:spcPts val="1250"/>
               </a:lnSpc>
               <a:buNone/>
             </a:pPr>
             <a:r>
-              <a:rPr lang="en-US" sz="1050" dirty="0">
-                <a:solidFill>
-                  <a:srgbClr val="E6EEF7"/>
+              <a:rPr lang="en-US" sz="950" dirty="0">
+                <a:solidFill>
+                  <a:srgbClr val="DCE7F5"/>
                 </a:solidFill>
                 <a:latin typeface="Calibri" pitchFamily="34" charset="0"/>
                 <a:ea typeface="Calibri" pitchFamily="34" charset="-122"/>
@@ -4112,19 +4208,19 @@
               </a:rPr>
               <a:t>Movilidad</a:t>
             </a:r>
-            <a:endParaRPr lang="en-US" sz="1050" dirty="0"/>
+            <a:endParaRPr lang="en-US" sz="950" dirty="0"/>
           </a:p>
           <a:p>
             <a:pPr algn="ctr" indent="0" marL="0">
               <a:lnSpc>
-                <a:spcPts val="1400"/>
+                <a:spcPts val="1250"/>
               </a:lnSpc>
               <a:buNone/>
             </a:pPr>
             <a:r>
-              <a:rPr lang="en-US" sz="1050" dirty="0">
-                <a:solidFill>
-                  <a:srgbClr val="E6EEF7"/>
+              <a:rPr lang="en-US" sz="950" dirty="0">
+                <a:solidFill>
+                  <a:srgbClr val="DCE7F5"/>
                 </a:solidFill>
                 <a:latin typeface="Calibri" pitchFamily="34" charset="0"/>
                 <a:ea typeface="Calibri" pitchFamily="34" charset="-122"/>
@@ -4132,7 +4228,7 @@
               </a:rPr>
               <a:t>inteligente</a:t>
             </a:r>
-            <a:endParaRPr lang="en-US" sz="1050" dirty="0"/>
+            <a:endParaRPr lang="en-US" sz="950" dirty="0"/>
           </a:p>
         </p:txBody>
       </p:sp>
@@ -4144,8 +4240,8 @@
         </p:nvSpPr>
         <p:spPr>
           <a:xfrm>
-            <a:off x="2409901" y="5303520"/>
-            <a:ext cx="0" cy="1143000"/>
+            <a:off x="1565148" y="3456432"/>
+            <a:ext cx="0" cy="1371600"/>
           </a:xfrm>
           <a:prstGeom prst="line">
             <a:avLst/>
@@ -4154,7 +4250,7 @@
           <a:ln w="12700">
             <a:solidFill>
               <a:srgbClr val="FFFFFF">
-                <a:alpha val="22000"/>
+                <a:alpha val="20000"/>
               </a:srgbClr>
             </a:solidFill>
             <a:prstDash val="solid"/>
@@ -4177,8 +4273,8 @@
         </p:blipFill>
         <p:spPr>
           <a:xfrm>
-            <a:off x="4945761" y="5321808"/>
-            <a:ext cx="457200" cy="457200"/>
+            <a:off x="2843022" y="3529584"/>
+            <a:ext cx="438912" cy="438912"/>
           </a:xfrm>
           <a:prstGeom prst="rect">
             <a:avLst/>
@@ -4193,8 +4289,8 @@
         </p:nvSpPr>
         <p:spPr>
           <a:xfrm>
-            <a:off x="4307738" y="5925312"/>
-            <a:ext cx="1733245" cy="548640"/>
+            <a:off x="2590800" y="4114800"/>
+            <a:ext cx="943356" cy="603504"/>
           </a:xfrm>
           <a:prstGeom prst="rect">
             <a:avLst/>
@@ -4208,14 +4304,14 @@
           <a:p>
             <a:pPr algn="ctr" indent="0" marL="0">
               <a:lnSpc>
-                <a:spcPts val="1400"/>
+                <a:spcPts val="1250"/>
               </a:lnSpc>
               <a:buNone/>
             </a:pPr>
             <a:r>
-              <a:rPr lang="en-US" sz="1050" dirty="0">
-                <a:solidFill>
-                  <a:srgbClr val="E6EEF7"/>
+              <a:rPr lang="en-US" sz="950" dirty="0">
+                <a:solidFill>
+                  <a:srgbClr val="DCE7F5"/>
                 </a:solidFill>
                 <a:latin typeface="Calibri" pitchFamily="34" charset="0"/>
                 <a:ea typeface="Calibri" pitchFamily="34" charset="-122"/>
@@ -4223,19 +4319,19 @@
               </a:rPr>
               <a:t>Seguridad</a:t>
             </a:r>
-            <a:endParaRPr lang="en-US" sz="1050" dirty="0"/>
+            <a:endParaRPr lang="en-US" sz="950" dirty="0"/>
           </a:p>
           <a:p>
             <a:pPr algn="ctr" indent="0" marL="0">
               <a:lnSpc>
-                <a:spcPts val="1400"/>
+                <a:spcPts val="1250"/>
               </a:lnSpc>
               <a:buNone/>
             </a:pPr>
             <a:r>
-              <a:rPr lang="en-US" sz="1050" dirty="0">
-                <a:solidFill>
-                  <a:srgbClr val="E6EEF7"/>
+              <a:rPr lang="en-US" sz="950" dirty="0">
+                <a:solidFill>
+                  <a:srgbClr val="DCE7F5"/>
                 </a:solidFill>
                 <a:latin typeface="Calibri" pitchFamily="34" charset="0"/>
                 <a:ea typeface="Calibri" pitchFamily="34" charset="-122"/>
@@ -4243,7 +4339,7 @@
               </a:rPr>
               <a:t>ciudadana</a:t>
             </a:r>
-            <a:endParaRPr lang="en-US" sz="1050" dirty="0"/>
+            <a:endParaRPr lang="en-US" sz="950" dirty="0"/>
           </a:p>
         </p:txBody>
       </p:sp>
@@ -4255,8 +4351,8 @@
         </p:nvSpPr>
         <p:spPr>
           <a:xfrm>
-            <a:off x="4252874" y="5303520"/>
-            <a:ext cx="0" cy="1143000"/>
+            <a:off x="2563368" y="3456432"/>
+            <a:ext cx="0" cy="1371600"/>
           </a:xfrm>
           <a:prstGeom prst="line">
             <a:avLst/>
@@ -4265,7 +4361,7 @@
           <a:ln w="12700">
             <a:solidFill>
               <a:srgbClr val="FFFFFF">
-                <a:alpha val="22000"/>
+                <a:alpha val="20000"/>
               </a:srgbClr>
             </a:solidFill>
             <a:prstDash val="solid"/>
@@ -4288,8 +4384,8 @@
         </p:blipFill>
         <p:spPr>
           <a:xfrm>
-            <a:off x="6788734" y="5321808"/>
-            <a:ext cx="457200" cy="457200"/>
+            <a:off x="3841242" y="3529584"/>
+            <a:ext cx="438912" cy="438912"/>
           </a:xfrm>
           <a:prstGeom prst="rect">
             <a:avLst/>
@@ -4304,8 +4400,8 @@
         </p:nvSpPr>
         <p:spPr>
           <a:xfrm>
-            <a:off x="6150712" y="5925312"/>
-            <a:ext cx="1733245" cy="548640"/>
+            <a:off x="3589020" y="4114800"/>
+            <a:ext cx="943356" cy="603504"/>
           </a:xfrm>
           <a:prstGeom prst="rect">
             <a:avLst/>
@@ -4319,14 +4415,14 @@
           <a:p>
             <a:pPr algn="ctr" indent="0" marL="0">
               <a:lnSpc>
-                <a:spcPts val="1400"/>
+                <a:spcPts val="1250"/>
               </a:lnSpc>
               <a:buNone/>
             </a:pPr>
             <a:r>
-              <a:rPr lang="en-US" sz="1050" dirty="0">
-                <a:solidFill>
-                  <a:srgbClr val="E6EEF7"/>
+              <a:rPr lang="en-US" sz="950" dirty="0">
+                <a:solidFill>
+                  <a:srgbClr val="DCE7F5"/>
                 </a:solidFill>
                 <a:latin typeface="Calibri" pitchFamily="34" charset="0"/>
                 <a:ea typeface="Calibri" pitchFamily="34" charset="-122"/>
@@ -4334,19 +4430,19 @@
               </a:rPr>
               <a:t>Alumbrado</a:t>
             </a:r>
-            <a:endParaRPr lang="en-US" sz="1050" dirty="0"/>
+            <a:endParaRPr lang="en-US" sz="950" dirty="0"/>
           </a:p>
           <a:p>
             <a:pPr algn="ctr" indent="0" marL="0">
               <a:lnSpc>
-                <a:spcPts val="1400"/>
+                <a:spcPts val="1250"/>
               </a:lnSpc>
               <a:buNone/>
             </a:pPr>
             <a:r>
-              <a:rPr lang="en-US" sz="1050" dirty="0">
-                <a:solidFill>
-                  <a:srgbClr val="E6EEF7"/>
+              <a:rPr lang="en-US" sz="950" dirty="0">
+                <a:solidFill>
+                  <a:srgbClr val="DCE7F5"/>
                 </a:solidFill>
                 <a:latin typeface="Calibri" pitchFamily="34" charset="0"/>
                 <a:ea typeface="Calibri" pitchFamily="34" charset="-122"/>
@@ -4354,7 +4450,7 @@
               </a:rPr>
               <a:t>eficiente</a:t>
             </a:r>
-            <a:endParaRPr lang="en-US" sz="1050" dirty="0"/>
+            <a:endParaRPr lang="en-US" sz="950" dirty="0"/>
           </a:p>
         </p:txBody>
       </p:sp>
@@ -4366,8 +4462,8 @@
         </p:nvSpPr>
         <p:spPr>
           <a:xfrm>
-            <a:off x="6095848" y="5303520"/>
-            <a:ext cx="0" cy="1143000"/>
+            <a:off x="3561588" y="3456432"/>
+            <a:ext cx="0" cy="1371600"/>
           </a:xfrm>
           <a:prstGeom prst="line">
             <a:avLst/>
@@ -4376,7 +4472,7 @@
           <a:ln w="12700">
             <a:solidFill>
               <a:srgbClr val="FFFFFF">
-                <a:alpha val="22000"/>
+                <a:alpha val="20000"/>
               </a:srgbClr>
             </a:solidFill>
             <a:prstDash val="solid"/>
@@ -4399,8 +4495,8 @@
         </p:blipFill>
         <p:spPr>
           <a:xfrm>
-            <a:off x="8631707" y="5321808"/>
-            <a:ext cx="457200" cy="457200"/>
+            <a:off x="4839462" y="3529584"/>
+            <a:ext cx="438912" cy="438912"/>
           </a:xfrm>
           <a:prstGeom prst="rect">
             <a:avLst/>
@@ -4415,8 +4511,8 @@
         </p:nvSpPr>
         <p:spPr>
           <a:xfrm>
-            <a:off x="7993685" y="5925312"/>
-            <a:ext cx="1733245" cy="548640"/>
+            <a:off x="4587240" y="4114800"/>
+            <a:ext cx="943356" cy="603504"/>
           </a:xfrm>
           <a:prstGeom prst="rect">
             <a:avLst/>
@@ -4430,14 +4526,14 @@
           <a:p>
             <a:pPr algn="ctr" indent="0" marL="0">
               <a:lnSpc>
-                <a:spcPts val="1400"/>
+                <a:spcPts val="1250"/>
               </a:lnSpc>
               <a:buNone/>
             </a:pPr>
             <a:r>
-              <a:rPr lang="en-US" sz="1050" dirty="0">
-                <a:solidFill>
-                  <a:srgbClr val="E6EEF7"/>
+              <a:rPr lang="en-US" sz="950" dirty="0">
+                <a:solidFill>
+                  <a:srgbClr val="DCE7F5"/>
                 </a:solidFill>
                 <a:latin typeface="Calibri" pitchFamily="34" charset="0"/>
                 <a:ea typeface="Calibri" pitchFamily="34" charset="-122"/>
@@ -4445,19 +4541,19 @@
               </a:rPr>
               <a:t>Medio ambiente</a:t>
             </a:r>
-            <a:endParaRPr lang="en-US" sz="1050" dirty="0"/>
+            <a:endParaRPr lang="en-US" sz="950" dirty="0"/>
           </a:p>
           <a:p>
             <a:pPr algn="ctr" indent="0" marL="0">
               <a:lnSpc>
-                <a:spcPts val="1400"/>
+                <a:spcPts val="1250"/>
               </a:lnSpc>
               <a:buNone/>
             </a:pPr>
             <a:r>
-              <a:rPr lang="en-US" sz="1050" dirty="0">
-                <a:solidFill>
-                  <a:srgbClr val="E6EEF7"/>
+              <a:rPr lang="en-US" sz="950" dirty="0">
+                <a:solidFill>
+                  <a:srgbClr val="DCE7F5"/>
                 </a:solidFill>
                 <a:latin typeface="Calibri" pitchFamily="34" charset="0"/>
                 <a:ea typeface="Calibri" pitchFamily="34" charset="-122"/>
@@ -4465,7 +4561,7 @@
               </a:rPr>
               <a:t>sostenible</a:t>
             </a:r>
-            <a:endParaRPr lang="en-US" sz="1050" dirty="0"/>
+            <a:endParaRPr lang="en-US" sz="950" dirty="0"/>
           </a:p>
         </p:txBody>
       </p:sp>
@@ -4477,8 +4573,8 @@
         </p:nvSpPr>
         <p:spPr>
           <a:xfrm>
-            <a:off x="7938821" y="5303520"/>
-            <a:ext cx="0" cy="1143000"/>
+            <a:off x="4559808" y="3456432"/>
+            <a:ext cx="0" cy="1371600"/>
           </a:xfrm>
           <a:prstGeom prst="line">
             <a:avLst/>
@@ -4487,7 +4583,7 @@
           <a:ln w="12700">
             <a:solidFill>
               <a:srgbClr val="FFFFFF">
-                <a:alpha val="22000"/>
+                <a:alpha val="20000"/>
               </a:srgbClr>
             </a:solidFill>
             <a:prstDash val="solid"/>
@@ -4510,8 +4606,8 @@
         </p:blipFill>
         <p:spPr>
           <a:xfrm>
-            <a:off x="10474681" y="5321808"/>
-            <a:ext cx="457200" cy="457200"/>
+            <a:off x="5837682" y="3529584"/>
+            <a:ext cx="438912" cy="438912"/>
           </a:xfrm>
           <a:prstGeom prst="rect">
             <a:avLst/>
@@ -4526,8 +4622,8 @@
         </p:nvSpPr>
         <p:spPr>
           <a:xfrm>
-            <a:off x="9836658" y="5925312"/>
-            <a:ext cx="1733245" cy="548640"/>
+            <a:off x="5585460" y="4114800"/>
+            <a:ext cx="943356" cy="603504"/>
           </a:xfrm>
           <a:prstGeom prst="rect">
             <a:avLst/>
@@ -4541,14 +4637,14 @@
           <a:p>
             <a:pPr algn="ctr" indent="0" marL="0">
               <a:lnSpc>
-                <a:spcPts val="1400"/>
+                <a:spcPts val="1250"/>
               </a:lnSpc>
               <a:buNone/>
             </a:pPr>
             <a:r>
-              <a:rPr lang="en-US" sz="1050" dirty="0">
-                <a:solidFill>
-                  <a:srgbClr val="E6EEF7"/>
+              <a:rPr lang="en-US" sz="950" dirty="0">
+                <a:solidFill>
+                  <a:srgbClr val="DCE7F5"/>
                 </a:solidFill>
                 <a:latin typeface="Calibri" pitchFamily="34" charset="0"/>
                 <a:ea typeface="Calibri" pitchFamily="34" charset="-122"/>
@@ -4556,19 +4652,19 @@
               </a:rPr>
               <a:t>Servicios</a:t>
             </a:r>
-            <a:endParaRPr lang="en-US" sz="1050" dirty="0"/>
+            <a:endParaRPr lang="en-US" sz="950" dirty="0"/>
           </a:p>
           <a:p>
             <a:pPr algn="ctr" indent="0" marL="0">
               <a:lnSpc>
-                <a:spcPts val="1400"/>
+                <a:spcPts val="1250"/>
               </a:lnSpc>
               <a:buNone/>
             </a:pPr>
             <a:r>
-              <a:rPr lang="en-US" sz="1050" dirty="0">
-                <a:solidFill>
-                  <a:srgbClr val="E6EEF7"/>
+              <a:rPr lang="en-US" sz="950" dirty="0">
+                <a:solidFill>
+                  <a:srgbClr val="DCE7F5"/>
                 </a:solidFill>
                 <a:latin typeface="Calibri" pitchFamily="34" charset="0"/>
                 <a:ea typeface="Calibri" pitchFamily="34" charset="-122"/>
@@ -4576,7 +4672,7 @@
               </a:rPr>
               <a:t>digitales 24/7</a:t>
             </a:r>
-            <a:endParaRPr lang="en-US" sz="1050" dirty="0"/>
+            <a:endParaRPr lang="en-US" sz="950" dirty="0"/>
           </a:p>
         </p:txBody>
       </p:sp>
@@ -4588,8 +4684,8 @@
         </p:nvSpPr>
         <p:spPr>
           <a:xfrm>
-            <a:off x="9781794" y="5303520"/>
-            <a:ext cx="0" cy="1143000"/>
+            <a:off x="5558028" y="3456432"/>
+            <a:ext cx="0" cy="1371600"/>
           </a:xfrm>
           <a:prstGeom prst="line">
             <a:avLst/>
@@ -4598,7 +4694,7 @@
           <a:ln w="12700">
             <a:solidFill>
               <a:srgbClr val="FFFFFF">
-                <a:alpha val="22000"/>
+                <a:alpha val="20000"/>
               </a:srgbClr>
             </a:solidFill>
             <a:prstDash val="solid"/>
@@ -4613,14 +4709,14 @@
         </p:nvSpPr>
         <p:spPr>
           <a:xfrm>
-            <a:off x="11624767" y="6327648"/>
-            <a:ext cx="274320" cy="274320"/>
+            <a:off x="11661343" y="6364224"/>
+            <a:ext cx="310896" cy="310896"/>
           </a:xfrm>
           <a:prstGeom prst="rect">
             <a:avLst/>
           </a:prstGeom>
           <a:solidFill>
-            <a:srgbClr val="2E9BF0"/>
+            <a:srgbClr val="1268C4"/>
           </a:solidFill>
           <a:ln/>
         </p:spPr>
@@ -4633,8 +4729,8 @@
         </p:nvSpPr>
         <p:spPr>
           <a:xfrm>
-            <a:off x="11624767" y="6327648"/>
-            <a:ext cx="274320" cy="274320"/>
+            <a:off x="11661343" y="6364224"/>
+            <a:ext cx="310896" cy="310896"/>
           </a:xfrm>
           <a:prstGeom prst="rect">
             <a:avLst/>
@@ -4650,7 +4746,7 @@
               <a:buNone/>
             </a:pPr>
             <a:r>
-              <a:rPr lang="en-US" sz="950" b="1" dirty="0">
+              <a:rPr lang="en-US" sz="1000" b="1" dirty="0">
                 <a:solidFill>
                   <a:srgbClr val="FFFFFF"/>
                 </a:solidFill>
@@ -4660,7 +4756,7 @@
               </a:rPr>
               <a:t>11</a:t>
             </a:r>
-            <a:endParaRPr lang="en-US" sz="950" dirty="0"/>
+            <a:endParaRPr lang="en-US" sz="1000" dirty="0"/>
           </a:p>
         </p:txBody>
       </p:sp>
@@ -4678,7 +4774,7 @@
     <p:bg>
       <p:bgPr>
         <a:solidFill>
-          <a:srgbClr val="07203F"/>
+          <a:srgbClr val="04173F"/>
         </a:solidFill>
       </p:bgPr>
     </p:bg>
@@ -4711,20 +4807,28 @@
         </p:blipFill>
         <p:spPr>
           <a:xfrm>
-            <a:off x="0" y="2286000"/>
-            <a:ext cx="12191695" cy="4572000"/>
+            <a:off x="0" y="2148840"/>
+            <a:ext cx="12191695" cy="4709160"/>
           </a:xfrm>
           <a:prstGeom prst="rect">
             <a:avLst/>
           </a:prstGeom>
         </p:spPr>
       </p:pic>
-      <p:sp>
-        <p:nvSpPr>
-          <p:cNvPr id="3" name="Shape 0"/>
-          <p:cNvSpPr/>
-          <p:nvPr/>
-        </p:nvSpPr>
+      <p:pic>
+        <p:nvPicPr>
+          <p:cNvPr id="3" name="Image 1" descr="/home/user/bolt.diy/presentaciones/indotel-ciudades-inteligentes/src/derived/veil_close.png">    </p:cNvPr>
+          <p:cNvPicPr>
+            <a:picLocks noChangeAspect="1"/>
+          </p:cNvPicPr>
+          <p:nvPr/>
+        </p:nvPicPr>
+        <p:blipFill>
+          <a:blip r:embed="rId2"/>
+          <a:stretch>
+            <a:fillRect/>
+          </a:stretch>
+        </p:blipFill>
         <p:spPr>
           <a:xfrm>
             <a:off x="0" y="0"/>
@@ -4733,23 +4837,17 @@
           <a:prstGeom prst="rect">
             <a:avLst/>
           </a:prstGeom>
-          <a:solidFill>
-            <a:srgbClr val="07203F">
-              <a:alpha val="84000"/>
-            </a:srgbClr>
-          </a:solidFill>
-          <a:ln/>
-        </p:spPr>
-      </p:sp>
-      <p:sp>
-        <p:nvSpPr>
-          <p:cNvPr id="4" name="Text 1"/>
-          <p:cNvSpPr/>
-          <p:nvPr/>
-        </p:nvSpPr>
-        <p:spPr>
-          <a:xfrm>
-            <a:off x="566928" y="256032"/>
+        </p:spPr>
+      </p:pic>
+      <p:sp>
+        <p:nvSpPr>
+          <p:cNvPr id="4" name="Text 0"/>
+          <p:cNvSpPr/>
+          <p:nvPr/>
+        </p:nvSpPr>
+        <p:spPr>
+          <a:xfrm>
+            <a:off x="566928" y="237744"/>
             <a:ext cx="3657600" cy="274320"/>
           </a:xfrm>
           <a:prstGeom prst="rect">
@@ -4766,7 +4864,7 @@
               <a:buNone/>
             </a:pPr>
             <a:r>
-              <a:rPr lang="en-US" sz="1500" b="1" spc="140" kern="0" dirty="0">
+              <a:rPr lang="en-US" sz="1500" b="1" spc="130" kern="0" dirty="0">
                 <a:solidFill>
                   <a:srgbClr val="FFFFFF"/>
                 </a:solidFill>
@@ -4782,13 +4880,13 @@
       </p:sp>
       <p:sp>
         <p:nvSpPr>
-          <p:cNvPr id="5" name="Text 2"/>
-          <p:cNvSpPr/>
-          <p:nvPr/>
-        </p:nvSpPr>
-        <p:spPr>
-          <a:xfrm>
-            <a:off x="566928" y="534924"/>
+          <p:cNvPr id="5" name="Text 1"/>
+          <p:cNvSpPr/>
+          <p:nvPr/>
+        </p:nvSpPr>
+        <p:spPr>
+          <a:xfrm>
+            <a:off x="566928" y="516636"/>
             <a:ext cx="3657600" cy="219456"/>
           </a:xfrm>
           <a:prstGeom prst="rect">
@@ -4807,7 +4905,7 @@
             <a:r>
               <a:rPr lang="en-US" sz="950" dirty="0">
                 <a:solidFill>
-                  <a:srgbClr val="BBD7F2"/>
+                  <a:srgbClr val="C3D6EE"/>
                 </a:solidFill>
                 <a:latin typeface="Calibri" pitchFamily="34" charset="0"/>
                 <a:ea typeface="Calibri" pitchFamily="34" charset="-122"/>
@@ -4821,14 +4919,14 @@
       </p:sp>
       <p:sp>
         <p:nvSpPr>
-          <p:cNvPr id="6" name="Text 3"/>
-          <p:cNvSpPr/>
-          <p:nvPr/>
-        </p:nvSpPr>
-        <p:spPr>
-          <a:xfrm>
-            <a:off x="566928" y="1417320"/>
-            <a:ext cx="5486400" cy="274320"/>
+          <p:cNvPr id="6" name="Text 2"/>
+          <p:cNvSpPr/>
+          <p:nvPr/>
+        </p:nvSpPr>
+        <p:spPr>
+          <a:xfrm>
+            <a:off x="566928" y="1207008"/>
+            <a:ext cx="5486400" cy="329184"/>
           </a:xfrm>
           <a:prstGeom prst="rect">
             <a:avLst/>
@@ -4844,30 +4942,30 @@
               <a:buNone/>
             </a:pPr>
             <a:r>
-              <a:rPr lang="en-US" sz="1100" b="1" spc="220" kern="0" dirty="0">
-                <a:solidFill>
-                  <a:srgbClr val="2E9BF0"/>
-                </a:solidFill>
-                <a:latin typeface="Calibri" pitchFamily="34" charset="0"/>
-                <a:ea typeface="Calibri" pitchFamily="34" charset="-122"/>
-                <a:cs typeface="Calibri" pitchFamily="34" charset="-120"/>
-              </a:rPr>
-              <a:t>DECISIÓN ESTRATÉGICA</a:t>
-            </a:r>
-            <a:endParaRPr lang="en-US" sz="1100" dirty="0"/>
-          </a:p>
-        </p:txBody>
-      </p:sp>
-      <p:sp>
-        <p:nvSpPr>
-          <p:cNvPr id="7" name="Text 4"/>
-          <p:cNvSpPr/>
-          <p:nvPr/>
-        </p:nvSpPr>
-        <p:spPr>
-          <a:xfrm>
-            <a:off x="566928" y="1810512"/>
-            <a:ext cx="7360920" cy="1691640"/>
+              <a:rPr lang="en-US" sz="1500" dirty="0">
+                <a:solidFill>
+                  <a:srgbClr val="D6E4F5"/>
+                </a:solidFill>
+                <a:latin typeface="Calibri" pitchFamily="34" charset="0"/>
+                <a:ea typeface="Calibri" pitchFamily="34" charset="-122"/>
+                <a:cs typeface="Calibri" pitchFamily="34" charset="-120"/>
+              </a:rPr>
+              <a:t>Decisión estratégica</a:t>
+            </a:r>
+            <a:endParaRPr lang="en-US" sz="1500" dirty="0"/>
+          </a:p>
+        </p:txBody>
+      </p:sp>
+      <p:sp>
+        <p:nvSpPr>
+          <p:cNvPr id="7" name="Text 3"/>
+          <p:cNvSpPr/>
+          <p:nvPr/>
+        </p:nvSpPr>
+        <p:spPr>
+          <a:xfrm>
+            <a:off x="566928" y="1645920"/>
+            <a:ext cx="7635240" cy="1645920"/>
           </a:xfrm>
           <a:prstGeom prst="rect">
             <a:avLst/>
@@ -4881,12 +4979,12 @@
           <a:p>
             <a:pPr indent="0" marL="0">
               <a:lnSpc>
-                <a:spcPts val="3900"/>
+                <a:spcPts val="3600"/>
               </a:lnSpc>
               <a:buNone/>
             </a:pPr>
             <a:r>
-              <a:rPr lang="en-US" sz="3100" b="1" dirty="0">
+              <a:rPr lang="en-US" sz="2800" b="1" dirty="0">
                 <a:solidFill>
                   <a:srgbClr val="FFFFFF"/>
                 </a:solidFill>
@@ -4896,20 +4994,20 @@
               </a:rPr>
               <a:t>Autorización para convertir esta cooperación en un instrumento permanente del INDOTEL.</a:t>
             </a:r>
-            <a:endParaRPr lang="en-US" sz="3100" dirty="0"/>
-          </a:p>
-        </p:txBody>
-      </p:sp>
-      <p:sp>
-        <p:nvSpPr>
-          <p:cNvPr id="8" name="Text 5"/>
-          <p:cNvSpPr/>
-          <p:nvPr/>
-        </p:nvSpPr>
-        <p:spPr>
-          <a:xfrm>
-            <a:off x="566928" y="3657600"/>
-            <a:ext cx="6949440" cy="868680"/>
+            <a:endParaRPr lang="en-US" sz="2800" dirty="0"/>
+          </a:p>
+        </p:txBody>
+      </p:sp>
+      <p:sp>
+        <p:nvSpPr>
+          <p:cNvPr id="8" name="Text 4"/>
+          <p:cNvSpPr/>
+          <p:nvPr/>
+        </p:nvSpPr>
+        <p:spPr>
+          <a:xfrm>
+            <a:off x="566928" y="3456432"/>
+            <a:ext cx="7132320" cy="868680"/>
           </a:xfrm>
           <a:prstGeom prst="rect">
             <a:avLst/>
@@ -4930,7 +5028,7 @@
             <a:r>
               <a:rPr lang="en-US" sz="1500" dirty="0">
                 <a:solidFill>
-                  <a:srgbClr val="BBD7F2"/>
+                  <a:srgbClr val="DCE7F5"/>
                 </a:solidFill>
                 <a:latin typeface="Calibri" pitchFamily="34" charset="0"/>
                 <a:ea typeface="Calibri" pitchFamily="34" charset="-122"/>
@@ -4950,7 +5048,7 @@
             <a:r>
               <a:rPr lang="en-US" sz="1500" dirty="0">
                 <a:solidFill>
-                  <a:srgbClr val="BBD7F2"/>
+                  <a:srgbClr val="DCE7F5"/>
                 </a:solidFill>
                 <a:latin typeface="Calibri" pitchFamily="34" charset="0"/>
                 <a:ea typeface="Calibri" pitchFamily="34" charset="-122"/>
@@ -4964,14 +5062,14 @@
       </p:sp>
       <p:sp>
         <p:nvSpPr>
-          <p:cNvPr id="9" name="Shape 6"/>
-          <p:cNvSpPr/>
-          <p:nvPr/>
-        </p:nvSpPr>
-        <p:spPr>
-          <a:xfrm>
-            <a:off x="8613648" y="1508760"/>
-            <a:ext cx="0" cy="3931920"/>
+          <p:cNvPr id="9" name="Shape 5"/>
+          <p:cNvSpPr/>
+          <p:nvPr/>
+        </p:nvSpPr>
+        <p:spPr>
+          <a:xfrm>
+            <a:off x="8522208" y="1188720"/>
+            <a:ext cx="0" cy="3977640"/>
           </a:xfrm>
           <a:prstGeom prst="line">
             <a:avLst/>
@@ -4980,7 +5078,7 @@
           <a:ln w="12700">
             <a:solidFill>
               <a:srgbClr val="FFFFFF">
-                <a:alpha val="30000"/>
+                <a:alpha val="34000"/>
               </a:srgbClr>
             </a:solidFill>
             <a:prstDash val="solid"/>
@@ -4989,13 +5087,13 @@
       </p:sp>
       <p:sp>
         <p:nvSpPr>
-          <p:cNvPr id="10" name="Text 7"/>
-          <p:cNvSpPr/>
-          <p:nvPr/>
-        </p:nvSpPr>
-        <p:spPr>
-          <a:xfrm>
-            <a:off x="9098280" y="1783080"/>
+          <p:cNvPr id="10" name="Text 6"/>
+          <p:cNvSpPr/>
+          <p:nvPr/>
+        </p:nvSpPr>
+        <p:spPr>
+          <a:xfrm>
+            <a:off x="9006840" y="1572768"/>
             <a:ext cx="2834640" cy="502920"/>
           </a:xfrm>
           <a:prstGeom prst="rect">
@@ -5012,7 +5110,7 @@
               <a:buNone/>
             </a:pPr>
             <a:r>
-              <a:rPr lang="en-US" sz="3000" b="1" spc="180" kern="0" dirty="0">
+              <a:rPr lang="en-US" sz="2900" b="1" spc="180" kern="0" dirty="0">
                 <a:solidFill>
                   <a:srgbClr val="FFFFFF"/>
                 </a:solidFill>
@@ -5022,62 +5120,141 @@
               </a:rPr>
               <a:t>INDOTEL</a:t>
             </a:r>
+            <a:endParaRPr lang="en-US" sz="2900" dirty="0"/>
+          </a:p>
+        </p:txBody>
+      </p:sp>
+      <p:sp>
+        <p:nvSpPr>
+          <p:cNvPr id="11" name="Text 7"/>
+          <p:cNvSpPr/>
+          <p:nvPr/>
+        </p:nvSpPr>
+        <p:spPr>
+          <a:xfrm>
+            <a:off x="9006840" y="2231136"/>
+            <a:ext cx="2697480" cy="1005840"/>
+          </a:xfrm>
+          <a:prstGeom prst="rect">
+            <a:avLst/>
+          </a:prstGeom>
+          <a:noFill/>
+          <a:ln/>
+        </p:spPr>
+        <p:txBody>
+          <a:bodyPr wrap="square" lIns="0" tIns="0" rIns="0" bIns="0" rtlCol="0" anchor="t"/>
+          <a:lstStyle/>
+          <a:p>
+            <a:pPr indent="0" marL="0">
+              <a:lnSpc>
+                <a:spcPts val="1850"/>
+              </a:lnSpc>
+              <a:buNone/>
+            </a:pPr>
+            <a:r>
+              <a:rPr lang="en-US" sz="1250" dirty="0">
+                <a:solidFill>
+                  <a:srgbClr val="DCE7F5"/>
+                </a:solidFill>
+                <a:latin typeface="Calibri" pitchFamily="34" charset="0"/>
+                <a:ea typeface="Calibri" pitchFamily="34" charset="-122"/>
+                <a:cs typeface="Calibri" pitchFamily="34" charset="-120"/>
+              </a:rPr>
+              <a:t>Lideramos la transformación digital de los municipios dominicanos.</a:t>
+            </a:r>
+            <a:endParaRPr lang="en-US" sz="1250" dirty="0"/>
+          </a:p>
+        </p:txBody>
+      </p:sp>
+      <p:sp>
+        <p:nvSpPr>
+          <p:cNvPr id="12" name="Text 8"/>
+          <p:cNvSpPr/>
+          <p:nvPr/>
+        </p:nvSpPr>
+        <p:spPr>
+          <a:xfrm>
+            <a:off x="9006840" y="3547872"/>
+            <a:ext cx="2834640" cy="566928"/>
+          </a:xfrm>
+          <a:prstGeom prst="rect">
+            <a:avLst/>
+          </a:prstGeom>
+          <a:noFill/>
+          <a:ln/>
+        </p:spPr>
+        <p:txBody>
+          <a:bodyPr wrap="square" lIns="0" tIns="0" rIns="0" bIns="0" rtlCol="0" anchor="ctr"/>
+          <a:lstStyle/>
+          <a:p>
+            <a:pPr indent="0" marL="0">
+              <a:buNone/>
+            </a:pPr>
+            <a:r>
+              <a:rPr lang="en-US" sz="3000" b="1" dirty="0">
+                <a:solidFill>
+                  <a:srgbClr val="FFFFFF"/>
+                </a:solidFill>
+                <a:latin typeface="Calibri" pitchFamily="34" charset="0"/>
+                <a:ea typeface="Calibri" pitchFamily="34" charset="-122"/>
+                <a:cs typeface="Calibri" pitchFamily="34" charset="-120"/>
+              </a:rPr>
+              <a:t>2026</a:t>
+            </a:r>
             <a:endParaRPr lang="en-US" sz="3000" dirty="0"/>
           </a:p>
         </p:txBody>
       </p:sp>
       <p:sp>
         <p:nvSpPr>
-          <p:cNvPr id="11" name="Text 8"/>
-          <p:cNvSpPr/>
-          <p:nvPr/>
-        </p:nvSpPr>
-        <p:spPr>
-          <a:xfrm>
-            <a:off x="9098280" y="2450592"/>
-            <a:ext cx="2697480" cy="1005840"/>
-          </a:xfrm>
-          <a:prstGeom prst="rect">
-            <a:avLst/>
-          </a:prstGeom>
-          <a:noFill/>
-          <a:ln/>
-        </p:spPr>
-        <p:txBody>
-          <a:bodyPr wrap="square" lIns="0" tIns="0" rIns="0" bIns="0" rtlCol="0" anchor="t"/>
-          <a:lstStyle/>
-          <a:p>
-            <a:pPr indent="0" marL="0">
-              <a:lnSpc>
-                <a:spcPts val="1800"/>
-              </a:lnSpc>
-              <a:buNone/>
-            </a:pPr>
-            <a:r>
-              <a:rPr lang="en-US" sz="1250" dirty="0">
-                <a:solidFill>
-                  <a:srgbClr val="BBD7F2"/>
-                </a:solidFill>
-                <a:latin typeface="Calibri" pitchFamily="34" charset="0"/>
-                <a:ea typeface="Calibri" pitchFamily="34" charset="-122"/>
-                <a:cs typeface="Calibri" pitchFamily="34" charset="-120"/>
-              </a:rPr>
-              <a:t>Lideramos la transformación digital de los municipios dominicanos.</a:t>
-            </a:r>
-            <a:endParaRPr lang="en-US" sz="1250" dirty="0"/>
-          </a:p>
-        </p:txBody>
-      </p:sp>
-      <p:sp>
-        <p:nvSpPr>
-          <p:cNvPr id="12" name="Text 9"/>
-          <p:cNvSpPr/>
-          <p:nvPr/>
-        </p:nvSpPr>
-        <p:spPr>
-          <a:xfrm>
-            <a:off x="9098280" y="4160520"/>
-            <a:ext cx="2834640" cy="640080"/>
+          <p:cNvPr id="13" name="Shape 9"/>
+          <p:cNvSpPr/>
+          <p:nvPr/>
+        </p:nvSpPr>
+        <p:spPr>
+          <a:xfrm>
+            <a:off x="9006840" y="4169664"/>
+            <a:ext cx="960120" cy="45720"/>
+          </a:xfrm>
+          <a:prstGeom prst="rect">
+            <a:avLst/>
+          </a:prstGeom>
+          <a:solidFill>
+            <a:srgbClr val="3AA0F5"/>
+          </a:solidFill>
+          <a:ln/>
+        </p:spPr>
+      </p:sp>
+      <p:sp>
+        <p:nvSpPr>
+          <p:cNvPr id="14" name="Shape 10"/>
+          <p:cNvSpPr/>
+          <p:nvPr/>
+        </p:nvSpPr>
+        <p:spPr>
+          <a:xfrm>
+            <a:off x="11661343" y="6364224"/>
+            <a:ext cx="310896" cy="310896"/>
+          </a:xfrm>
+          <a:prstGeom prst="rect">
+            <a:avLst/>
+          </a:prstGeom>
+          <a:solidFill>
+            <a:srgbClr val="1268C4"/>
+          </a:solidFill>
+          <a:ln/>
+        </p:spPr>
+      </p:sp>
+      <p:sp>
+        <p:nvSpPr>
+          <p:cNvPr id="15" name="Text 11"/>
+          <p:cNvSpPr/>
+          <p:nvPr/>
+        </p:nvSpPr>
+        <p:spPr>
+          <a:xfrm>
+            <a:off x="11661343" y="6364224"/>
+            <a:ext cx="310896" cy="310896"/>
           </a:xfrm>
           <a:prstGeom prst="rect">
             <a:avLst/>
@@ -5089,70 +5266,11 @@
           <a:bodyPr wrap="square" lIns="0" tIns="0" rIns="0" bIns="0" rtlCol="0" anchor="ctr"/>
           <a:lstStyle/>
           <a:p>
-            <a:pPr indent="0" marL="0">
-              <a:buNone/>
-            </a:pPr>
-            <a:r>
-              <a:rPr lang="en-US" sz="3400" b="1" dirty="0">
-                <a:solidFill>
-                  <a:srgbClr val="2E9BF0"/>
-                </a:solidFill>
-                <a:latin typeface="Calibri" pitchFamily="34" charset="0"/>
-                <a:ea typeface="Calibri" pitchFamily="34" charset="-122"/>
-                <a:cs typeface="Calibri" pitchFamily="34" charset="-120"/>
-              </a:rPr>
-              <a:t>2026</a:t>
-            </a:r>
-            <a:endParaRPr lang="en-US" sz="3400" dirty="0"/>
-          </a:p>
-        </p:txBody>
-      </p:sp>
-      <p:sp>
-        <p:nvSpPr>
-          <p:cNvPr id="13" name="Shape 10"/>
-          <p:cNvSpPr/>
-          <p:nvPr/>
-        </p:nvSpPr>
-        <p:spPr>
-          <a:xfrm>
-            <a:off x="11624767" y="6327648"/>
-            <a:ext cx="274320" cy="274320"/>
-          </a:xfrm>
-          <a:prstGeom prst="rect">
-            <a:avLst/>
-          </a:prstGeom>
-          <a:solidFill>
-            <a:srgbClr val="2E9BF0"/>
-          </a:solidFill>
-          <a:ln/>
-        </p:spPr>
-      </p:sp>
-      <p:sp>
-        <p:nvSpPr>
-          <p:cNvPr id="14" name="Text 11"/>
-          <p:cNvSpPr/>
-          <p:nvPr/>
-        </p:nvSpPr>
-        <p:spPr>
-          <a:xfrm>
-            <a:off x="11624767" y="6327648"/>
-            <a:ext cx="274320" cy="274320"/>
-          </a:xfrm>
-          <a:prstGeom prst="rect">
-            <a:avLst/>
-          </a:prstGeom>
-          <a:noFill/>
-          <a:ln/>
-        </p:spPr>
-        <p:txBody>
-          <a:bodyPr wrap="square" lIns="0" tIns="0" rIns="0" bIns="0" rtlCol="0" anchor="ctr"/>
-          <a:lstStyle/>
-          <a:p>
             <a:pPr algn="ctr" indent="0" marL="0">
               <a:buNone/>
             </a:pPr>
             <a:r>
-              <a:rPr lang="en-US" sz="950" b="1" dirty="0">
+              <a:rPr lang="en-US" sz="1000" b="1" dirty="0">
                 <a:solidFill>
                   <a:srgbClr val="FFFFFF"/>
                 </a:solidFill>
@@ -5162,7 +5280,7 @@
               </a:rPr>
               <a:t>12</a:t>
             </a:r>
-            <a:endParaRPr lang="en-US" sz="950" dirty="0"/>
+            <a:endParaRPr lang="en-US" sz="1000" dirty="0"/>
           </a:p>
         </p:txBody>
       </p:sp>
@@ -5180,7 +5298,7 @@
     <p:bg>
       <p:bgPr>
         <a:solidFill>
-          <a:srgbClr val="FFFFFF"/>
+          <a:srgbClr val="F2F3F8"/>
         </a:solidFill>
       </p:bgPr>
     </p:bg>
@@ -5200,7 +5318,7 @@
       </p:grpSpPr>
       <p:pic>
         <p:nvPicPr>
-          <p:cNvPr id="2" name="Image 0" descr="/home/user/bolt.diy/presentaciones/indotel-ciudades-inteligentes/src/derived/monumento.jpg">    </p:cNvPr>
+          <p:cNvPr id="2" name="Image 0" descr="/home/user/bolt.diy/presentaciones/indotel-ciudades-inteligentes/src/derived/monumento_soft.jpg">    </p:cNvPr>
           <p:cNvPicPr>
             <a:picLocks noChangeAspect="1"/>
           </p:cNvPicPr>
@@ -5208,13 +5326,14 @@
         </p:nvPicPr>
         <p:blipFill>
           <a:blip r:embed="rId1"/>
-          <a:srcRect l="0" r="0" t="0" b="0"/>
-          <a:stretch/>
+          <a:stretch>
+            <a:fillRect/>
+          </a:stretch>
         </p:blipFill>
         <p:spPr>
           <a:xfrm>
-            <a:off x="5943600" y="0"/>
-            <a:ext cx="6248095" cy="4617720"/>
+            <a:off x="5394960" y="0"/>
+            <a:ext cx="6796735" cy="4681728"/>
           </a:xfrm>
           <a:prstGeom prst="rect">
             <a:avLst/>
@@ -5248,7 +5367,7 @@
             <a:r>
               <a:rPr lang="en-US" sz="1100" b="1" spc="160" kern="0" dirty="0">
                 <a:solidFill>
-                  <a:srgbClr val="0B2C5E"/>
+                  <a:srgbClr val="0D1B5E"/>
                 </a:solidFill>
                 <a:latin typeface="Calibri" pitchFamily="34" charset="0"/>
                 <a:ea typeface="Calibri" pitchFamily="34" charset="-122"/>
@@ -5268,8 +5387,8 @@
         </p:nvSpPr>
         <p:spPr>
           <a:xfrm>
-            <a:off x="566928" y="777240"/>
-            <a:ext cx="5257800" cy="1371600"/>
+            <a:off x="566928" y="786384"/>
+            <a:ext cx="5029200" cy="1371600"/>
           </a:xfrm>
           <a:prstGeom prst="rect">
             <a:avLst/>
@@ -5283,14 +5402,14 @@
           <a:p>
             <a:pPr indent="0" marL="0">
               <a:lnSpc>
-                <a:spcPts val="3100"/>
+                <a:spcPts val="3000"/>
               </a:lnSpc>
               <a:buNone/>
             </a:pPr>
             <a:r>
-              <a:rPr lang="en-US" sz="2400" b="1" dirty="0">
-                <a:solidFill>
-                  <a:srgbClr val="0B2C5E"/>
+              <a:rPr lang="en-US" sz="2250" b="1" dirty="0">
+                <a:solidFill>
+                  <a:srgbClr val="0D1B5E"/>
                 </a:solidFill>
                 <a:latin typeface="Calibri" pitchFamily="34" charset="0"/>
                 <a:ea typeface="Calibri" pitchFamily="34" charset="-122"/>
@@ -5298,19 +5417,19 @@
               </a:rPr>
               <a:t>Un país conectado.</a:t>
             </a:r>
-            <a:endParaRPr lang="en-US" sz="2400" dirty="0"/>
+            <a:endParaRPr lang="en-US" sz="2250" dirty="0"/>
           </a:p>
           <a:p>
             <a:pPr indent="0" marL="0">
               <a:lnSpc>
-                <a:spcPts val="3100"/>
+                <a:spcPts val="3000"/>
               </a:lnSpc>
               <a:buNone/>
             </a:pPr>
             <a:r>
-              <a:rPr lang="en-US" sz="2400" b="1" dirty="0">
-                <a:solidFill>
-                  <a:srgbClr val="0B2C5E"/>
+              <a:rPr lang="en-US" sz="2250" b="1" dirty="0">
+                <a:solidFill>
+                  <a:srgbClr val="0D1B5E"/>
                 </a:solidFill>
                 <a:latin typeface="Calibri" pitchFamily="34" charset="0"/>
                 <a:ea typeface="Calibri" pitchFamily="34" charset="-122"/>
@@ -5318,19 +5437,19 @@
               </a:rPr>
               <a:t>Municipios más eficientes.</a:t>
             </a:r>
-            <a:endParaRPr lang="en-US" sz="2400" dirty="0"/>
+            <a:endParaRPr lang="en-US" sz="2250" dirty="0"/>
           </a:p>
           <a:p>
             <a:pPr indent="0" marL="0">
               <a:lnSpc>
-                <a:spcPts val="3100"/>
+                <a:spcPts val="3000"/>
               </a:lnSpc>
               <a:buNone/>
             </a:pPr>
             <a:r>
-              <a:rPr lang="en-US" sz="2400" b="1" dirty="0">
-                <a:solidFill>
-                  <a:srgbClr val="0B2C5E"/>
+              <a:rPr lang="en-US" sz="2250" b="1" dirty="0">
+                <a:solidFill>
+                  <a:srgbClr val="0D1B5E"/>
                 </a:solidFill>
                 <a:latin typeface="Calibri" pitchFamily="34" charset="0"/>
                 <a:ea typeface="Calibri" pitchFamily="34" charset="-122"/>
@@ -5338,7 +5457,7 @@
               </a:rPr>
               <a:t>Ciudadanos mejor servidos.</a:t>
             </a:r>
-            <a:endParaRPr lang="en-US" sz="2400" dirty="0"/>
+            <a:endParaRPr lang="en-US" sz="2250" dirty="0"/>
           </a:p>
         </p:txBody>
       </p:sp>
@@ -5350,8 +5469,8 @@
         </p:nvSpPr>
         <p:spPr>
           <a:xfrm>
-            <a:off x="566928" y="2304288"/>
-            <a:ext cx="4754880" cy="1005840"/>
+            <a:off x="566928" y="2395728"/>
+            <a:ext cx="4343400" cy="1005840"/>
           </a:xfrm>
           <a:prstGeom prst="rect">
             <a:avLst/>
@@ -5365,14 +5484,14 @@
           <a:p>
             <a:pPr indent="0" marL="0">
               <a:lnSpc>
-                <a:spcPts val="1800"/>
+                <a:spcPts val="1850"/>
               </a:lnSpc>
               <a:buNone/>
             </a:pPr>
             <a:r>
               <a:rPr lang="en-US" sz="1250" dirty="0">
                 <a:solidFill>
-                  <a:srgbClr val="44566B"/>
+                  <a:srgbClr val="3B4356"/>
                 </a:solidFill>
                 <a:latin typeface="Calibri" pitchFamily="34" charset="0"/>
                 <a:ea typeface="Calibri" pitchFamily="34" charset="-122"/>
@@ -5392,24 +5511,24 @@
         </p:nvSpPr>
         <p:spPr>
           <a:xfrm>
-            <a:off x="7863840" y="475488"/>
-            <a:ext cx="3913632" cy="3529584"/>
+            <a:off x="7955280" y="457200"/>
+            <a:ext cx="3950208" cy="3611880"/>
           </a:xfrm>
           <a:prstGeom prst="roundRect">
             <a:avLst>
-              <a:gd name="adj" fmla="val 2591"/>
+              <a:gd name="adj" fmla="val 2785"/>
             </a:avLst>
           </a:prstGeom>
           <a:solidFill>
             <a:srgbClr val="FFFFFF">
-              <a:alpha val="94000"/>
+              <a:alpha val="95000"/>
             </a:srgbClr>
           </a:solidFill>
           <a:ln/>
           <a:effectLst>
-            <a:outerShdw sx="100000" sy="100000" kx="0" ky="0" algn="bl" rotWithShape="0" blurRad="254000" dist="50800" dir="5400000">
-              <a:srgbClr val="0B2C5E">
-                <a:alpha val="22000"/>
+            <a:outerShdw sx="100000" sy="100000" kx="0" ky="0" algn="bl" rotWithShape="0" blurRad="279400" dist="50800" dir="5400000">
+              <a:srgbClr val="0A1F45">
+                <a:alpha val="24000"/>
               </a:srgbClr>
             </a:outerShdw>
           </a:effectLst>
@@ -5423,14 +5542,14 @@
         </p:nvSpPr>
         <p:spPr>
           <a:xfrm>
-            <a:off x="8183880" y="786384"/>
-            <a:ext cx="457200" cy="457200"/>
+            <a:off x="8284464" y="777240"/>
+            <a:ext cx="475488" cy="475488"/>
           </a:xfrm>
           <a:prstGeom prst="ellipse">
             <a:avLst/>
           </a:prstGeom>
           <a:solidFill>
-            <a:srgbClr val="1668B8"/>
+            <a:srgbClr val="0B4489"/>
           </a:solidFill>
           <a:ln/>
         </p:spPr>
@@ -5451,7 +5570,7 @@
         </p:blipFill>
         <p:spPr>
           <a:xfrm>
-            <a:off x="8293608" y="896112"/>
+            <a:off x="8403336" y="896112"/>
             <a:ext cx="237744" cy="237744"/>
           </a:xfrm>
           <a:prstGeom prst="rect">
@@ -5467,8 +5586,8 @@
         </p:nvSpPr>
         <p:spPr>
           <a:xfrm>
-            <a:off x="8833104" y="749808"/>
-            <a:ext cx="2743200" cy="530352"/>
+            <a:off x="8961120" y="740664"/>
+            <a:ext cx="2697480" cy="548640"/>
           </a:xfrm>
           <a:prstGeom prst="rect">
             <a:avLst/>
@@ -5489,7 +5608,7 @@
             <a:r>
               <a:rPr lang="en-US" sz="1100" dirty="0">
                 <a:solidFill>
-                  <a:srgbClr val="0B2C5E"/>
+                  <a:srgbClr val="0D1B5E"/>
                 </a:solidFill>
                 <a:latin typeface="Calibri" pitchFamily="34" charset="0"/>
                 <a:ea typeface="Calibri" pitchFamily="34" charset="-122"/>
@@ -5509,7 +5628,7 @@
             <a:r>
               <a:rPr lang="en-US" sz="1100" dirty="0">
                 <a:solidFill>
-                  <a:srgbClr val="0B2C5E"/>
+                  <a:srgbClr val="0D1B5E"/>
                 </a:solidFill>
                 <a:latin typeface="Calibri" pitchFamily="34" charset="0"/>
                 <a:ea typeface="Calibri" pitchFamily="34" charset="-122"/>
@@ -5529,14 +5648,14 @@
         </p:nvSpPr>
         <p:spPr>
           <a:xfrm>
-            <a:off x="8183880" y="1609344"/>
-            <a:ext cx="457200" cy="457200"/>
+            <a:off x="8284464" y="1618488"/>
+            <a:ext cx="475488" cy="475488"/>
           </a:xfrm>
           <a:prstGeom prst="ellipse">
             <a:avLst/>
           </a:prstGeom>
           <a:solidFill>
-            <a:srgbClr val="1668B8"/>
+            <a:srgbClr val="0B4489"/>
           </a:solidFill>
           <a:ln/>
         </p:spPr>
@@ -5557,7 +5676,7 @@
         </p:blipFill>
         <p:spPr>
           <a:xfrm>
-            <a:off x="8293608" y="1719072"/>
+            <a:off x="8403336" y="1737360"/>
             <a:ext cx="237744" cy="237744"/>
           </a:xfrm>
           <a:prstGeom prst="rect">
@@ -5573,8 +5692,8 @@
         </p:nvSpPr>
         <p:spPr>
           <a:xfrm>
-            <a:off x="8833104" y="1572768"/>
-            <a:ext cx="2743200" cy="530352"/>
+            <a:off x="8961120" y="1581912"/>
+            <a:ext cx="2697480" cy="548640"/>
           </a:xfrm>
           <a:prstGeom prst="rect">
             <a:avLst/>
@@ -5595,7 +5714,7 @@
             <a:r>
               <a:rPr lang="en-US" sz="1100" dirty="0">
                 <a:solidFill>
-                  <a:srgbClr val="0B2C5E"/>
+                  <a:srgbClr val="0D1B5E"/>
                 </a:solidFill>
                 <a:latin typeface="Calibri" pitchFamily="34" charset="0"/>
                 <a:ea typeface="Calibri" pitchFamily="34" charset="-122"/>
@@ -5615,7 +5734,7 @@
             <a:r>
               <a:rPr lang="en-US" sz="1100" dirty="0">
                 <a:solidFill>
-                  <a:srgbClr val="0B2C5E"/>
+                  <a:srgbClr val="0D1B5E"/>
                 </a:solidFill>
                 <a:latin typeface="Calibri" pitchFamily="34" charset="0"/>
                 <a:ea typeface="Calibri" pitchFamily="34" charset="-122"/>
@@ -5635,14 +5754,14 @@
         </p:nvSpPr>
         <p:spPr>
           <a:xfrm>
-            <a:off x="8183880" y="2432304"/>
-            <a:ext cx="457200" cy="457200"/>
+            <a:off x="8284464" y="2459736"/>
+            <a:ext cx="475488" cy="475488"/>
           </a:xfrm>
           <a:prstGeom prst="ellipse">
             <a:avLst/>
           </a:prstGeom>
           <a:solidFill>
-            <a:srgbClr val="1668B8"/>
+            <a:srgbClr val="0B4489"/>
           </a:solidFill>
           <a:ln/>
         </p:spPr>
@@ -5663,7 +5782,7 @@
         </p:blipFill>
         <p:spPr>
           <a:xfrm>
-            <a:off x="8293608" y="2542032"/>
+            <a:off x="8403336" y="2578608"/>
             <a:ext cx="237744" cy="237744"/>
           </a:xfrm>
           <a:prstGeom prst="rect">
@@ -5679,8 +5798,8 @@
         </p:nvSpPr>
         <p:spPr>
           <a:xfrm>
-            <a:off x="8833104" y="2395728"/>
-            <a:ext cx="2743200" cy="530352"/>
+            <a:off x="8961120" y="2423160"/>
+            <a:ext cx="2697480" cy="548640"/>
           </a:xfrm>
           <a:prstGeom prst="rect">
             <a:avLst/>
@@ -5701,7 +5820,7 @@
             <a:r>
               <a:rPr lang="en-US" sz="1100" dirty="0">
                 <a:solidFill>
-                  <a:srgbClr val="0B2C5E"/>
+                  <a:srgbClr val="0D1B5E"/>
                 </a:solidFill>
                 <a:latin typeface="Calibri" pitchFamily="34" charset="0"/>
                 <a:ea typeface="Calibri" pitchFamily="34" charset="-122"/>
@@ -5721,7 +5840,7 @@
             <a:r>
               <a:rPr lang="en-US" sz="1100" dirty="0">
                 <a:solidFill>
-                  <a:srgbClr val="0B2C5E"/>
+                  <a:srgbClr val="0D1B5E"/>
                 </a:solidFill>
                 <a:latin typeface="Calibri" pitchFamily="34" charset="0"/>
                 <a:ea typeface="Calibri" pitchFamily="34" charset="-122"/>
@@ -5741,14 +5860,14 @@
         </p:nvSpPr>
         <p:spPr>
           <a:xfrm>
-            <a:off x="8183880" y="3255264"/>
-            <a:ext cx="457200" cy="457200"/>
+            <a:off x="8284464" y="3300984"/>
+            <a:ext cx="475488" cy="475488"/>
           </a:xfrm>
           <a:prstGeom prst="ellipse">
             <a:avLst/>
           </a:prstGeom>
           <a:solidFill>
-            <a:srgbClr val="1668B8"/>
+            <a:srgbClr val="0B4489"/>
           </a:solidFill>
           <a:ln/>
         </p:spPr>
@@ -5769,7 +5888,7 @@
         </p:blipFill>
         <p:spPr>
           <a:xfrm>
-            <a:off x="8293608" y="3364992"/>
+            <a:off x="8403336" y="3419856"/>
             <a:ext cx="237744" cy="237744"/>
           </a:xfrm>
           <a:prstGeom prst="rect">
@@ -5785,8 +5904,8 @@
         </p:nvSpPr>
         <p:spPr>
           <a:xfrm>
-            <a:off x="8833104" y="3218688"/>
-            <a:ext cx="2743200" cy="530352"/>
+            <a:off x="8961120" y="3264408"/>
+            <a:ext cx="2697480" cy="548640"/>
           </a:xfrm>
           <a:prstGeom prst="rect">
             <a:avLst/>
@@ -5807,7 +5926,7 @@
             <a:r>
               <a:rPr lang="en-US" sz="1100" dirty="0">
                 <a:solidFill>
-                  <a:srgbClr val="0B2C5E"/>
+                  <a:srgbClr val="0D1B5E"/>
                 </a:solidFill>
                 <a:latin typeface="Calibri" pitchFamily="34" charset="0"/>
                 <a:ea typeface="Calibri" pitchFamily="34" charset="-122"/>
@@ -5827,7 +5946,7 @@
             <a:r>
               <a:rPr lang="en-US" sz="1100" dirty="0">
                 <a:solidFill>
-                  <a:srgbClr val="0B2C5E"/>
+                  <a:srgbClr val="0D1B5E"/>
                 </a:solidFill>
                 <a:latin typeface="Calibri" pitchFamily="34" charset="0"/>
                 <a:ea typeface="Calibri" pitchFamily="34" charset="-122"/>
@@ -5847,14 +5966,14 @@
         </p:nvSpPr>
         <p:spPr>
           <a:xfrm>
-            <a:off x="0" y="4617720"/>
-            <a:ext cx="12191695" cy="2240280"/>
+            <a:off x="0" y="4681728"/>
+            <a:ext cx="12191695" cy="2176272"/>
           </a:xfrm>
           <a:prstGeom prst="rect">
             <a:avLst/>
           </a:prstGeom>
           <a:solidFill>
-            <a:srgbClr val="0B2C5E"/>
+            <a:srgbClr val="0A2E7A"/>
           </a:solidFill>
           <a:ln/>
         </p:spPr>
@@ -5875,8 +5994,8 @@
         </p:blipFill>
         <p:spPr>
           <a:xfrm>
-            <a:off x="457200" y="5358384"/>
-            <a:ext cx="566928" cy="566928"/>
+            <a:off x="438912" y="5413248"/>
+            <a:ext cx="603504" cy="603504"/>
           </a:xfrm>
           <a:prstGeom prst="rect">
             <a:avLst/>
@@ -5891,7 +6010,7 @@
         </p:nvSpPr>
         <p:spPr>
           <a:xfrm>
-            <a:off x="1207008" y="5029200"/>
+            <a:off x="1225296" y="5084064"/>
             <a:ext cx="1630604" cy="502920"/>
           </a:xfrm>
           <a:prstGeom prst="rect">
@@ -5953,7 +6072,7 @@
         </p:nvSpPr>
         <p:spPr>
           <a:xfrm>
-            <a:off x="1207008" y="5596128"/>
+            <a:off x="1225296" y="5650992"/>
             <a:ext cx="1630604" cy="566928"/>
           </a:xfrm>
           <a:prstGeom prst="rect">
@@ -6000,8 +6119,8 @@
         </p:blipFill>
         <p:spPr>
           <a:xfrm>
-            <a:off x="3505124" y="5358384"/>
-            <a:ext cx="566928" cy="566928"/>
+            <a:off x="3486836" y="5413248"/>
+            <a:ext cx="603504" cy="603504"/>
           </a:xfrm>
           <a:prstGeom prst="rect">
             <a:avLst/>
@@ -6016,7 +6135,7 @@
         </p:nvSpPr>
         <p:spPr>
           <a:xfrm>
-            <a:off x="4254932" y="5029200"/>
+            <a:off x="4273220" y="5084064"/>
             <a:ext cx="1630604" cy="502920"/>
           </a:xfrm>
           <a:prstGeom prst="rect">
@@ -6078,7 +6197,7 @@
         </p:nvSpPr>
         <p:spPr>
           <a:xfrm>
-            <a:off x="4254932" y="5596128"/>
+            <a:off x="4273220" y="5650992"/>
             <a:ext cx="1630604" cy="566928"/>
           </a:xfrm>
           <a:prstGeom prst="rect">
@@ -6117,7 +6236,7 @@
         </p:nvSpPr>
         <p:spPr>
           <a:xfrm>
-            <a:off x="3047924" y="5029200"/>
+            <a:off x="3047924" y="5084064"/>
             <a:ext cx="0" cy="1371600"/>
           </a:xfrm>
           <a:prstGeom prst="line">
@@ -6150,8 +6269,8 @@
         </p:blipFill>
         <p:spPr>
           <a:xfrm>
-            <a:off x="6553048" y="5358384"/>
-            <a:ext cx="566928" cy="566928"/>
+            <a:off x="6534760" y="5413248"/>
+            <a:ext cx="603504" cy="603504"/>
           </a:xfrm>
           <a:prstGeom prst="rect">
             <a:avLst/>
@@ -6166,7 +6285,7 @@
         </p:nvSpPr>
         <p:spPr>
           <a:xfrm>
-            <a:off x="7302856" y="5029200"/>
+            <a:off x="7321144" y="5084064"/>
             <a:ext cx="1630604" cy="502920"/>
           </a:xfrm>
           <a:prstGeom prst="rect">
@@ -6228,7 +6347,7 @@
         </p:nvSpPr>
         <p:spPr>
           <a:xfrm>
-            <a:off x="7302856" y="5596128"/>
+            <a:off x="7321144" y="5650992"/>
             <a:ext cx="1630604" cy="566928"/>
           </a:xfrm>
           <a:prstGeom prst="rect">
@@ -6267,7 +6386,7 @@
         </p:nvSpPr>
         <p:spPr>
           <a:xfrm>
-            <a:off x="6095848" y="5029200"/>
+            <a:off x="6095848" y="5084064"/>
             <a:ext cx="0" cy="1371600"/>
           </a:xfrm>
           <a:prstGeom prst="line">
@@ -6300,8 +6419,8 @@
         </p:blipFill>
         <p:spPr>
           <a:xfrm>
-            <a:off x="9600971" y="5358384"/>
-            <a:ext cx="566928" cy="566928"/>
+            <a:off x="9582683" y="5413248"/>
+            <a:ext cx="603504" cy="603504"/>
           </a:xfrm>
           <a:prstGeom prst="rect">
             <a:avLst/>
@@ -6316,7 +6435,7 @@
         </p:nvSpPr>
         <p:spPr>
           <a:xfrm>
-            <a:off x="10350779" y="5029200"/>
+            <a:off x="10369067" y="5084064"/>
             <a:ext cx="1630604" cy="502920"/>
           </a:xfrm>
           <a:prstGeom prst="rect">
@@ -6378,7 +6497,7 @@
         </p:nvSpPr>
         <p:spPr>
           <a:xfrm>
-            <a:off x="10350779" y="5596128"/>
+            <a:off x="10369067" y="5650992"/>
             <a:ext cx="1630604" cy="566928"/>
           </a:xfrm>
           <a:prstGeom prst="rect">
@@ -6417,7 +6536,7 @@
         </p:nvSpPr>
         <p:spPr>
           <a:xfrm>
-            <a:off x="9143771" y="5029200"/>
+            <a:off x="9143771" y="5084064"/>
             <a:ext cx="0" cy="1371600"/>
           </a:xfrm>
           <a:prstGeom prst="line">
@@ -6448,7 +6567,7 @@
     <p:bg>
       <p:bgPr>
         <a:solidFill>
-          <a:srgbClr val="FFFFFF"/>
+          <a:srgbClr val="F2F3F8"/>
         </a:solidFill>
       </p:bgPr>
     </p:bg>
@@ -6466,15 +6585,39 @@
           <a:chExt cx="0" cy="0"/>
         </a:xfrm>
       </p:grpSpPr>
-      <p:sp>
-        <p:nvSpPr>
-          <p:cNvPr id="2" name="Text 0"/>
-          <p:cNvSpPr/>
-          <p:nvPr/>
-        </p:nvSpPr>
-        <p:spPr>
-          <a:xfrm>
-            <a:off x="566928" y="256032"/>
+      <p:pic>
+        <p:nvPicPr>
+          <p:cNvPr id="2" name="Image 0" descr="/home/user/bolt.diy/presentaciones/indotel-ciudades-inteligentes/src/derived/globe_soft.jpg">    </p:cNvPr>
+          <p:cNvPicPr>
+            <a:picLocks noChangeAspect="1"/>
+          </p:cNvPicPr>
+          <p:nvPr/>
+        </p:nvPicPr>
+        <p:blipFill>
+          <a:blip r:embed="rId1"/>
+          <a:stretch>
+            <a:fillRect/>
+          </a:stretch>
+        </p:blipFill>
+        <p:spPr>
+          <a:xfrm>
+            <a:off x="-502920" y="1225296"/>
+            <a:ext cx="5486400" cy="4681728"/>
+          </a:xfrm>
+          <a:prstGeom prst="rect">
+            <a:avLst/>
+          </a:prstGeom>
+        </p:spPr>
+      </p:pic>
+      <p:sp>
+        <p:nvSpPr>
+          <p:cNvPr id="3" name="Text 0"/>
+          <p:cNvSpPr/>
+          <p:nvPr/>
+        </p:nvSpPr>
+        <p:spPr>
+          <a:xfrm>
+            <a:off x="566928" y="237744"/>
             <a:ext cx="3657600" cy="274320"/>
           </a:xfrm>
           <a:prstGeom prst="rect">
@@ -6491,9 +6634,9 @@
               <a:buNone/>
             </a:pPr>
             <a:r>
-              <a:rPr lang="en-US" sz="1500" b="1" spc="140" kern="0" dirty="0">
-                <a:solidFill>
-                  <a:srgbClr val="0B2C5E"/>
+              <a:rPr lang="en-US" sz="1500" b="1" spc="130" kern="0" dirty="0">
+                <a:solidFill>
+                  <a:srgbClr val="0D1B5E"/>
                 </a:solidFill>
                 <a:latin typeface="Arial" pitchFamily="34" charset="0"/>
                 <a:ea typeface="Arial" pitchFamily="34" charset="-122"/>
@@ -6507,13 +6650,13 @@
       </p:sp>
       <p:sp>
         <p:nvSpPr>
-          <p:cNvPr id="3" name="Text 1"/>
-          <p:cNvSpPr/>
-          <p:nvPr/>
-        </p:nvSpPr>
-        <p:spPr>
-          <a:xfrm>
-            <a:off x="566928" y="534924"/>
+          <p:cNvPr id="4" name="Text 1"/>
+          <p:cNvSpPr/>
+          <p:nvPr/>
+        </p:nvSpPr>
+        <p:spPr>
+          <a:xfrm>
+            <a:off x="566928" y="516636"/>
             <a:ext cx="3657600" cy="219456"/>
           </a:xfrm>
           <a:prstGeom prst="rect">
@@ -6532,7 +6675,7 @@
             <a:r>
               <a:rPr lang="en-US" sz="950" dirty="0">
                 <a:solidFill>
-                  <a:srgbClr val="8494A5"/>
+                  <a:srgbClr val="8A93A5"/>
                 </a:solidFill>
                 <a:latin typeface="Calibri" pitchFamily="34" charset="0"/>
                 <a:ea typeface="Calibri" pitchFamily="34" charset="-122"/>
@@ -6546,13 +6689,13 @@
       </p:sp>
       <p:sp>
         <p:nvSpPr>
-          <p:cNvPr id="4" name="Text 2"/>
-          <p:cNvSpPr/>
-          <p:nvPr/>
-        </p:nvSpPr>
-        <p:spPr>
-          <a:xfrm>
-            <a:off x="566928" y="822960"/>
+          <p:cNvPr id="5" name="Text 2"/>
+          <p:cNvSpPr/>
+          <p:nvPr/>
+        </p:nvSpPr>
+        <p:spPr>
+          <a:xfrm>
+            <a:off x="566928" y="768096"/>
             <a:ext cx="11057839" cy="420624"/>
           </a:xfrm>
           <a:prstGeom prst="rect">
@@ -6569,9 +6712,9 @@
               <a:buNone/>
             </a:pPr>
             <a:r>
-              <a:rPr lang="en-US" sz="2500" b="1" dirty="0">
-                <a:solidFill>
-                  <a:srgbClr val="0B2C5E"/>
+              <a:rPr lang="en-US" sz="2450" b="1" dirty="0">
+                <a:solidFill>
+                  <a:srgbClr val="0D1B5E"/>
                 </a:solidFill>
                 <a:latin typeface="Calibri" pitchFamily="34" charset="0"/>
                 <a:ea typeface="Calibri" pitchFamily="34" charset="-122"/>
@@ -6579,33 +6722,10 @@
               </a:rPr>
               <a:t>Primero: Quiénes son los actores</a:t>
             </a:r>
-            <a:endParaRPr lang="en-US" sz="2500" dirty="0"/>
-          </a:p>
-        </p:txBody>
-      </p:sp>
-      <p:pic>
-        <p:nvPicPr>
-          <p:cNvPr id="5" name="Image 0" descr="/home/user/bolt.diy/presentaciones/indotel-ciudades-inteligentes/src/derived/globe_crop.jpg">    </p:cNvPr>
-          <p:cNvPicPr>
-            <a:picLocks noChangeAspect="1"/>
-          </p:cNvPicPr>
-          <p:nvPr/>
-        </p:nvPicPr>
-        <p:blipFill>
-          <a:blip r:embed="rId1"/>
-          <a:srcRect l="0" r="0" t="0" b="0"/>
-          <a:stretch/>
-        </p:blipFill>
-        <p:spPr>
-          <a:xfrm>
-            <a:off x="0" y="1371600"/>
-            <a:ext cx="5532120" cy="4069080"/>
-          </a:xfrm>
-          <a:prstGeom prst="rect">
-            <a:avLst/>
-          </a:prstGeom>
-        </p:spPr>
-      </p:pic>
+            <a:endParaRPr lang="en-US" sz="2450" dirty="0"/>
+          </a:p>
+        </p:txBody>
+      </p:sp>
       <p:sp>
         <p:nvSpPr>
           <p:cNvPr id="6" name="Shape 3"/>
@@ -6614,14 +6734,14 @@
         </p:nvSpPr>
         <p:spPr>
           <a:xfrm>
-            <a:off x="5852160" y="1627632"/>
-            <a:ext cx="402336" cy="402336"/>
+            <a:off x="5779008" y="1645920"/>
+            <a:ext cx="420624" cy="420624"/>
           </a:xfrm>
           <a:prstGeom prst="ellipse">
             <a:avLst/>
           </a:prstGeom>
           <a:solidFill>
-            <a:srgbClr val="1668B8"/>
+            <a:srgbClr val="0B4489"/>
           </a:solidFill>
           <a:ln/>
         </p:spPr>
@@ -6634,8 +6754,8 @@
         </p:nvSpPr>
         <p:spPr>
           <a:xfrm>
-            <a:off x="5852160" y="1627632"/>
-            <a:ext cx="402336" cy="402336"/>
+            <a:off x="5779008" y="1645920"/>
+            <a:ext cx="420624" cy="420624"/>
           </a:xfrm>
           <a:prstGeom prst="rect">
             <a:avLst/>
@@ -6651,7 +6771,7 @@
               <a:buNone/>
             </a:pPr>
             <a:r>
-              <a:rPr lang="en-US" sz="1500" b="1" dirty="0">
+              <a:rPr lang="en-US" sz="1550" b="1" dirty="0">
                 <a:solidFill>
                   <a:srgbClr val="FFFFFF"/>
                 </a:solidFill>
@@ -6661,7 +6781,7 @@
               </a:rPr>
               <a:t>1</a:t>
             </a:r>
-            <a:endParaRPr lang="en-US" sz="1500" dirty="0"/>
+            <a:endParaRPr lang="en-US" sz="1550" dirty="0"/>
           </a:p>
         </p:txBody>
       </p:sp>
@@ -6673,8 +6793,8 @@
         </p:nvSpPr>
         <p:spPr>
           <a:xfrm>
-            <a:off x="6510528" y="1591056"/>
-            <a:ext cx="5102352" cy="246888"/>
+            <a:off x="6473952" y="1600200"/>
+            <a:ext cx="5157216" cy="256032"/>
           </a:xfrm>
           <a:prstGeom prst="rect">
             <a:avLst/>
@@ -6692,7 +6812,7 @@
             <a:r>
               <a:rPr lang="en-US" sz="1350" b="1" dirty="0">
                 <a:solidFill>
-                  <a:srgbClr val="0B2C5E"/>
+                  <a:srgbClr val="0D1B5E"/>
                 </a:solidFill>
                 <a:latin typeface="Calibri" pitchFamily="34" charset="0"/>
                 <a:ea typeface="Calibri" pitchFamily="34" charset="-122"/>
@@ -6712,8 +6832,8 @@
         </p:nvSpPr>
         <p:spPr>
           <a:xfrm>
-            <a:off x="6510528" y="1856232"/>
-            <a:ext cx="5102352" cy="621792"/>
+            <a:off x="6473952" y="1874520"/>
+            <a:ext cx="5157216" cy="621792"/>
           </a:xfrm>
           <a:prstGeom prst="rect">
             <a:avLst/>
@@ -6734,7 +6854,7 @@
             <a:r>
               <a:rPr lang="en-US" sz="1050" dirty="0">
                 <a:solidFill>
-                  <a:srgbClr val="44566B"/>
+                  <a:srgbClr val="3B4356"/>
                 </a:solidFill>
                 <a:latin typeface="Calibri" pitchFamily="34" charset="0"/>
                 <a:ea typeface="Calibri" pitchFamily="34" charset="-122"/>
@@ -6754,28 +6874,51 @@
         </p:nvSpPr>
         <p:spPr>
           <a:xfrm>
-            <a:off x="5852160" y="2843784"/>
-            <a:ext cx="402336" cy="402336"/>
+            <a:off x="5989320" y="2066544"/>
+            <a:ext cx="0" cy="777240"/>
+          </a:xfrm>
+          <a:prstGeom prst="line">
+            <a:avLst/>
+          </a:prstGeom>
+          <a:noFill/>
+          <a:ln w="12700">
+            <a:solidFill>
+              <a:srgbClr val="AFC2DA"/>
+            </a:solidFill>
+            <a:prstDash val="solid"/>
+          </a:ln>
+        </p:spPr>
+      </p:sp>
+      <p:sp>
+        <p:nvSpPr>
+          <p:cNvPr id="11" name="Shape 8"/>
+          <p:cNvSpPr/>
+          <p:nvPr/>
+        </p:nvSpPr>
+        <p:spPr>
+          <a:xfrm>
+            <a:off x="5779008" y="2843784"/>
+            <a:ext cx="420624" cy="420624"/>
           </a:xfrm>
           <a:prstGeom prst="ellipse">
             <a:avLst/>
           </a:prstGeom>
           <a:solidFill>
-            <a:srgbClr val="1668B8"/>
+            <a:srgbClr val="0B4489"/>
           </a:solidFill>
           <a:ln/>
         </p:spPr>
       </p:sp>
       <p:sp>
         <p:nvSpPr>
-          <p:cNvPr id="11" name="Text 8"/>
-          <p:cNvSpPr/>
-          <p:nvPr/>
-        </p:nvSpPr>
-        <p:spPr>
-          <a:xfrm>
-            <a:off x="5852160" y="2843784"/>
-            <a:ext cx="402336" cy="402336"/>
+          <p:cNvPr id="12" name="Text 9"/>
+          <p:cNvSpPr/>
+          <p:nvPr/>
+        </p:nvSpPr>
+        <p:spPr>
+          <a:xfrm>
+            <a:off x="5779008" y="2843784"/>
+            <a:ext cx="420624" cy="420624"/>
           </a:xfrm>
           <a:prstGeom prst="rect">
             <a:avLst/>
@@ -6791,7 +6934,7 @@
               <a:buNone/>
             </a:pPr>
             <a:r>
-              <a:rPr lang="en-US" sz="1500" b="1" dirty="0">
+              <a:rPr lang="en-US" sz="1550" b="1" dirty="0">
                 <a:solidFill>
                   <a:srgbClr val="FFFFFF"/>
                 </a:solidFill>
@@ -6801,20 +6944,20 @@
               </a:rPr>
               <a:t>2</a:t>
             </a:r>
-            <a:endParaRPr lang="en-US" sz="1500" dirty="0"/>
-          </a:p>
-        </p:txBody>
-      </p:sp>
-      <p:sp>
-        <p:nvSpPr>
-          <p:cNvPr id="12" name="Text 9"/>
-          <p:cNvSpPr/>
-          <p:nvPr/>
-        </p:nvSpPr>
-        <p:spPr>
-          <a:xfrm>
-            <a:off x="6510528" y="2807208"/>
-            <a:ext cx="5102352" cy="246888"/>
+            <a:endParaRPr lang="en-US" sz="1550" dirty="0"/>
+          </a:p>
+        </p:txBody>
+      </p:sp>
+      <p:sp>
+        <p:nvSpPr>
+          <p:cNvPr id="13" name="Text 10"/>
+          <p:cNvSpPr/>
+          <p:nvPr/>
+        </p:nvSpPr>
+        <p:spPr>
+          <a:xfrm>
+            <a:off x="6473952" y="2798064"/>
+            <a:ext cx="5157216" cy="256032"/>
           </a:xfrm>
           <a:prstGeom prst="rect">
             <a:avLst/>
@@ -6832,7 +6975,7 @@
             <a:r>
               <a:rPr lang="en-US" sz="1350" b="1" dirty="0">
                 <a:solidFill>
-                  <a:srgbClr val="0B2C5E"/>
+                  <a:srgbClr val="0D1B5E"/>
                 </a:solidFill>
                 <a:latin typeface="Calibri" pitchFamily="34" charset="0"/>
                 <a:ea typeface="Calibri" pitchFamily="34" charset="-122"/>
@@ -6846,14 +6989,14 @@
       </p:sp>
       <p:sp>
         <p:nvSpPr>
-          <p:cNvPr id="13" name="Text 10"/>
-          <p:cNvSpPr/>
-          <p:nvPr/>
-        </p:nvSpPr>
-        <p:spPr>
-          <a:xfrm>
-            <a:off x="6510528" y="3072384"/>
-            <a:ext cx="5102352" cy="621792"/>
+          <p:cNvPr id="14" name="Text 11"/>
+          <p:cNvSpPr/>
+          <p:nvPr/>
+        </p:nvSpPr>
+        <p:spPr>
+          <a:xfrm>
+            <a:off x="6473952" y="3072384"/>
+            <a:ext cx="5157216" cy="621792"/>
           </a:xfrm>
           <a:prstGeom prst="rect">
             <a:avLst/>
@@ -6874,7 +7017,7 @@
             <a:r>
               <a:rPr lang="en-US" sz="1050" dirty="0">
                 <a:solidFill>
-                  <a:srgbClr val="44566B"/>
+                  <a:srgbClr val="3B4356"/>
                 </a:solidFill>
                 <a:latin typeface="Calibri" pitchFamily="34" charset="0"/>
                 <a:ea typeface="Calibri" pitchFamily="34" charset="-122"/>
@@ -6888,34 +7031,57 @@
       </p:sp>
       <p:sp>
         <p:nvSpPr>
-          <p:cNvPr id="14" name="Shape 11"/>
-          <p:cNvSpPr/>
-          <p:nvPr/>
-        </p:nvSpPr>
-        <p:spPr>
-          <a:xfrm>
-            <a:off x="5852160" y="4059936"/>
-            <a:ext cx="402336" cy="402336"/>
+          <p:cNvPr id="15" name="Shape 12"/>
+          <p:cNvSpPr/>
+          <p:nvPr/>
+        </p:nvSpPr>
+        <p:spPr>
+          <a:xfrm>
+            <a:off x="5989320" y="3264408"/>
+            <a:ext cx="0" cy="777240"/>
+          </a:xfrm>
+          <a:prstGeom prst="line">
+            <a:avLst/>
+          </a:prstGeom>
+          <a:noFill/>
+          <a:ln w="12700">
+            <a:solidFill>
+              <a:srgbClr val="AFC2DA"/>
+            </a:solidFill>
+            <a:prstDash val="solid"/>
+          </a:ln>
+        </p:spPr>
+      </p:sp>
+      <p:sp>
+        <p:nvSpPr>
+          <p:cNvPr id="16" name="Shape 13"/>
+          <p:cNvSpPr/>
+          <p:nvPr/>
+        </p:nvSpPr>
+        <p:spPr>
+          <a:xfrm>
+            <a:off x="5779008" y="4041648"/>
+            <a:ext cx="420624" cy="420624"/>
           </a:xfrm>
           <a:prstGeom prst="ellipse">
             <a:avLst/>
           </a:prstGeom>
           <a:solidFill>
-            <a:srgbClr val="1668B8"/>
+            <a:srgbClr val="0B4489"/>
           </a:solidFill>
           <a:ln/>
         </p:spPr>
       </p:sp>
       <p:sp>
         <p:nvSpPr>
-          <p:cNvPr id="15" name="Text 12"/>
-          <p:cNvSpPr/>
-          <p:nvPr/>
-        </p:nvSpPr>
-        <p:spPr>
-          <a:xfrm>
-            <a:off x="5852160" y="4059936"/>
-            <a:ext cx="402336" cy="402336"/>
+          <p:cNvPr id="17" name="Text 14"/>
+          <p:cNvSpPr/>
+          <p:nvPr/>
+        </p:nvSpPr>
+        <p:spPr>
+          <a:xfrm>
+            <a:off x="5779008" y="4041648"/>
+            <a:ext cx="420624" cy="420624"/>
           </a:xfrm>
           <a:prstGeom prst="rect">
             <a:avLst/>
@@ -6931,7 +7097,7 @@
               <a:buNone/>
             </a:pPr>
             <a:r>
-              <a:rPr lang="en-US" sz="1500" b="1" dirty="0">
+              <a:rPr lang="en-US" sz="1550" b="1" dirty="0">
                 <a:solidFill>
                   <a:srgbClr val="FFFFFF"/>
                 </a:solidFill>
@@ -6941,20 +7107,20 @@
               </a:rPr>
               <a:t>3</a:t>
             </a:r>
-            <a:endParaRPr lang="en-US" sz="1500" dirty="0"/>
-          </a:p>
-        </p:txBody>
-      </p:sp>
-      <p:sp>
-        <p:nvSpPr>
-          <p:cNvPr id="16" name="Text 13"/>
-          <p:cNvSpPr/>
-          <p:nvPr/>
-        </p:nvSpPr>
-        <p:spPr>
-          <a:xfrm>
-            <a:off x="6510528" y="4023360"/>
-            <a:ext cx="5102352" cy="246888"/>
+            <a:endParaRPr lang="en-US" sz="1550" dirty="0"/>
+          </a:p>
+        </p:txBody>
+      </p:sp>
+      <p:sp>
+        <p:nvSpPr>
+          <p:cNvPr id="18" name="Text 15"/>
+          <p:cNvSpPr/>
+          <p:nvPr/>
+        </p:nvSpPr>
+        <p:spPr>
+          <a:xfrm>
+            <a:off x="6473952" y="3995928"/>
+            <a:ext cx="5157216" cy="256032"/>
           </a:xfrm>
           <a:prstGeom prst="rect">
             <a:avLst/>
@@ -6972,7 +7138,7 @@
             <a:r>
               <a:rPr lang="en-US" sz="1350" b="1" dirty="0">
                 <a:solidFill>
-                  <a:srgbClr val="0B2C5E"/>
+                  <a:srgbClr val="0D1B5E"/>
                 </a:solidFill>
                 <a:latin typeface="Calibri" pitchFamily="34" charset="0"/>
                 <a:ea typeface="Calibri" pitchFamily="34" charset="-122"/>
@@ -6986,14 +7152,14 @@
       </p:sp>
       <p:sp>
         <p:nvSpPr>
-          <p:cNvPr id="17" name="Text 14"/>
-          <p:cNvSpPr/>
-          <p:nvPr/>
-        </p:nvSpPr>
-        <p:spPr>
-          <a:xfrm>
-            <a:off x="6510528" y="4288536"/>
-            <a:ext cx="5102352" cy="451104"/>
+          <p:cNvPr id="19" name="Text 16"/>
+          <p:cNvSpPr/>
+          <p:nvPr/>
+        </p:nvSpPr>
+        <p:spPr>
+          <a:xfrm>
+            <a:off x="6473952" y="4270248"/>
+            <a:ext cx="5157216" cy="451104"/>
           </a:xfrm>
           <a:prstGeom prst="rect">
             <a:avLst/>
@@ -7014,7 +7180,7 @@
             <a:r>
               <a:rPr lang="en-US" sz="1050" dirty="0">
                 <a:solidFill>
-                  <a:srgbClr val="44566B"/>
+                  <a:srgbClr val="3B4356"/>
                 </a:solidFill>
                 <a:latin typeface="Calibri" pitchFamily="34" charset="0"/>
                 <a:ea typeface="Calibri" pitchFamily="34" charset="-122"/>
@@ -7028,34 +7194,34 @@
       </p:sp>
       <p:sp>
         <p:nvSpPr>
-          <p:cNvPr id="18" name="Shape 15"/>
-          <p:cNvSpPr/>
-          <p:nvPr/>
-        </p:nvSpPr>
-        <p:spPr>
-          <a:xfrm>
-            <a:off x="0" y="5623560"/>
-            <a:ext cx="12191695" cy="658368"/>
+          <p:cNvPr id="20" name="Shape 17"/>
+          <p:cNvSpPr/>
+          <p:nvPr/>
+        </p:nvSpPr>
+        <p:spPr>
+          <a:xfrm>
+            <a:off x="0" y="5596128"/>
+            <a:ext cx="12191695" cy="676656"/>
           </a:xfrm>
           <a:prstGeom prst="rect">
             <a:avLst/>
           </a:prstGeom>
           <a:solidFill>
-            <a:srgbClr val="0B2C5E"/>
+            <a:srgbClr val="0A2E7A"/>
           </a:solidFill>
           <a:ln/>
         </p:spPr>
       </p:sp>
       <p:sp>
         <p:nvSpPr>
-          <p:cNvPr id="19" name="Text 16"/>
-          <p:cNvSpPr/>
-          <p:nvPr/>
-        </p:nvSpPr>
-        <p:spPr>
-          <a:xfrm>
-            <a:off x="566928" y="5623560"/>
-            <a:ext cx="10710367" cy="658368"/>
+          <p:cNvPr id="21" name="Text 18"/>
+          <p:cNvSpPr/>
+          <p:nvPr/>
+        </p:nvSpPr>
+        <p:spPr>
+          <a:xfrm>
+            <a:off x="566928" y="5596128"/>
+            <a:ext cx="10573207" cy="676656"/>
           </a:xfrm>
           <a:prstGeom prst="rect">
             <a:avLst/>
@@ -7069,7 +7235,7 @@
           <a:p>
             <a:pPr indent="0" marL="0">
               <a:lnSpc>
-                <a:spcPts val="1500"/>
+                <a:spcPts val="1550"/>
               </a:lnSpc>
               <a:buNone/>
             </a:pPr>
@@ -7090,14 +7256,14 @@
       </p:sp>
       <p:sp>
         <p:nvSpPr>
-          <p:cNvPr id="20" name="Text 17"/>
-          <p:cNvSpPr/>
-          <p:nvPr/>
-        </p:nvSpPr>
-        <p:spPr>
-          <a:xfrm>
-            <a:off x="11533327" y="5623560"/>
-            <a:ext cx="320040" cy="658368"/>
+          <p:cNvPr id="22" name="Text 19"/>
+          <p:cNvSpPr/>
+          <p:nvPr/>
+        </p:nvSpPr>
+        <p:spPr>
+          <a:xfrm>
+            <a:off x="11405311" y="5596128"/>
+            <a:ext cx="365760" cy="676656"/>
           </a:xfrm>
           <a:prstGeom prst="rect">
             <a:avLst/>
@@ -7113,9 +7279,9 @@
               <a:buNone/>
             </a:pPr>
             <a:r>
-              <a:rPr lang="en-US" sz="950" b="1" dirty="0">
-                <a:solidFill>
-                  <a:srgbClr val="2E9BF0"/>
+              <a:rPr lang="en-US" sz="1000" b="1" dirty="0">
+                <a:solidFill>
+                  <a:srgbClr val="9CC4EE"/>
                 </a:solidFill>
                 <a:latin typeface="Calibri" pitchFamily="34" charset="0"/>
                 <a:ea typeface="Calibri" pitchFamily="34" charset="-122"/>
@@ -7123,20 +7289,20 @@
               </a:rPr>
               <a:t>3</a:t>
             </a:r>
-            <a:endParaRPr lang="en-US" sz="950" dirty="0"/>
-          </a:p>
-        </p:txBody>
-      </p:sp>
-      <p:sp>
-        <p:nvSpPr>
-          <p:cNvPr id="21" name="Text 18"/>
-          <p:cNvSpPr/>
-          <p:nvPr/>
-        </p:nvSpPr>
-        <p:spPr>
-          <a:xfrm>
-            <a:off x="566928" y="6400800"/>
-            <a:ext cx="10234879" cy="237744"/>
+            <a:endParaRPr lang="en-US" sz="1000" dirty="0"/>
+          </a:p>
+        </p:txBody>
+      </p:sp>
+      <p:sp>
+        <p:nvSpPr>
+          <p:cNvPr id="23" name="Text 20"/>
+          <p:cNvSpPr/>
+          <p:nvPr/>
+        </p:nvSpPr>
+        <p:spPr>
+          <a:xfrm>
+            <a:off x="566928" y="6437376"/>
+            <a:ext cx="10143439" cy="237744"/>
           </a:xfrm>
           <a:prstGeom prst="rect">
             <a:avLst/>
@@ -7152,9 +7318,9 @@
               <a:buNone/>
             </a:pPr>
             <a:r>
-              <a:rPr lang="en-US" sz="850" i="1" dirty="0">
-                <a:solidFill>
-                  <a:srgbClr val="8494A5"/>
+              <a:rPr lang="en-US" sz="850" dirty="0">
+                <a:solidFill>
+                  <a:srgbClr val="8A93A5"/>
                 </a:solidFill>
                 <a:latin typeface="Calibri" pitchFamily="34" charset="0"/>
                 <a:ea typeface="Calibri" pitchFamily="34" charset="-122"/>
@@ -7180,7 +7346,7 @@
     <p:bg>
       <p:bgPr>
         <a:solidFill>
-          <a:srgbClr val="FFFFFF"/>
+          <a:srgbClr val="F2F3F8"/>
         </a:solidFill>
       </p:bgPr>
     </p:bg>
@@ -7206,7 +7372,7 @@
         </p:nvSpPr>
         <p:spPr>
           <a:xfrm>
-            <a:off x="566928" y="256032"/>
+            <a:off x="566928" y="237744"/>
             <a:ext cx="3657600" cy="274320"/>
           </a:xfrm>
           <a:prstGeom prst="rect">
@@ -7223,9 +7389,9 @@
               <a:buNone/>
             </a:pPr>
             <a:r>
-              <a:rPr lang="en-US" sz="1500" b="1" spc="140" kern="0" dirty="0">
-                <a:solidFill>
-                  <a:srgbClr val="0B2C5E"/>
+              <a:rPr lang="en-US" sz="1500" b="1" spc="130" kern="0" dirty="0">
+                <a:solidFill>
+                  <a:srgbClr val="0D1B5E"/>
                 </a:solidFill>
                 <a:latin typeface="Arial" pitchFamily="34" charset="0"/>
                 <a:ea typeface="Arial" pitchFamily="34" charset="-122"/>
@@ -7245,7 +7411,7 @@
         </p:nvSpPr>
         <p:spPr>
           <a:xfrm>
-            <a:off x="566928" y="534924"/>
+            <a:off x="566928" y="516636"/>
             <a:ext cx="3657600" cy="219456"/>
           </a:xfrm>
           <a:prstGeom prst="rect">
@@ -7264,7 +7430,7 @@
             <a:r>
               <a:rPr lang="en-US" sz="950" dirty="0">
                 <a:solidFill>
-                  <a:srgbClr val="8494A5"/>
+                  <a:srgbClr val="8A93A5"/>
                 </a:solidFill>
                 <a:latin typeface="Calibri" pitchFamily="34" charset="0"/>
                 <a:ea typeface="Calibri" pitchFamily="34" charset="-122"/>
@@ -7284,7 +7450,7 @@
         </p:nvSpPr>
         <p:spPr>
           <a:xfrm>
-            <a:off x="566928" y="822960"/>
+            <a:off x="566928" y="768096"/>
             <a:ext cx="11057839" cy="420624"/>
           </a:xfrm>
           <a:prstGeom prst="rect">
@@ -7301,9 +7467,9 @@
               <a:buNone/>
             </a:pPr>
             <a:r>
-              <a:rPr lang="en-US" sz="2500" b="1" dirty="0">
-                <a:solidFill>
-                  <a:srgbClr val="0B2C5E"/>
+              <a:rPr lang="en-US" sz="2450" b="1" dirty="0">
+                <a:solidFill>
+                  <a:srgbClr val="0D1B5E"/>
                 </a:solidFill>
                 <a:latin typeface="Calibri" pitchFamily="34" charset="0"/>
                 <a:ea typeface="Calibri" pitchFamily="34" charset="-122"/>
@@ -7311,7 +7477,7 @@
               </a:rPr>
               <a:t>InDiCo Global: cooperación digital y estándares</a:t>
             </a:r>
-            <a:endParaRPr lang="en-US" sz="2500" dirty="0"/>
+            <a:endParaRPr lang="en-US" sz="2450" dirty="0"/>
           </a:p>
         </p:txBody>
       </p:sp>
@@ -7323,8 +7489,8 @@
         </p:nvSpPr>
         <p:spPr>
           <a:xfrm>
-            <a:off x="566928" y="1280160"/>
-            <a:ext cx="11057839" cy="457200"/>
+            <a:off x="566928" y="1234440"/>
+            <a:ext cx="11057839" cy="475488"/>
           </a:xfrm>
           <a:prstGeom prst="rect">
             <a:avLst/>
@@ -7338,14 +7504,14 @@
           <a:p>
             <a:pPr indent="0" marL="0">
               <a:lnSpc>
-                <a:spcPts val="1600"/>
+                <a:spcPts val="1650"/>
               </a:lnSpc>
               <a:buNone/>
             </a:pPr>
             <a:r>
-              <a:rPr lang="en-US" sz="1250" dirty="0">
-                <a:solidFill>
-                  <a:srgbClr val="44566B"/>
+              <a:rPr lang="en-US" sz="1250" b="1" dirty="0">
+                <a:solidFill>
+                  <a:srgbClr val="243C8F"/>
                 </a:solidFill>
                 <a:latin typeface="Calibri" pitchFamily="34" charset="0"/>
                 <a:ea typeface="Calibri" pitchFamily="34" charset="-122"/>
@@ -7365,18 +7531,19 @@
         </p:nvSpPr>
         <p:spPr>
           <a:xfrm>
-            <a:off x="566928" y="1938528"/>
-            <a:ext cx="5330952" cy="3310128"/>
-          </a:xfrm>
-          <a:prstGeom prst="roundRect">
-            <a:avLst>
-              <a:gd name="adj" fmla="val 1657"/>
-            </a:avLst>
-          </a:prstGeom>
-          <a:solidFill>
-            <a:srgbClr val="F3F7FB"/>
-          </a:solidFill>
-          <a:ln/>
+            <a:off x="5989320" y="1920240"/>
+            <a:ext cx="0" cy="3246120"/>
+          </a:xfrm>
+          <a:prstGeom prst="line">
+            <a:avLst/>
+          </a:prstGeom>
+          <a:noFill/>
+          <a:ln w="12700">
+            <a:solidFill>
+              <a:srgbClr val="CBD5E4"/>
+            </a:solidFill>
+            <a:prstDash val="solid"/>
+          </a:ln>
         </p:spPr>
       </p:sp>
       <p:sp>
@@ -7387,8 +7554,8 @@
         </p:nvSpPr>
         <p:spPr>
           <a:xfrm>
-            <a:off x="932688" y="2212848"/>
-            <a:ext cx="4599432" cy="292608"/>
+            <a:off x="566928" y="1920240"/>
+            <a:ext cx="4828032" cy="292608"/>
           </a:xfrm>
           <a:prstGeom prst="rect">
             <a:avLst/>
@@ -7406,7 +7573,7 @@
             <a:r>
               <a:rPr lang="en-US" sz="1350" b="1" dirty="0">
                 <a:solidFill>
-                  <a:srgbClr val="1668B8"/>
+                  <a:srgbClr val="243C8F"/>
                 </a:solidFill>
                 <a:latin typeface="Calibri" pitchFamily="34" charset="0"/>
                 <a:ea typeface="Calibri" pitchFamily="34" charset="-122"/>
@@ -7434,8 +7601,8 @@
         </p:blipFill>
         <p:spPr>
           <a:xfrm>
-            <a:off x="932688" y="2793492"/>
-            <a:ext cx="164592" cy="164592"/>
+            <a:off x="566928" y="2459736"/>
+            <a:ext cx="182880" cy="182880"/>
           </a:xfrm>
           <a:prstGeom prst="rect">
             <a:avLst/>
@@ -7450,8 +7617,8 @@
         </p:nvSpPr>
         <p:spPr>
           <a:xfrm>
-            <a:off x="1234440" y="2720340"/>
-            <a:ext cx="4297680" cy="288544"/>
+            <a:off x="877824" y="2386584"/>
+            <a:ext cx="4517136" cy="288544"/>
           </a:xfrm>
           <a:prstGeom prst="rect">
             <a:avLst/>
@@ -7472,7 +7639,7 @@
             <a:r>
               <a:rPr lang="en-US" sz="1100" dirty="0">
                 <a:solidFill>
-                  <a:srgbClr val="44566B"/>
+                  <a:srgbClr val="3B4356"/>
                 </a:solidFill>
                 <a:latin typeface="Calibri" pitchFamily="34" charset="0"/>
                 <a:ea typeface="Calibri" pitchFamily="34" charset="-122"/>
@@ -7500,8 +7667,8 @@
         </p:blipFill>
         <p:spPr>
           <a:xfrm>
-            <a:off x="932688" y="3246628"/>
-            <a:ext cx="164592" cy="164592"/>
+            <a:off x="566928" y="2967736"/>
+            <a:ext cx="182880" cy="182880"/>
           </a:xfrm>
           <a:prstGeom prst="rect">
             <a:avLst/>
@@ -7516,8 +7683,8 @@
         </p:nvSpPr>
         <p:spPr>
           <a:xfrm>
-            <a:off x="1234440" y="3173476"/>
-            <a:ext cx="4297680" cy="288544"/>
+            <a:off x="877824" y="2894584"/>
+            <a:ext cx="4517136" cy="288544"/>
           </a:xfrm>
           <a:prstGeom prst="rect">
             <a:avLst/>
@@ -7538,7 +7705,7 @@
             <a:r>
               <a:rPr lang="en-US" sz="1100" dirty="0">
                 <a:solidFill>
-                  <a:srgbClr val="44566B"/>
+                  <a:srgbClr val="3B4356"/>
                 </a:solidFill>
                 <a:latin typeface="Calibri" pitchFamily="34" charset="0"/>
                 <a:ea typeface="Calibri" pitchFamily="34" charset="-122"/>
@@ -7566,8 +7733,8 @@
         </p:blipFill>
         <p:spPr>
           <a:xfrm>
-            <a:off x="932688" y="3699764"/>
-            <a:ext cx="164592" cy="164592"/>
+            <a:off x="566928" y="3475736"/>
+            <a:ext cx="182880" cy="182880"/>
           </a:xfrm>
           <a:prstGeom prst="rect">
             <a:avLst/>
@@ -7582,8 +7749,8 @@
         </p:nvSpPr>
         <p:spPr>
           <a:xfrm>
-            <a:off x="1234440" y="3626612"/>
-            <a:ext cx="4297680" cy="467360"/>
+            <a:off x="877824" y="3402584"/>
+            <a:ext cx="4517136" cy="467360"/>
           </a:xfrm>
           <a:prstGeom prst="rect">
             <a:avLst/>
@@ -7604,7 +7771,7 @@
             <a:r>
               <a:rPr lang="en-US" sz="1100" dirty="0">
                 <a:solidFill>
-                  <a:srgbClr val="44566B"/>
+                  <a:srgbClr val="3B4356"/>
                 </a:solidFill>
                 <a:latin typeface="Calibri" pitchFamily="34" charset="0"/>
                 <a:ea typeface="Calibri" pitchFamily="34" charset="-122"/>
@@ -7632,8 +7799,8 @@
         </p:blipFill>
         <p:spPr>
           <a:xfrm>
-            <a:off x="932688" y="4331716"/>
-            <a:ext cx="164592" cy="164592"/>
+            <a:off x="566928" y="4162552"/>
+            <a:ext cx="182880" cy="182880"/>
           </a:xfrm>
           <a:prstGeom prst="rect">
             <a:avLst/>
@@ -7648,8 +7815,8 @@
         </p:nvSpPr>
         <p:spPr>
           <a:xfrm>
-            <a:off x="1234440" y="4258564"/>
-            <a:ext cx="4297680" cy="467360"/>
+            <a:off x="877824" y="4089400"/>
+            <a:ext cx="4517136" cy="467360"/>
           </a:xfrm>
           <a:prstGeom prst="rect">
             <a:avLst/>
@@ -7670,7 +7837,7 @@
             <a:r>
               <a:rPr lang="en-US" sz="1100" dirty="0">
                 <a:solidFill>
-                  <a:srgbClr val="44566B"/>
+                  <a:srgbClr val="3B4356"/>
                 </a:solidFill>
                 <a:latin typeface="Calibri" pitchFamily="34" charset="0"/>
                 <a:ea typeface="Calibri" pitchFamily="34" charset="-122"/>
@@ -7684,36 +7851,14 @@
       </p:sp>
       <p:sp>
         <p:nvSpPr>
-          <p:cNvPr id="16" name="Shape 10"/>
-          <p:cNvSpPr/>
-          <p:nvPr/>
-        </p:nvSpPr>
-        <p:spPr>
-          <a:xfrm>
-            <a:off x="6291072" y="1938528"/>
-            <a:ext cx="5330952" cy="3310128"/>
-          </a:xfrm>
-          <a:prstGeom prst="roundRect">
-            <a:avLst>
-              <a:gd name="adj" fmla="val 1657"/>
-            </a:avLst>
-          </a:prstGeom>
-          <a:solidFill>
-            <a:srgbClr val="F3F7FB"/>
-          </a:solidFill>
-          <a:ln/>
-        </p:spPr>
-      </p:sp>
-      <p:sp>
-        <p:nvSpPr>
-          <p:cNvPr id="17" name="Text 11"/>
-          <p:cNvSpPr/>
-          <p:nvPr/>
-        </p:nvSpPr>
-        <p:spPr>
-          <a:xfrm>
-            <a:off x="6656832" y="2212848"/>
-            <a:ext cx="4599432" cy="292608"/>
+          <p:cNvPr id="16" name="Text 10"/>
+          <p:cNvSpPr/>
+          <p:nvPr/>
+        </p:nvSpPr>
+        <p:spPr>
+          <a:xfrm>
+            <a:off x="6355080" y="1920240"/>
+            <a:ext cx="4828032" cy="292608"/>
           </a:xfrm>
           <a:prstGeom prst="rect">
             <a:avLst/>
@@ -7731,7 +7876,7 @@
             <a:r>
               <a:rPr lang="en-US" sz="1350" b="1" dirty="0">
                 <a:solidFill>
-                  <a:srgbClr val="1668B8"/>
+                  <a:srgbClr val="243C8F"/>
                 </a:solidFill>
                 <a:latin typeface="Calibri" pitchFamily="34" charset="0"/>
                 <a:ea typeface="Calibri" pitchFamily="34" charset="-122"/>
@@ -7745,7 +7890,7 @@
       </p:sp>
       <p:pic>
         <p:nvPicPr>
-          <p:cNvPr id="18" name="Image 4" descr="/home/user/bolt.diy/presentaciones/indotel-ciudades-inteligentes/src/icons/check_blue.png">    </p:cNvPr>
+          <p:cNvPr id="17" name="Image 4" descr="/home/user/bolt.diy/presentaciones/indotel-ciudades-inteligentes/src/icons/check_blue.png">    </p:cNvPr>
           <p:cNvPicPr>
             <a:picLocks noChangeAspect="1"/>
           </p:cNvPicPr>
@@ -7759,8 +7904,8 @@
         </p:blipFill>
         <p:spPr>
           <a:xfrm>
-            <a:off x="6656832" y="2793492"/>
-            <a:ext cx="164592" cy="164592"/>
+            <a:off x="6355080" y="2459736"/>
+            <a:ext cx="182880" cy="182880"/>
           </a:xfrm>
           <a:prstGeom prst="rect">
             <a:avLst/>
@@ -7769,14 +7914,14 @@
       </p:pic>
       <p:sp>
         <p:nvSpPr>
-          <p:cNvPr id="19" name="Text 12"/>
-          <p:cNvSpPr/>
-          <p:nvPr/>
-        </p:nvSpPr>
-        <p:spPr>
-          <a:xfrm>
-            <a:off x="6958584" y="2720340"/>
-            <a:ext cx="4297680" cy="467360"/>
+          <p:cNvPr id="18" name="Text 11"/>
+          <p:cNvSpPr/>
+          <p:nvPr/>
+        </p:nvSpPr>
+        <p:spPr>
+          <a:xfrm>
+            <a:off x="6665976" y="2386584"/>
+            <a:ext cx="4517136" cy="467360"/>
           </a:xfrm>
           <a:prstGeom prst="rect">
             <a:avLst/>
@@ -7797,7 +7942,7 @@
             <a:r>
               <a:rPr lang="en-US" sz="1100" dirty="0">
                 <a:solidFill>
-                  <a:srgbClr val="44566B"/>
+                  <a:srgbClr val="3B4356"/>
                 </a:solidFill>
                 <a:latin typeface="Calibri" pitchFamily="34" charset="0"/>
                 <a:ea typeface="Calibri" pitchFamily="34" charset="-122"/>
@@ -7811,7 +7956,7 @@
       </p:sp>
       <p:pic>
         <p:nvPicPr>
-          <p:cNvPr id="20" name="Image 5" descr="/home/user/bolt.diy/presentaciones/indotel-ciudades-inteligentes/src/icons/check_blue.png">    </p:cNvPr>
+          <p:cNvPr id="19" name="Image 5" descr="/home/user/bolt.diy/presentaciones/indotel-ciudades-inteligentes/src/icons/check_blue.png">    </p:cNvPr>
           <p:cNvPicPr>
             <a:picLocks noChangeAspect="1"/>
           </p:cNvPicPr>
@@ -7825,8 +7970,8 @@
         </p:blipFill>
         <p:spPr>
           <a:xfrm>
-            <a:off x="6656832" y="3425444"/>
-            <a:ext cx="164592" cy="164592"/>
+            <a:off x="6355080" y="3146552"/>
+            <a:ext cx="182880" cy="182880"/>
           </a:xfrm>
           <a:prstGeom prst="rect">
             <a:avLst/>
@@ -7835,14 +7980,14 @@
       </p:pic>
       <p:sp>
         <p:nvSpPr>
-          <p:cNvPr id="21" name="Text 13"/>
-          <p:cNvSpPr/>
-          <p:nvPr/>
-        </p:nvSpPr>
-        <p:spPr>
-          <a:xfrm>
-            <a:off x="6958584" y="3352292"/>
-            <a:ext cx="4297680" cy="467360"/>
+          <p:cNvPr id="20" name="Text 12"/>
+          <p:cNvSpPr/>
+          <p:nvPr/>
+        </p:nvSpPr>
+        <p:spPr>
+          <a:xfrm>
+            <a:off x="6665976" y="3073400"/>
+            <a:ext cx="4517136" cy="467360"/>
           </a:xfrm>
           <a:prstGeom prst="rect">
             <a:avLst/>
@@ -7863,7 +8008,7 @@
             <a:r>
               <a:rPr lang="en-US" sz="1100" dirty="0">
                 <a:solidFill>
-                  <a:srgbClr val="44566B"/>
+                  <a:srgbClr val="3B4356"/>
                 </a:solidFill>
                 <a:latin typeface="Calibri" pitchFamily="34" charset="0"/>
                 <a:ea typeface="Calibri" pitchFamily="34" charset="-122"/>
@@ -7877,7 +8022,7 @@
       </p:sp>
       <p:pic>
         <p:nvPicPr>
-          <p:cNvPr id="22" name="Image 6" descr="/home/user/bolt.diy/presentaciones/indotel-ciudades-inteligentes/src/icons/check_blue.png">    </p:cNvPr>
+          <p:cNvPr id="21" name="Image 6" descr="/home/user/bolt.diy/presentaciones/indotel-ciudades-inteligentes/src/icons/check_blue.png">    </p:cNvPr>
           <p:cNvPicPr>
             <a:picLocks noChangeAspect="1"/>
           </p:cNvPicPr>
@@ -7891,8 +8036,8 @@
         </p:blipFill>
         <p:spPr>
           <a:xfrm>
-            <a:off x="6656832" y="4057396"/>
-            <a:ext cx="164592" cy="164592"/>
+            <a:off x="6355080" y="3833368"/>
+            <a:ext cx="182880" cy="182880"/>
           </a:xfrm>
           <a:prstGeom prst="rect">
             <a:avLst/>
@@ -7901,14 +8046,14 @@
       </p:pic>
       <p:sp>
         <p:nvSpPr>
-          <p:cNvPr id="23" name="Text 14"/>
-          <p:cNvSpPr/>
-          <p:nvPr/>
-        </p:nvSpPr>
-        <p:spPr>
-          <a:xfrm>
-            <a:off x="6958584" y="3984244"/>
-            <a:ext cx="4297680" cy="467360"/>
+          <p:cNvPr id="22" name="Text 13"/>
+          <p:cNvSpPr/>
+          <p:nvPr/>
+        </p:nvSpPr>
+        <p:spPr>
+          <a:xfrm>
+            <a:off x="6665976" y="3760216"/>
+            <a:ext cx="4517136" cy="467360"/>
           </a:xfrm>
           <a:prstGeom prst="rect">
             <a:avLst/>
@@ -7929,7 +8074,7 @@
             <a:r>
               <a:rPr lang="en-US" sz="1100" dirty="0">
                 <a:solidFill>
-                  <a:srgbClr val="44566B"/>
+                  <a:srgbClr val="3B4356"/>
                 </a:solidFill>
                 <a:latin typeface="Calibri" pitchFamily="34" charset="0"/>
                 <a:ea typeface="Calibri" pitchFamily="34" charset="-122"/>
@@ -7943,34 +8088,76 @@
       </p:sp>
       <p:sp>
         <p:nvSpPr>
-          <p:cNvPr id="24" name="Shape 15"/>
-          <p:cNvSpPr/>
-          <p:nvPr/>
-        </p:nvSpPr>
-        <p:spPr>
-          <a:xfrm>
-            <a:off x="0" y="5541264"/>
-            <a:ext cx="12191695" cy="658368"/>
+          <p:cNvPr id="23" name="Shape 14"/>
+          <p:cNvSpPr/>
+          <p:nvPr/>
+        </p:nvSpPr>
+        <p:spPr>
+          <a:xfrm>
+            <a:off x="0" y="5504688"/>
+            <a:ext cx="12191695" cy="676656"/>
           </a:xfrm>
           <a:prstGeom prst="rect">
             <a:avLst/>
           </a:prstGeom>
           <a:solidFill>
-            <a:srgbClr val="0B2C5E"/>
+            <a:srgbClr val="0A2E7A"/>
           </a:solidFill>
           <a:ln/>
         </p:spPr>
       </p:sp>
       <p:sp>
         <p:nvSpPr>
+          <p:cNvPr id="24" name="Text 15"/>
+          <p:cNvSpPr/>
+          <p:nvPr/>
+        </p:nvSpPr>
+        <p:spPr>
+          <a:xfrm>
+            <a:off x="566928" y="5504688"/>
+            <a:ext cx="10573207" cy="676656"/>
+          </a:xfrm>
+          <a:prstGeom prst="rect">
+            <a:avLst/>
+          </a:prstGeom>
+          <a:noFill/>
+          <a:ln/>
+        </p:spPr>
+        <p:txBody>
+          <a:bodyPr wrap="square" lIns="0" tIns="0" rIns="0" bIns="0" rtlCol="0" anchor="ctr"/>
+          <a:lstStyle/>
+          <a:p>
+            <a:pPr indent="0" marL="0">
+              <a:lnSpc>
+                <a:spcPts val="1550"/>
+              </a:lnSpc>
+              <a:buNone/>
+            </a:pPr>
+            <a:r>
+              <a:rPr lang="en-US" sz="1150" dirty="0">
+                <a:solidFill>
+                  <a:srgbClr val="FFFFFF"/>
+                </a:solidFill>
+                <a:latin typeface="Calibri" pitchFamily="34" charset="0"/>
+                <a:ea typeface="Calibri" pitchFamily="34" charset="-122"/>
+                <a:cs typeface="Calibri" pitchFamily="34" charset="-120"/>
+              </a:rPr>
+              <a:t>Para INDOTEL: esto permite pasar de una cooperación puntual a una arquitectura nacional de acompañamiento municipal.</a:t>
+            </a:r>
+            <a:endParaRPr lang="en-US" sz="1150" dirty="0"/>
+          </a:p>
+        </p:txBody>
+      </p:sp>
+      <p:sp>
+        <p:nvSpPr>
           <p:cNvPr id="25" name="Text 16"/>
           <p:cNvSpPr/>
           <p:nvPr/>
         </p:nvSpPr>
         <p:spPr>
           <a:xfrm>
-            <a:off x="566928" y="5541264"/>
-            <a:ext cx="10710367" cy="658368"/>
+            <a:off x="11405311" y="5504688"/>
+            <a:ext cx="365760" cy="676656"/>
           </a:xfrm>
           <a:prstGeom prst="rect">
             <a:avLst/>
@@ -7982,24 +8169,21 @@
           <a:bodyPr wrap="square" lIns="0" tIns="0" rIns="0" bIns="0" rtlCol="0" anchor="ctr"/>
           <a:lstStyle/>
           <a:p>
-            <a:pPr indent="0" marL="0">
-              <a:lnSpc>
-                <a:spcPts val="1500"/>
-              </a:lnSpc>
-              <a:buNone/>
-            </a:pPr>
-            <a:r>
-              <a:rPr lang="en-US" sz="1150" dirty="0">
-                <a:solidFill>
-                  <a:srgbClr val="FFFFFF"/>
-                </a:solidFill>
-                <a:latin typeface="Calibri" pitchFamily="34" charset="0"/>
-                <a:ea typeface="Calibri" pitchFamily="34" charset="-122"/>
-                <a:cs typeface="Calibri" pitchFamily="34" charset="-120"/>
-              </a:rPr>
-              <a:t>Para INDOTEL: esto permite pasar de una cooperación puntual a una arquitectura nacional de acompañamiento municipal.</a:t>
-            </a:r>
-            <a:endParaRPr lang="en-US" sz="1150" dirty="0"/>
+            <a:pPr algn="ctr" indent="0" marL="0">
+              <a:buNone/>
+            </a:pPr>
+            <a:r>
+              <a:rPr lang="en-US" sz="1000" b="1" dirty="0">
+                <a:solidFill>
+                  <a:srgbClr val="9CC4EE"/>
+                </a:solidFill>
+                <a:latin typeface="Calibri" pitchFamily="34" charset="0"/>
+                <a:ea typeface="Calibri" pitchFamily="34" charset="-122"/>
+                <a:cs typeface="Calibri" pitchFamily="34" charset="-120"/>
+              </a:rPr>
+              <a:t>4</a:t>
+            </a:r>
+            <a:endParaRPr lang="en-US" sz="1000" dirty="0"/>
           </a:p>
         </p:txBody>
       </p:sp>
@@ -8011,8 +8195,8 @@
         </p:nvSpPr>
         <p:spPr>
           <a:xfrm>
-            <a:off x="11533327" y="5541264"/>
-            <a:ext cx="320040" cy="658368"/>
+            <a:off x="566928" y="6437376"/>
+            <a:ext cx="10143439" cy="237744"/>
           </a:xfrm>
           <a:prstGeom prst="rect">
             <a:avLst/>
@@ -8024,52 +8208,13 @@
           <a:bodyPr wrap="square" lIns="0" tIns="0" rIns="0" bIns="0" rtlCol="0" anchor="ctr"/>
           <a:lstStyle/>
           <a:p>
-            <a:pPr algn="ctr" indent="0" marL="0">
-              <a:buNone/>
-            </a:pPr>
-            <a:r>
-              <a:rPr lang="en-US" sz="950" b="1" dirty="0">
-                <a:solidFill>
-                  <a:srgbClr val="2E9BF0"/>
-                </a:solidFill>
-                <a:latin typeface="Calibri" pitchFamily="34" charset="0"/>
-                <a:ea typeface="Calibri" pitchFamily="34" charset="-122"/>
-                <a:cs typeface="Calibri" pitchFamily="34" charset="-120"/>
-              </a:rPr>
-              <a:t>4</a:t>
-            </a:r>
-            <a:endParaRPr lang="en-US" sz="950" dirty="0"/>
-          </a:p>
-        </p:txBody>
-      </p:sp>
-      <p:sp>
-        <p:nvSpPr>
-          <p:cNvPr id="27" name="Text 18"/>
-          <p:cNvSpPr/>
-          <p:nvPr/>
-        </p:nvSpPr>
-        <p:spPr>
-          <a:xfrm>
-            <a:off x="566928" y="6400800"/>
-            <a:ext cx="10234879" cy="237744"/>
-          </a:xfrm>
-          <a:prstGeom prst="rect">
-            <a:avLst/>
-          </a:prstGeom>
-          <a:noFill/>
-          <a:ln/>
-        </p:spPr>
-        <p:txBody>
-          <a:bodyPr wrap="square" lIns="0" tIns="0" rIns="0" bIns="0" rtlCol="0" anchor="ctr"/>
-          <a:lstStyle/>
-          <a:p>
-            <a:pPr indent="0" marL="0">
-              <a:buNone/>
-            </a:pPr>
-            <a:r>
-              <a:rPr lang="en-US" sz="850" i="1" dirty="0">
-                <a:solidFill>
-                  <a:srgbClr val="8494A5"/>
+            <a:pPr indent="0" marL="0">
+              <a:buNone/>
+            </a:pPr>
+            <a:r>
+              <a:rPr lang="en-US" sz="850" dirty="0">
+                <a:solidFill>
+                  <a:srgbClr val="8A93A5"/>
                 </a:solidFill>
                 <a:latin typeface="Calibri" pitchFamily="34" charset="0"/>
                 <a:ea typeface="Calibri" pitchFamily="34" charset="-122"/>
@@ -8095,7 +8240,7 @@
     <p:bg>
       <p:bgPr>
         <a:solidFill>
-          <a:srgbClr val="FFFFFF"/>
+          <a:srgbClr val="F2F3F8"/>
         </a:solidFill>
       </p:bgPr>
     </p:bg>
@@ -8121,7 +8266,7 @@
         </p:nvSpPr>
         <p:spPr>
           <a:xfrm>
-            <a:off x="566928" y="256032"/>
+            <a:off x="566928" y="237744"/>
             <a:ext cx="3657600" cy="274320"/>
           </a:xfrm>
           <a:prstGeom prst="rect">
@@ -8138,9 +8283,9 @@
               <a:buNone/>
             </a:pPr>
             <a:r>
-              <a:rPr lang="en-US" sz="1500" b="1" spc="140" kern="0" dirty="0">
-                <a:solidFill>
-                  <a:srgbClr val="0B2C5E"/>
+              <a:rPr lang="en-US" sz="1500" b="1" spc="130" kern="0" dirty="0">
+                <a:solidFill>
+                  <a:srgbClr val="0D1B5E"/>
                 </a:solidFill>
                 <a:latin typeface="Arial" pitchFamily="34" charset="0"/>
                 <a:ea typeface="Arial" pitchFamily="34" charset="-122"/>
@@ -8160,7 +8305,7 @@
         </p:nvSpPr>
         <p:spPr>
           <a:xfrm>
-            <a:off x="566928" y="534924"/>
+            <a:off x="566928" y="516636"/>
             <a:ext cx="3657600" cy="219456"/>
           </a:xfrm>
           <a:prstGeom prst="rect">
@@ -8179,7 +8324,7 @@
             <a:r>
               <a:rPr lang="en-US" sz="950" dirty="0">
                 <a:solidFill>
-                  <a:srgbClr val="8494A5"/>
+                  <a:srgbClr val="8A93A5"/>
                 </a:solidFill>
                 <a:latin typeface="Calibri" pitchFamily="34" charset="0"/>
                 <a:ea typeface="Calibri" pitchFamily="34" charset="-122"/>
@@ -8199,7 +8344,7 @@
         </p:nvSpPr>
         <p:spPr>
           <a:xfrm>
-            <a:off x="566928" y="822960"/>
+            <a:off x="566928" y="768096"/>
             <a:ext cx="11057839" cy="420624"/>
           </a:xfrm>
           <a:prstGeom prst="rect">
@@ -8216,9 +8361,9 @@
               <a:buNone/>
             </a:pPr>
             <a:r>
-              <a:rPr lang="en-US" sz="2500" b="1" dirty="0">
-                <a:solidFill>
-                  <a:srgbClr val="0B2C5E"/>
+              <a:rPr lang="en-US" sz="2450" b="1" dirty="0">
+                <a:solidFill>
+                  <a:srgbClr val="0D1B5E"/>
                 </a:solidFill>
                 <a:latin typeface="Calibri" pitchFamily="34" charset="0"/>
                 <a:ea typeface="Calibri" pitchFamily="34" charset="-122"/>
@@ -8226,7 +8371,7 @@
               </a:rPr>
               <a:t>OASC: Ciudades Inteligentes Abiertas y Ágiles</a:t>
             </a:r>
-            <a:endParaRPr lang="en-US" sz="2500" dirty="0"/>
+            <a:endParaRPr lang="en-US" sz="2450" dirty="0"/>
           </a:p>
         </p:txBody>
       </p:sp>
@@ -8238,8 +8383,8 @@
         </p:nvSpPr>
         <p:spPr>
           <a:xfrm>
-            <a:off x="566928" y="1280160"/>
-            <a:ext cx="11057839" cy="457200"/>
+            <a:off x="566928" y="1234440"/>
+            <a:ext cx="11057839" cy="475488"/>
           </a:xfrm>
           <a:prstGeom prst="rect">
             <a:avLst/>
@@ -8253,14 +8398,14 @@
           <a:p>
             <a:pPr indent="0" marL="0">
               <a:lnSpc>
-                <a:spcPts val="1600"/>
+                <a:spcPts val="1650"/>
               </a:lnSpc>
               <a:buNone/>
             </a:pPr>
             <a:r>
-              <a:rPr lang="en-US" sz="1250" dirty="0">
-                <a:solidFill>
-                  <a:srgbClr val="44566B"/>
+              <a:rPr lang="en-US" sz="1250" b="1" dirty="0">
+                <a:solidFill>
+                  <a:srgbClr val="243C8F"/>
                 </a:solidFill>
                 <a:latin typeface="Calibri" pitchFamily="34" charset="0"/>
                 <a:ea typeface="Calibri" pitchFamily="34" charset="-122"/>
@@ -8280,55 +8425,21 @@
         </p:nvSpPr>
         <p:spPr>
           <a:xfrm>
-            <a:off x="566928" y="1965960"/>
-            <a:ext cx="3529584" cy="2670048"/>
-          </a:xfrm>
-          <a:prstGeom prst="roundRect">
-            <a:avLst>
-              <a:gd name="adj" fmla="val 2397"/>
-            </a:avLst>
+            <a:off x="1980133" y="2048256"/>
+            <a:ext cx="859536" cy="859536"/>
+          </a:xfrm>
+          <a:prstGeom prst="ellipse">
+            <a:avLst/>
           </a:prstGeom>
           <a:solidFill>
-            <a:srgbClr val="FFFFFF"/>
-          </a:solidFill>
-          <a:ln w="12700">
-            <a:solidFill>
-              <a:srgbClr val="D9E2EC"/>
-            </a:solidFill>
-            <a:prstDash val="solid"/>
-          </a:ln>
-          <a:effectLst>
-            <a:outerShdw sx="100000" sy="100000" kx="0" ky="0" algn="bl" rotWithShape="0" blurRad="152400" dist="38100" dir="5400000">
-              <a:srgbClr val="0B2C5E">
-                <a:alpha val="10000"/>
-              </a:srgbClr>
-            </a:outerShdw>
-          </a:effectLst>
-        </p:spPr>
-      </p:sp>
-      <p:sp>
-        <p:nvSpPr>
-          <p:cNvPr id="7" name="Shape 5"/>
-          <p:cNvSpPr/>
-          <p:nvPr/>
-        </p:nvSpPr>
-        <p:spPr>
-          <a:xfrm>
-            <a:off x="2011680" y="2249424"/>
-            <a:ext cx="640080" cy="640080"/>
-          </a:xfrm>
-          <a:prstGeom prst="ellipse">
-            <a:avLst/>
-          </a:prstGeom>
-          <a:solidFill>
-            <a:srgbClr val="1668B8"/>
+            <a:srgbClr val="0B4489"/>
           </a:solidFill>
           <a:ln/>
         </p:spPr>
       </p:sp>
       <p:pic>
         <p:nvPicPr>
-          <p:cNvPr id="8" name="Image 0" descr="/home/user/bolt.diy/presentaciones/indotel-ciudades-inteligentes/src/icons/s5_naturaleza.png">    </p:cNvPr>
+          <p:cNvPr id="7" name="Image 0" descr="/home/user/bolt.diy/presentaciones/indotel-ciudades-inteligentes/src/icons/s5_naturaleza.png">    </p:cNvPr>
           <p:cNvPicPr>
             <a:picLocks noChangeAspect="1"/>
           </p:cNvPicPr>
@@ -8342,8 +8453,8 @@
         </p:blipFill>
         <p:spPr>
           <a:xfrm>
-            <a:off x="2167128" y="2404872"/>
-            <a:ext cx="329184" cy="329184"/>
+            <a:off x="2181301" y="2249424"/>
+            <a:ext cx="457200" cy="457200"/>
           </a:xfrm>
           <a:prstGeom prst="rect">
             <a:avLst/>
@@ -8352,53 +8463,53 @@
       </p:pic>
       <p:sp>
         <p:nvSpPr>
+          <p:cNvPr id="8" name="Text 5"/>
+          <p:cNvSpPr/>
+          <p:nvPr/>
+        </p:nvSpPr>
+        <p:spPr>
+          <a:xfrm>
+            <a:off x="566928" y="3108960"/>
+            <a:ext cx="3685946" cy="310896"/>
+          </a:xfrm>
+          <a:prstGeom prst="rect">
+            <a:avLst/>
+          </a:prstGeom>
+          <a:noFill/>
+          <a:ln/>
+        </p:spPr>
+        <p:txBody>
+          <a:bodyPr wrap="square" lIns="0" tIns="0" rIns="0" bIns="0" rtlCol="0" anchor="ctr"/>
+          <a:lstStyle/>
+          <a:p>
+            <a:pPr algn="ctr" indent="0" marL="0">
+              <a:buNone/>
+            </a:pPr>
+            <a:r>
+              <a:rPr lang="en-US" sz="1450" b="1" dirty="0">
+                <a:solidFill>
+                  <a:srgbClr val="243C8F"/>
+                </a:solidFill>
+                <a:latin typeface="Calibri" pitchFamily="34" charset="0"/>
+                <a:ea typeface="Calibri" pitchFamily="34" charset="-122"/>
+                <a:cs typeface="Calibri" pitchFamily="34" charset="-120"/>
+              </a:rPr>
+              <a:t>Naturaleza</a:t>
+            </a:r>
+            <a:endParaRPr lang="en-US" sz="1450" dirty="0"/>
+          </a:p>
+        </p:txBody>
+      </p:sp>
+      <p:sp>
+        <p:nvSpPr>
           <p:cNvPr id="9" name="Text 6"/>
           <p:cNvSpPr/>
           <p:nvPr/>
         </p:nvSpPr>
         <p:spPr>
           <a:xfrm>
-            <a:off x="795528" y="3044952"/>
-            <a:ext cx="3072384" cy="292608"/>
-          </a:xfrm>
-          <a:prstGeom prst="rect">
-            <a:avLst/>
-          </a:prstGeom>
-          <a:noFill/>
-          <a:ln/>
-        </p:spPr>
-        <p:txBody>
-          <a:bodyPr wrap="square" lIns="0" tIns="0" rIns="0" bIns="0" rtlCol="0" anchor="ctr"/>
-          <a:lstStyle/>
-          <a:p>
-            <a:pPr algn="ctr" indent="0" marL="0">
-              <a:buNone/>
-            </a:pPr>
-            <a:r>
-              <a:rPr lang="en-US" sz="1450" b="1" dirty="0">
-                <a:solidFill>
-                  <a:srgbClr val="0B2C5E"/>
-                </a:solidFill>
-                <a:latin typeface="Calibri" pitchFamily="34" charset="0"/>
-                <a:ea typeface="Calibri" pitchFamily="34" charset="-122"/>
-                <a:cs typeface="Calibri" pitchFamily="34" charset="-120"/>
-              </a:rPr>
-              <a:t>Naturaleza</a:t>
-            </a:r>
-            <a:endParaRPr lang="en-US" sz="1450" dirty="0"/>
-          </a:p>
-        </p:txBody>
-      </p:sp>
-      <p:sp>
-        <p:nvSpPr>
-          <p:cNvPr id="10" name="Text 7"/>
-          <p:cNvSpPr/>
-          <p:nvPr/>
-        </p:nvSpPr>
-        <p:spPr>
-          <a:xfrm>
-            <a:off x="877824" y="3401568"/>
-            <a:ext cx="2907792" cy="1170432"/>
+            <a:off x="950976" y="3529584"/>
+            <a:ext cx="2917850" cy="1280160"/>
           </a:xfrm>
           <a:prstGeom prst="rect">
             <a:avLst/>
@@ -8412,14 +8523,14 @@
           <a:p>
             <a:pPr algn="ctr" indent="0" marL="0">
               <a:lnSpc>
-                <a:spcPts val="1550"/>
+                <a:spcPts val="1600"/>
               </a:lnSpc>
               <a:buNone/>
             </a:pPr>
             <a:r>
               <a:rPr lang="en-US" sz="1100" dirty="0">
                 <a:solidFill>
-                  <a:srgbClr val="44566B"/>
+                  <a:srgbClr val="3B4356"/>
                 </a:solidFill>
                 <a:latin typeface="Calibri" pitchFamily="34" charset="0"/>
                 <a:ea typeface="Calibri" pitchFamily="34" charset="-122"/>
@@ -8433,61 +8544,27 @@
       </p:sp>
       <p:sp>
         <p:nvSpPr>
-          <p:cNvPr id="11" name="Shape 8"/>
-          <p:cNvSpPr/>
-          <p:nvPr/>
-        </p:nvSpPr>
-        <p:spPr>
-          <a:xfrm>
-            <a:off x="4439412" y="1965960"/>
-            <a:ext cx="3529584" cy="2670048"/>
-          </a:xfrm>
-          <a:prstGeom prst="roundRect">
-            <a:avLst>
-              <a:gd name="adj" fmla="val 2397"/>
-            </a:avLst>
+          <p:cNvPr id="10" name="Shape 7"/>
+          <p:cNvSpPr/>
+          <p:nvPr/>
+        </p:nvSpPr>
+        <p:spPr>
+          <a:xfrm>
+            <a:off x="5666080" y="2048256"/>
+            <a:ext cx="859536" cy="859536"/>
+          </a:xfrm>
+          <a:prstGeom prst="ellipse">
+            <a:avLst/>
           </a:prstGeom>
           <a:solidFill>
-            <a:srgbClr val="FFFFFF"/>
-          </a:solidFill>
-          <a:ln w="12700">
-            <a:solidFill>
-              <a:srgbClr val="D9E2EC"/>
-            </a:solidFill>
-            <a:prstDash val="solid"/>
-          </a:ln>
-          <a:effectLst>
-            <a:outerShdw sx="100000" sy="100000" kx="0" ky="0" algn="bl" rotWithShape="0" blurRad="152400" dist="38100" dir="5400000">
-              <a:srgbClr val="0B2C5E">
-                <a:alpha val="10000"/>
-              </a:srgbClr>
-            </a:outerShdw>
-          </a:effectLst>
-        </p:spPr>
-      </p:sp>
-      <p:sp>
-        <p:nvSpPr>
-          <p:cNvPr id="12" name="Shape 9"/>
-          <p:cNvSpPr/>
-          <p:nvPr/>
-        </p:nvSpPr>
-        <p:spPr>
-          <a:xfrm>
-            <a:off x="5884164" y="2249424"/>
-            <a:ext cx="640080" cy="640080"/>
-          </a:xfrm>
-          <a:prstGeom prst="ellipse">
-            <a:avLst/>
-          </a:prstGeom>
-          <a:solidFill>
-            <a:srgbClr val="0B2C5E"/>
+            <a:srgbClr val="0A2E7A"/>
           </a:solidFill>
           <a:ln/>
         </p:spPr>
       </p:sp>
       <p:pic>
         <p:nvPicPr>
-          <p:cNvPr id="13" name="Image 1" descr="/home/user/bolt.diy/presentaciones/indotel-ciudades-inteligentes/src/icons/s5_tecnico.png">    </p:cNvPr>
+          <p:cNvPr id="11" name="Image 1" descr="/home/user/bolt.diy/presentaciones/indotel-ciudades-inteligentes/src/icons/s5_tecnico.png">    </p:cNvPr>
           <p:cNvPicPr>
             <a:picLocks noChangeAspect="1"/>
           </p:cNvPicPr>
@@ -8501,8 +8578,8 @@
         </p:blipFill>
         <p:spPr>
           <a:xfrm>
-            <a:off x="6039612" y="2404872"/>
-            <a:ext cx="329184" cy="329184"/>
+            <a:off x="5867248" y="2249424"/>
+            <a:ext cx="457200" cy="457200"/>
           </a:xfrm>
           <a:prstGeom prst="rect">
             <a:avLst/>
@@ -8511,14 +8588,14 @@
       </p:pic>
       <p:sp>
         <p:nvSpPr>
-          <p:cNvPr id="14" name="Text 10"/>
-          <p:cNvSpPr/>
-          <p:nvPr/>
-        </p:nvSpPr>
-        <p:spPr>
-          <a:xfrm>
-            <a:off x="4668012" y="3044952"/>
-            <a:ext cx="3072384" cy="292608"/>
+          <p:cNvPr id="12" name="Text 8"/>
+          <p:cNvSpPr/>
+          <p:nvPr/>
+        </p:nvSpPr>
+        <p:spPr>
+          <a:xfrm>
+            <a:off x="4252874" y="3108960"/>
+            <a:ext cx="3685946" cy="310896"/>
           </a:xfrm>
           <a:prstGeom prst="rect">
             <a:avLst/>
@@ -8536,7 +8613,7 @@
             <a:r>
               <a:rPr lang="en-US" sz="1450" b="1" dirty="0">
                 <a:solidFill>
-                  <a:srgbClr val="0B2C5E"/>
+                  <a:srgbClr val="243C8F"/>
                 </a:solidFill>
                 <a:latin typeface="Calibri" pitchFamily="34" charset="0"/>
                 <a:ea typeface="Calibri" pitchFamily="34" charset="-122"/>
@@ -8550,14 +8627,14 @@
       </p:sp>
       <p:sp>
         <p:nvSpPr>
-          <p:cNvPr id="15" name="Text 11"/>
-          <p:cNvSpPr/>
-          <p:nvPr/>
-        </p:nvSpPr>
-        <p:spPr>
-          <a:xfrm>
-            <a:off x="4750308" y="3401568"/>
-            <a:ext cx="2907792" cy="1170432"/>
+          <p:cNvPr id="13" name="Text 9"/>
+          <p:cNvSpPr/>
+          <p:nvPr/>
+        </p:nvSpPr>
+        <p:spPr>
+          <a:xfrm>
+            <a:off x="4636922" y="3529584"/>
+            <a:ext cx="2917850" cy="1280160"/>
           </a:xfrm>
           <a:prstGeom prst="rect">
             <a:avLst/>
@@ -8571,14 +8648,14 @@
           <a:p>
             <a:pPr algn="ctr" indent="0" marL="0">
               <a:lnSpc>
-                <a:spcPts val="1550"/>
+                <a:spcPts val="1600"/>
               </a:lnSpc>
               <a:buNone/>
             </a:pPr>
             <a:r>
               <a:rPr lang="en-US" sz="1100" dirty="0">
                 <a:solidFill>
-                  <a:srgbClr val="44566B"/>
+                  <a:srgbClr val="3B4356"/>
                 </a:solidFill>
                 <a:latin typeface="Calibri" pitchFamily="34" charset="0"/>
                 <a:ea typeface="Calibri" pitchFamily="34" charset="-122"/>
@@ -8592,48 +8669,37 @@
       </p:sp>
       <p:sp>
         <p:nvSpPr>
-          <p:cNvPr id="16" name="Shape 12"/>
-          <p:cNvSpPr/>
-          <p:nvPr/>
-        </p:nvSpPr>
-        <p:spPr>
-          <a:xfrm>
-            <a:off x="8311896" y="1965960"/>
-            <a:ext cx="3529584" cy="2670048"/>
-          </a:xfrm>
-          <a:prstGeom prst="roundRect">
-            <a:avLst>
-              <a:gd name="adj" fmla="val 2397"/>
-            </a:avLst>
-          </a:prstGeom>
-          <a:solidFill>
-            <a:srgbClr val="FFFFFF"/>
-          </a:solidFill>
+          <p:cNvPr id="14" name="Shape 10"/>
+          <p:cNvSpPr/>
+          <p:nvPr/>
+        </p:nvSpPr>
+        <p:spPr>
+          <a:xfrm>
+            <a:off x="4252874" y="2103120"/>
+            <a:ext cx="0" cy="2697480"/>
+          </a:xfrm>
+          <a:prstGeom prst="line">
+            <a:avLst/>
+          </a:prstGeom>
+          <a:noFill/>
           <a:ln w="12700">
             <a:solidFill>
-              <a:srgbClr val="D9E2EC"/>
+              <a:srgbClr val="CBD5E4"/>
             </a:solidFill>
             <a:prstDash val="solid"/>
           </a:ln>
-          <a:effectLst>
-            <a:outerShdw sx="100000" sy="100000" kx="0" ky="0" algn="bl" rotWithShape="0" blurRad="152400" dist="38100" dir="5400000">
-              <a:srgbClr val="0B2C5E">
-                <a:alpha val="10000"/>
-              </a:srgbClr>
-            </a:outerShdw>
-          </a:effectLst>
-        </p:spPr>
-      </p:sp>
-      <p:sp>
-        <p:nvSpPr>
-          <p:cNvPr id="17" name="Shape 13"/>
-          <p:cNvSpPr/>
-          <p:nvPr/>
-        </p:nvSpPr>
-        <p:spPr>
-          <a:xfrm>
-            <a:off x="9756648" y="2249424"/>
-            <a:ext cx="640080" cy="640080"/>
+        </p:spPr>
+      </p:sp>
+      <p:sp>
+        <p:nvSpPr>
+          <p:cNvPr id="15" name="Shape 11"/>
+          <p:cNvSpPr/>
+          <p:nvPr/>
+        </p:nvSpPr>
+        <p:spPr>
+          <a:xfrm>
+            <a:off x="9352026" y="2048256"/>
+            <a:ext cx="859536" cy="859536"/>
           </a:xfrm>
           <a:prstGeom prst="ellipse">
             <a:avLst/>
@@ -8646,7 +8712,7 @@
       </p:sp>
       <p:pic>
         <p:nvPicPr>
-          <p:cNvPr id="18" name="Image 2" descr="/home/user/bolt.diy/presentaciones/indotel-ciudades-inteligentes/src/icons/s5_valor.png">    </p:cNvPr>
+          <p:cNvPr id="16" name="Image 2" descr="/home/user/bolt.diy/presentaciones/indotel-ciudades-inteligentes/src/icons/s5_valor.png">    </p:cNvPr>
           <p:cNvPicPr>
             <a:picLocks noChangeAspect="1"/>
           </p:cNvPicPr>
@@ -8660,8 +8726,8 @@
         </p:blipFill>
         <p:spPr>
           <a:xfrm>
-            <a:off x="9912096" y="2404872"/>
-            <a:ext cx="329184" cy="329184"/>
+            <a:off x="9553194" y="2249424"/>
+            <a:ext cx="457200" cy="457200"/>
           </a:xfrm>
           <a:prstGeom prst="rect">
             <a:avLst/>
@@ -8670,14 +8736,14 @@
       </p:pic>
       <p:sp>
         <p:nvSpPr>
-          <p:cNvPr id="19" name="Text 14"/>
-          <p:cNvSpPr/>
-          <p:nvPr/>
-        </p:nvSpPr>
-        <p:spPr>
-          <a:xfrm>
-            <a:off x="8540496" y="3044952"/>
-            <a:ext cx="3072384" cy="292608"/>
+          <p:cNvPr id="17" name="Text 12"/>
+          <p:cNvSpPr/>
+          <p:nvPr/>
+        </p:nvSpPr>
+        <p:spPr>
+          <a:xfrm>
+            <a:off x="7938821" y="3108960"/>
+            <a:ext cx="3685946" cy="310896"/>
           </a:xfrm>
           <a:prstGeom prst="rect">
             <a:avLst/>
@@ -8695,7 +8761,7 @@
             <a:r>
               <a:rPr lang="en-US" sz="1450" b="1" dirty="0">
                 <a:solidFill>
-                  <a:srgbClr val="0B2C5E"/>
+                  <a:srgbClr val="243C8F"/>
                 </a:solidFill>
                 <a:latin typeface="Calibri" pitchFamily="34" charset="0"/>
                 <a:ea typeface="Calibri" pitchFamily="34" charset="-122"/>
@@ -8709,14 +8775,14 @@
       </p:sp>
       <p:sp>
         <p:nvSpPr>
-          <p:cNvPr id="20" name="Text 15"/>
-          <p:cNvSpPr/>
-          <p:nvPr/>
-        </p:nvSpPr>
-        <p:spPr>
-          <a:xfrm>
-            <a:off x="8622792" y="3401568"/>
-            <a:ext cx="2907792" cy="1170432"/>
+          <p:cNvPr id="18" name="Text 13"/>
+          <p:cNvSpPr/>
+          <p:nvPr/>
+        </p:nvSpPr>
+        <p:spPr>
+          <a:xfrm>
+            <a:off x="8322869" y="3529584"/>
+            <a:ext cx="2917850" cy="1280160"/>
           </a:xfrm>
           <a:prstGeom prst="rect">
             <a:avLst/>
@@ -8730,14 +8796,14 @@
           <a:p>
             <a:pPr algn="ctr" indent="0" marL="0">
               <a:lnSpc>
-                <a:spcPts val="1550"/>
+                <a:spcPts val="1600"/>
               </a:lnSpc>
               <a:buNone/>
             </a:pPr>
             <a:r>
               <a:rPr lang="en-US" sz="1100" dirty="0">
                 <a:solidFill>
-                  <a:srgbClr val="44566B"/>
+                  <a:srgbClr val="3B4356"/>
                 </a:solidFill>
                 <a:latin typeface="Calibri" pitchFamily="34" charset="0"/>
                 <a:ea typeface="Calibri" pitchFamily="34" charset="-122"/>
@@ -8751,36 +8817,59 @@
       </p:sp>
       <p:sp>
         <p:nvSpPr>
-          <p:cNvPr id="21" name="Shape 16"/>
-          <p:cNvSpPr/>
-          <p:nvPr/>
-        </p:nvSpPr>
-        <p:spPr>
-          <a:xfrm>
-            <a:off x="566928" y="5047488"/>
-            <a:ext cx="11057839" cy="822960"/>
+          <p:cNvPr id="19" name="Shape 14"/>
+          <p:cNvSpPr/>
+          <p:nvPr/>
+        </p:nvSpPr>
+        <p:spPr>
+          <a:xfrm>
+            <a:off x="7938821" y="2103120"/>
+            <a:ext cx="0" cy="2697480"/>
+          </a:xfrm>
+          <a:prstGeom prst="line">
+            <a:avLst/>
+          </a:prstGeom>
+          <a:noFill/>
+          <a:ln w="12700">
+            <a:solidFill>
+              <a:srgbClr val="CBD5E4"/>
+            </a:solidFill>
+            <a:prstDash val="solid"/>
+          </a:ln>
+        </p:spPr>
+      </p:sp>
+      <p:sp>
+        <p:nvSpPr>
+          <p:cNvPr id="20" name="Shape 15"/>
+          <p:cNvSpPr/>
+          <p:nvPr/>
+        </p:nvSpPr>
+        <p:spPr>
+          <a:xfrm>
+            <a:off x="1344168" y="5029200"/>
+            <a:ext cx="9503359" cy="868680"/>
           </a:xfrm>
           <a:prstGeom prst="roundRect">
             <a:avLst>
-              <a:gd name="adj" fmla="val 6667"/>
+              <a:gd name="adj" fmla="val 7368"/>
             </a:avLst>
           </a:prstGeom>
           <a:solidFill>
-            <a:srgbClr val="E8F1FA"/>
+            <a:srgbClr val="E4EDF9"/>
           </a:solidFill>
           <a:ln/>
         </p:spPr>
       </p:sp>
       <p:sp>
         <p:nvSpPr>
-          <p:cNvPr id="22" name="Text 17"/>
-          <p:cNvSpPr/>
-          <p:nvPr/>
-        </p:nvSpPr>
-        <p:spPr>
-          <a:xfrm>
-            <a:off x="950976" y="5047488"/>
-            <a:ext cx="10289743" cy="822960"/>
+          <p:cNvPr id="21" name="Text 16"/>
+          <p:cNvSpPr/>
+          <p:nvPr/>
+        </p:nvSpPr>
+        <p:spPr>
+          <a:xfrm>
+            <a:off x="1572768" y="5029200"/>
+            <a:ext cx="9046159" cy="868680"/>
           </a:xfrm>
           <a:prstGeom prst="rect">
             <a:avLst/>
@@ -8794,35 +8883,55 @@
           <a:p>
             <a:pPr algn="ctr" indent="0" marL="0">
               <a:lnSpc>
-                <a:spcPts val="1700"/>
+                <a:spcPts val="1800"/>
               </a:lnSpc>
               <a:buNone/>
             </a:pPr>
             <a:r>
-              <a:rPr lang="en-US" sz="1250" dirty="0">
-                <a:solidFill>
-                  <a:srgbClr val="0B2C5E"/>
-                </a:solidFill>
-                <a:latin typeface="Calibri" pitchFamily="34" charset="0"/>
-                <a:ea typeface="Calibri" pitchFamily="34" charset="-122"/>
-                <a:cs typeface="Calibri" pitchFamily="34" charset="-120"/>
-              </a:rPr>
-              <a:t>OASC no vende una plataforma cerrada; impulsa reglas comunes para que las plataformas municipales puedan comunicarse.</a:t>
+              <a:rPr lang="en-US" sz="1250" b="1" dirty="0">
+                <a:solidFill>
+                  <a:srgbClr val="243C8F"/>
+                </a:solidFill>
+                <a:latin typeface="Calibri" pitchFamily="34" charset="0"/>
+                <a:ea typeface="Calibri" pitchFamily="34" charset="-122"/>
+                <a:cs typeface="Calibri" pitchFamily="34" charset="-120"/>
+              </a:rPr>
+              <a:t>OASC no vende una plataforma cerrada; impulsa reglas comunes</a:t>
             </a:r>
             <a:endParaRPr lang="en-US" sz="1250" dirty="0"/>
           </a:p>
-        </p:txBody>
-      </p:sp>
-      <p:sp>
-        <p:nvSpPr>
-          <p:cNvPr id="23" name="Text 18"/>
-          <p:cNvSpPr/>
-          <p:nvPr/>
-        </p:nvSpPr>
-        <p:spPr>
-          <a:xfrm>
-            <a:off x="566928" y="6400800"/>
-            <a:ext cx="10234879" cy="237744"/>
+          <a:p>
+            <a:pPr algn="ctr" indent="0" marL="0">
+              <a:lnSpc>
+                <a:spcPts val="1800"/>
+              </a:lnSpc>
+              <a:buNone/>
+            </a:pPr>
+            <a:r>
+              <a:rPr lang="en-US" sz="1250" b="1" dirty="0">
+                <a:solidFill>
+                  <a:srgbClr val="243C8F"/>
+                </a:solidFill>
+                <a:latin typeface="Calibri" pitchFamily="34" charset="0"/>
+                <a:ea typeface="Calibri" pitchFamily="34" charset="-122"/>
+                <a:cs typeface="Calibri" pitchFamily="34" charset="-120"/>
+              </a:rPr>
+              <a:t>para que las plataformas municipales puedan comunicarse.</a:t>
+            </a:r>
+            <a:endParaRPr lang="en-US" sz="1250" dirty="0"/>
+          </a:p>
+        </p:txBody>
+      </p:sp>
+      <p:sp>
+        <p:nvSpPr>
+          <p:cNvPr id="22" name="Text 17"/>
+          <p:cNvSpPr/>
+          <p:nvPr/>
+        </p:nvSpPr>
+        <p:spPr>
+          <a:xfrm>
+            <a:off x="566928" y="6437376"/>
+            <a:ext cx="10143439" cy="237744"/>
           </a:xfrm>
           <a:prstGeom prst="rect">
             <a:avLst/>
@@ -8838,9 +8947,9 @@
               <a:buNone/>
             </a:pPr>
             <a:r>
-              <a:rPr lang="en-US" sz="850" i="1" dirty="0">
-                <a:solidFill>
-                  <a:srgbClr val="8494A5"/>
+              <a:rPr lang="en-US" sz="850" dirty="0">
+                <a:solidFill>
+                  <a:srgbClr val="8A93A5"/>
                 </a:solidFill>
                 <a:latin typeface="Calibri" pitchFamily="34" charset="0"/>
                 <a:ea typeface="Calibri" pitchFamily="34" charset="-122"/>
@@ -8854,34 +8963,34 @@
       </p:sp>
       <p:sp>
         <p:nvSpPr>
-          <p:cNvPr id="24" name="Shape 19"/>
-          <p:cNvSpPr/>
-          <p:nvPr/>
-        </p:nvSpPr>
-        <p:spPr>
-          <a:xfrm>
-            <a:off x="11624767" y="6327648"/>
-            <a:ext cx="274320" cy="274320"/>
+          <p:cNvPr id="23" name="Shape 18"/>
+          <p:cNvSpPr/>
+          <p:nvPr/>
+        </p:nvSpPr>
+        <p:spPr>
+          <a:xfrm>
+            <a:off x="11661343" y="6364224"/>
+            <a:ext cx="310896" cy="310896"/>
           </a:xfrm>
           <a:prstGeom prst="rect">
             <a:avLst/>
           </a:prstGeom>
           <a:solidFill>
-            <a:srgbClr val="0B2C5E"/>
+            <a:srgbClr val="0A2E7A"/>
           </a:solidFill>
           <a:ln/>
         </p:spPr>
       </p:sp>
       <p:sp>
         <p:nvSpPr>
-          <p:cNvPr id="25" name="Text 20"/>
-          <p:cNvSpPr/>
-          <p:nvPr/>
-        </p:nvSpPr>
-        <p:spPr>
-          <a:xfrm>
-            <a:off x="11624767" y="6327648"/>
-            <a:ext cx="274320" cy="274320"/>
+          <p:cNvPr id="24" name="Text 19"/>
+          <p:cNvSpPr/>
+          <p:nvPr/>
+        </p:nvSpPr>
+        <p:spPr>
+          <a:xfrm>
+            <a:off x="11661343" y="6364224"/>
+            <a:ext cx="310896" cy="310896"/>
           </a:xfrm>
           <a:prstGeom prst="rect">
             <a:avLst/>
@@ -8897,7 +9006,7 @@
               <a:buNone/>
             </a:pPr>
             <a:r>
-              <a:rPr lang="en-US" sz="950" b="1" dirty="0">
+              <a:rPr lang="en-US" sz="1000" b="1" dirty="0">
                 <a:solidFill>
                   <a:srgbClr val="FFFFFF"/>
                 </a:solidFill>
@@ -8907,7 +9016,7 @@
               </a:rPr>
               <a:t>5</a:t>
             </a:r>
-            <a:endParaRPr lang="en-US" sz="950" dirty="0"/>
+            <a:endParaRPr lang="en-US" sz="1000" dirty="0"/>
           </a:p>
         </p:txBody>
       </p:sp>
@@ -8925,7 +9034,7 @@
     <p:bg>
       <p:bgPr>
         <a:solidFill>
-          <a:srgbClr val="FFFFFF"/>
+          <a:srgbClr val="F2F3F8"/>
         </a:solidFill>
       </p:bgPr>
     </p:bg>
@@ -8943,15 +9052,39 @@
           <a:chExt cx="0" cy="0"/>
         </a:xfrm>
       </p:grpSpPr>
-      <p:sp>
-        <p:nvSpPr>
-          <p:cNvPr id="2" name="Text 0"/>
-          <p:cNvSpPr/>
-          <p:nvPr/>
-        </p:nvSpPr>
-        <p:spPr>
-          <a:xfrm>
-            <a:off x="566928" y="256032"/>
+      <p:pic>
+        <p:nvPicPr>
+          <p:cNvPr id="2" name="Image 0" descr="/home/user/bolt.diy/presentaciones/indotel-ciudades-inteligentes/src/derived/rooftop_soft.jpg">    </p:cNvPr>
+          <p:cNvPicPr>
+            <a:picLocks noChangeAspect="1"/>
+          </p:cNvPicPr>
+          <p:nvPr/>
+        </p:nvPicPr>
+        <p:blipFill>
+          <a:blip r:embed="rId1"/>
+          <a:stretch>
+            <a:fillRect/>
+          </a:stretch>
+        </p:blipFill>
+        <p:spPr>
+          <a:xfrm>
+            <a:off x="5715000" y="1609344"/>
+            <a:ext cx="7863840" cy="5248656"/>
+          </a:xfrm>
+          <a:prstGeom prst="rect">
+            <a:avLst/>
+          </a:prstGeom>
+        </p:spPr>
+      </p:pic>
+      <p:sp>
+        <p:nvSpPr>
+          <p:cNvPr id="3" name="Text 0"/>
+          <p:cNvSpPr/>
+          <p:nvPr/>
+        </p:nvSpPr>
+        <p:spPr>
+          <a:xfrm>
+            <a:off x="566928" y="237744"/>
             <a:ext cx="3657600" cy="274320"/>
           </a:xfrm>
           <a:prstGeom prst="rect">
@@ -8968,9 +9101,9 @@
               <a:buNone/>
             </a:pPr>
             <a:r>
-              <a:rPr lang="en-US" sz="1500" b="1" spc="140" kern="0" dirty="0">
-                <a:solidFill>
-                  <a:srgbClr val="0B2C5E"/>
+              <a:rPr lang="en-US" sz="1500" b="1" spc="130" kern="0" dirty="0">
+                <a:solidFill>
+                  <a:srgbClr val="0D1B5E"/>
                 </a:solidFill>
                 <a:latin typeface="Arial" pitchFamily="34" charset="0"/>
                 <a:ea typeface="Arial" pitchFamily="34" charset="-122"/>
@@ -8984,13 +9117,13 @@
       </p:sp>
       <p:sp>
         <p:nvSpPr>
-          <p:cNvPr id="3" name="Text 1"/>
-          <p:cNvSpPr/>
-          <p:nvPr/>
-        </p:nvSpPr>
-        <p:spPr>
-          <a:xfrm>
-            <a:off x="566928" y="534924"/>
+          <p:cNvPr id="4" name="Text 1"/>
+          <p:cNvSpPr/>
+          <p:nvPr/>
+        </p:nvSpPr>
+        <p:spPr>
+          <a:xfrm>
+            <a:off x="566928" y="516636"/>
             <a:ext cx="3657600" cy="219456"/>
           </a:xfrm>
           <a:prstGeom prst="rect">
@@ -9009,7 +9142,7 @@
             <a:r>
               <a:rPr lang="en-US" sz="950" dirty="0">
                 <a:solidFill>
-                  <a:srgbClr val="8494A5"/>
+                  <a:srgbClr val="8A93A5"/>
                 </a:solidFill>
                 <a:latin typeface="Calibri" pitchFamily="34" charset="0"/>
                 <a:ea typeface="Calibri" pitchFamily="34" charset="-122"/>
@@ -9023,13 +9156,13 @@
       </p:sp>
       <p:sp>
         <p:nvSpPr>
-          <p:cNvPr id="4" name="Text 2"/>
-          <p:cNvSpPr/>
-          <p:nvPr/>
-        </p:nvSpPr>
-        <p:spPr>
-          <a:xfrm>
-            <a:off x="566928" y="822960"/>
+          <p:cNvPr id="5" name="Text 2"/>
+          <p:cNvSpPr/>
+          <p:nvPr/>
+        </p:nvSpPr>
+        <p:spPr>
+          <a:xfrm>
+            <a:off x="566928" y="768096"/>
             <a:ext cx="11057839" cy="420624"/>
           </a:xfrm>
           <a:prstGeom prst="rect">
@@ -9046,9 +9179,9 @@
               <a:buNone/>
             </a:pPr>
             <a:r>
-              <a:rPr lang="en-US" sz="2500" b="1" dirty="0">
-                <a:solidFill>
-                  <a:srgbClr val="0B2C5E"/>
+              <a:rPr lang="en-US" sz="2450" b="1" dirty="0">
+                <a:solidFill>
+                  <a:srgbClr val="0D1B5E"/>
                 </a:solidFill>
                 <a:latin typeface="Calibri" pitchFamily="34" charset="0"/>
                 <a:ea typeface="Calibri" pitchFamily="34" charset="-122"/>
@@ -9056,20 +9189,20 @@
               </a:rPr>
               <a:t>Cómo opera OASC</a:t>
             </a:r>
-            <a:endParaRPr lang="en-US" sz="2500" dirty="0"/>
-          </a:p>
-        </p:txBody>
-      </p:sp>
-      <p:sp>
-        <p:nvSpPr>
-          <p:cNvPr id="5" name="Text 3"/>
-          <p:cNvSpPr/>
-          <p:nvPr/>
-        </p:nvSpPr>
-        <p:spPr>
-          <a:xfrm>
-            <a:off x="566928" y="1280160"/>
-            <a:ext cx="6035040" cy="457200"/>
+            <a:endParaRPr lang="en-US" sz="2450" dirty="0"/>
+          </a:p>
+        </p:txBody>
+      </p:sp>
+      <p:sp>
+        <p:nvSpPr>
+          <p:cNvPr id="6" name="Text 3"/>
+          <p:cNvSpPr/>
+          <p:nvPr/>
+        </p:nvSpPr>
+        <p:spPr>
+          <a:xfrm>
+            <a:off x="566928" y="1234440"/>
+            <a:ext cx="5486400" cy="475488"/>
           </a:xfrm>
           <a:prstGeom prst="rect">
             <a:avLst/>
@@ -9083,14 +9216,14 @@
           <a:p>
             <a:pPr indent="0" marL="0">
               <a:lnSpc>
-                <a:spcPts val="1600"/>
+                <a:spcPts val="1650"/>
               </a:lnSpc>
               <a:buNone/>
             </a:pPr>
             <a:r>
-              <a:rPr lang="en-US" sz="1250" dirty="0">
-                <a:solidFill>
-                  <a:srgbClr val="44566B"/>
+              <a:rPr lang="en-US" sz="1250" b="1" dirty="0">
+                <a:solidFill>
+                  <a:srgbClr val="243C8F"/>
                 </a:solidFill>
                 <a:latin typeface="Calibri" pitchFamily="34" charset="0"/>
                 <a:ea typeface="Calibri" pitchFamily="34" charset="-122"/>
@@ -9104,34 +9237,34 @@
       </p:sp>
       <p:sp>
         <p:nvSpPr>
-          <p:cNvPr id="6" name="Shape 4"/>
-          <p:cNvSpPr/>
-          <p:nvPr/>
-        </p:nvSpPr>
-        <p:spPr>
-          <a:xfrm>
-            <a:off x="11624767" y="6327648"/>
-            <a:ext cx="274320" cy="274320"/>
+          <p:cNvPr id="7" name="Shape 4"/>
+          <p:cNvSpPr/>
+          <p:nvPr/>
+        </p:nvSpPr>
+        <p:spPr>
+          <a:xfrm>
+            <a:off x="11661343" y="6364224"/>
+            <a:ext cx="310896" cy="310896"/>
           </a:xfrm>
           <a:prstGeom prst="rect">
             <a:avLst/>
           </a:prstGeom>
           <a:solidFill>
-            <a:srgbClr val="0B2C5E"/>
+            <a:srgbClr val="0A2E7A"/>
           </a:solidFill>
           <a:ln/>
         </p:spPr>
       </p:sp>
       <p:sp>
         <p:nvSpPr>
-          <p:cNvPr id="7" name="Text 5"/>
-          <p:cNvSpPr/>
-          <p:nvPr/>
-        </p:nvSpPr>
-        <p:spPr>
-          <a:xfrm>
-            <a:off x="11624767" y="6327648"/>
-            <a:ext cx="274320" cy="274320"/>
+          <p:cNvPr id="8" name="Text 5"/>
+          <p:cNvSpPr/>
+          <p:nvPr/>
+        </p:nvSpPr>
+        <p:spPr>
+          <a:xfrm>
+            <a:off x="11661343" y="6364224"/>
+            <a:ext cx="310896" cy="310896"/>
           </a:xfrm>
           <a:prstGeom prst="rect">
             <a:avLst/>
@@ -9147,7 +9280,7 @@
               <a:buNone/>
             </a:pPr>
             <a:r>
-              <a:rPr lang="en-US" sz="950" b="1" dirty="0">
+              <a:rPr lang="en-US" sz="1000" b="1" dirty="0">
                 <a:solidFill>
                   <a:srgbClr val="FFFFFF"/>
                 </a:solidFill>
@@ -9157,33 +9290,10 @@
               </a:rPr>
               <a:t>6</a:t>
             </a:r>
-            <a:endParaRPr lang="en-US" sz="950" dirty="0"/>
-          </a:p>
-        </p:txBody>
-      </p:sp>
-      <p:pic>
-        <p:nvPicPr>
-          <p:cNvPr id="8" name="Image 0" descr="/home/user/bolt.diy/presentaciones/indotel-ciudades-inteligentes/src/derived/rooftop.jpg">    </p:cNvPr>
-          <p:cNvPicPr>
-            <a:picLocks noChangeAspect="1"/>
-          </p:cNvPicPr>
-          <p:nvPr/>
-        </p:nvPicPr>
-        <p:blipFill>
-          <a:blip r:embed="rId1"/>
-          <a:srcRect l="0" r="0" t="0" b="0"/>
-          <a:stretch/>
-        </p:blipFill>
-        <p:spPr>
-          <a:xfrm>
-            <a:off x="6656832" y="1371600"/>
-            <a:ext cx="4974336" cy="4224528"/>
-          </a:xfrm>
-          <a:prstGeom prst="rect">
-            <a:avLst/>
-          </a:prstGeom>
-        </p:spPr>
-      </p:pic>
+            <a:endParaRPr lang="en-US" sz="1000" dirty="0"/>
+          </a:p>
+        </p:txBody>
+      </p:sp>
       <p:sp>
         <p:nvSpPr>
           <p:cNvPr id="9" name="Shape 6"/>
@@ -9192,14 +9302,16 @@
         </p:nvSpPr>
         <p:spPr>
           <a:xfrm>
-            <a:off x="566928" y="1975104"/>
-            <a:ext cx="402336" cy="402336"/>
-          </a:xfrm>
-          <a:prstGeom prst="ellipse">
-            <a:avLst/>
+            <a:off x="566928" y="2011680"/>
+            <a:ext cx="420624" cy="420624"/>
+          </a:xfrm>
+          <a:prstGeom prst="roundRect">
+            <a:avLst>
+              <a:gd name="adj" fmla="val 23913"/>
+            </a:avLst>
           </a:prstGeom>
           <a:solidFill>
-            <a:srgbClr val="1668B8"/>
+            <a:srgbClr val="0B4489"/>
           </a:solidFill>
           <a:ln/>
         </p:spPr>
@@ -9220,8 +9332,8 @@
         </p:blipFill>
         <p:spPr>
           <a:xfrm>
-            <a:off x="667512" y="2075688"/>
-            <a:ext cx="201168" cy="201168"/>
+            <a:off x="663672" y="2108424"/>
+            <a:ext cx="227137" cy="227137"/>
           </a:xfrm>
           <a:prstGeom prst="rect">
             <a:avLst/>
@@ -9236,8 +9348,8 @@
         </p:nvSpPr>
         <p:spPr>
           <a:xfrm>
-            <a:off x="1225296" y="1938528"/>
-            <a:ext cx="5102352" cy="246888"/>
+            <a:off x="1261872" y="1965960"/>
+            <a:ext cx="4700016" cy="256032"/>
           </a:xfrm>
           <a:prstGeom prst="rect">
             <a:avLst/>
@@ -9255,7 +9367,7 @@
             <a:r>
               <a:rPr lang="en-US" sz="1300" b="1" dirty="0">
                 <a:solidFill>
-                  <a:srgbClr val="0B2C5E"/>
+                  <a:srgbClr val="0D1B5E"/>
                 </a:solidFill>
                 <a:latin typeface="Calibri" pitchFamily="34" charset="0"/>
                 <a:ea typeface="Calibri" pitchFamily="34" charset="-122"/>
@@ -9275,8 +9387,8 @@
         </p:nvSpPr>
         <p:spPr>
           <a:xfrm>
-            <a:off x="1225296" y="2203704"/>
-            <a:ext cx="5102352" cy="451104"/>
+            <a:off x="1261872" y="2240280"/>
+            <a:ext cx="4700016" cy="451104"/>
           </a:xfrm>
           <a:prstGeom prst="rect">
             <a:avLst/>
@@ -9297,7 +9409,7 @@
             <a:r>
               <a:rPr lang="en-US" sz="1050" dirty="0">
                 <a:solidFill>
-                  <a:srgbClr val="44566B"/>
+                  <a:srgbClr val="3B4356"/>
                 </a:solidFill>
                 <a:latin typeface="Calibri" pitchFamily="34" charset="0"/>
                 <a:ea typeface="Calibri" pitchFamily="34" charset="-122"/>
@@ -9317,14 +9429,16 @@
         </p:nvSpPr>
         <p:spPr>
           <a:xfrm>
-            <a:off x="566928" y="2956560"/>
-            <a:ext cx="402336" cy="402336"/>
-          </a:xfrm>
-          <a:prstGeom prst="ellipse">
-            <a:avLst/>
+            <a:off x="566928" y="2965704"/>
+            <a:ext cx="420624" cy="420624"/>
+          </a:xfrm>
+          <a:prstGeom prst="roundRect">
+            <a:avLst>
+              <a:gd name="adj" fmla="val 23913"/>
+            </a:avLst>
           </a:prstGeom>
           <a:solidFill>
-            <a:srgbClr val="1668B8"/>
+            <a:srgbClr val="0B4489"/>
           </a:solidFill>
           <a:ln/>
         </p:spPr>
@@ -9345,8 +9459,8 @@
         </p:blipFill>
         <p:spPr>
           <a:xfrm>
-            <a:off x="667512" y="3057144"/>
-            <a:ext cx="201168" cy="201168"/>
+            <a:off x="663672" y="3062448"/>
+            <a:ext cx="227137" cy="227137"/>
           </a:xfrm>
           <a:prstGeom prst="rect">
             <a:avLst/>
@@ -9361,8 +9475,8 @@
         </p:nvSpPr>
         <p:spPr>
           <a:xfrm>
-            <a:off x="1225296" y="2919984"/>
-            <a:ext cx="5102352" cy="246888"/>
+            <a:off x="1261872" y="2919984"/>
+            <a:ext cx="4700016" cy="256032"/>
           </a:xfrm>
           <a:prstGeom prst="rect">
             <a:avLst/>
@@ -9380,7 +9494,7 @@
             <a:r>
               <a:rPr lang="en-US" sz="1300" b="1" dirty="0">
                 <a:solidFill>
-                  <a:srgbClr val="0B2C5E"/>
+                  <a:srgbClr val="0D1B5E"/>
                 </a:solidFill>
                 <a:latin typeface="Calibri" pitchFamily="34" charset="0"/>
                 <a:ea typeface="Calibri" pitchFamily="34" charset="-122"/>
@@ -9400,8 +9514,8 @@
         </p:nvSpPr>
         <p:spPr>
           <a:xfrm>
-            <a:off x="1225296" y="3185160"/>
-            <a:ext cx="5102352" cy="451104"/>
+            <a:off x="1261872" y="3194304"/>
+            <a:ext cx="4700016" cy="451104"/>
           </a:xfrm>
           <a:prstGeom prst="rect">
             <a:avLst/>
@@ -9422,7 +9536,7 @@
             <a:r>
               <a:rPr lang="en-US" sz="1050" dirty="0">
                 <a:solidFill>
-                  <a:srgbClr val="44566B"/>
+                  <a:srgbClr val="3B4356"/>
                 </a:solidFill>
                 <a:latin typeface="Calibri" pitchFamily="34" charset="0"/>
                 <a:ea typeface="Calibri" pitchFamily="34" charset="-122"/>
@@ -9442,14 +9556,16 @@
         </p:nvSpPr>
         <p:spPr>
           <a:xfrm>
-            <a:off x="566928" y="3938016"/>
-            <a:ext cx="402336" cy="402336"/>
-          </a:xfrm>
-          <a:prstGeom prst="ellipse">
-            <a:avLst/>
+            <a:off x="566928" y="3919728"/>
+            <a:ext cx="420624" cy="420624"/>
+          </a:xfrm>
+          <a:prstGeom prst="roundRect">
+            <a:avLst>
+              <a:gd name="adj" fmla="val 23913"/>
+            </a:avLst>
           </a:prstGeom>
           <a:solidFill>
-            <a:srgbClr val="1668B8"/>
+            <a:srgbClr val="0B4489"/>
           </a:solidFill>
           <a:ln/>
         </p:spPr>
@@ -9470,8 +9586,8 @@
         </p:blipFill>
         <p:spPr>
           <a:xfrm>
-            <a:off x="667512" y="4038600"/>
-            <a:ext cx="201168" cy="201168"/>
+            <a:off x="663672" y="4016472"/>
+            <a:ext cx="227137" cy="227137"/>
           </a:xfrm>
           <a:prstGeom prst="rect">
             <a:avLst/>
@@ -9486,8 +9602,8 @@
         </p:nvSpPr>
         <p:spPr>
           <a:xfrm>
-            <a:off x="1225296" y="3901440"/>
-            <a:ext cx="5102352" cy="246888"/>
+            <a:off x="1261872" y="3874008"/>
+            <a:ext cx="4700016" cy="256032"/>
           </a:xfrm>
           <a:prstGeom prst="rect">
             <a:avLst/>
@@ -9505,7 +9621,7 @@
             <a:r>
               <a:rPr lang="en-US" sz="1300" b="1" dirty="0">
                 <a:solidFill>
-                  <a:srgbClr val="0B2C5E"/>
+                  <a:srgbClr val="0D1B5E"/>
                 </a:solidFill>
                 <a:latin typeface="Calibri" pitchFamily="34" charset="0"/>
                 <a:ea typeface="Calibri" pitchFamily="34" charset="-122"/>
@@ -9525,8 +9641,8 @@
         </p:nvSpPr>
         <p:spPr>
           <a:xfrm>
-            <a:off x="1225296" y="4166616"/>
-            <a:ext cx="5102352" cy="451104"/>
+            <a:off x="1261872" y="4148328"/>
+            <a:ext cx="4700016" cy="451104"/>
           </a:xfrm>
           <a:prstGeom prst="rect">
             <a:avLst/>
@@ -9547,7 +9663,7 @@
             <a:r>
               <a:rPr lang="en-US" sz="1050" dirty="0">
                 <a:solidFill>
-                  <a:srgbClr val="44566B"/>
+                  <a:srgbClr val="3B4356"/>
                 </a:solidFill>
                 <a:latin typeface="Calibri" pitchFamily="34" charset="0"/>
                 <a:ea typeface="Calibri" pitchFamily="34" charset="-122"/>
@@ -9567,14 +9683,16 @@
         </p:nvSpPr>
         <p:spPr>
           <a:xfrm>
-            <a:off x="566928" y="4919472"/>
-            <a:ext cx="402336" cy="402336"/>
-          </a:xfrm>
-          <a:prstGeom prst="ellipse">
-            <a:avLst/>
+            <a:off x="566928" y="4873752"/>
+            <a:ext cx="420624" cy="420624"/>
+          </a:xfrm>
+          <a:prstGeom prst="roundRect">
+            <a:avLst>
+              <a:gd name="adj" fmla="val 23913"/>
+            </a:avLst>
           </a:prstGeom>
           <a:solidFill>
-            <a:srgbClr val="1668B8"/>
+            <a:srgbClr val="0B4489"/>
           </a:solidFill>
           <a:ln/>
         </p:spPr>
@@ -9595,8 +9713,8 @@
         </p:blipFill>
         <p:spPr>
           <a:xfrm>
-            <a:off x="667512" y="5020056"/>
-            <a:ext cx="201168" cy="201168"/>
+            <a:off x="663672" y="4970496"/>
+            <a:ext cx="227137" cy="227137"/>
           </a:xfrm>
           <a:prstGeom prst="rect">
             <a:avLst/>
@@ -9611,8 +9729,8 @@
         </p:nvSpPr>
         <p:spPr>
           <a:xfrm>
-            <a:off x="1225296" y="4882896"/>
-            <a:ext cx="5102352" cy="246888"/>
+            <a:off x="1261872" y="4828032"/>
+            <a:ext cx="4700016" cy="256032"/>
           </a:xfrm>
           <a:prstGeom prst="rect">
             <a:avLst/>
@@ -9630,7 +9748,7 @@
             <a:r>
               <a:rPr lang="en-US" sz="1300" b="1" dirty="0">
                 <a:solidFill>
-                  <a:srgbClr val="0B2C5E"/>
+                  <a:srgbClr val="0D1B5E"/>
                 </a:solidFill>
                 <a:latin typeface="Calibri" pitchFamily="34" charset="0"/>
                 <a:ea typeface="Calibri" pitchFamily="34" charset="-122"/>
@@ -9650,8 +9768,8 @@
         </p:nvSpPr>
         <p:spPr>
           <a:xfrm>
-            <a:off x="1225296" y="5148072"/>
-            <a:ext cx="5102352" cy="451104"/>
+            <a:off x="1261872" y="5102352"/>
+            <a:ext cx="4700016" cy="451104"/>
           </a:xfrm>
           <a:prstGeom prst="rect">
             <a:avLst/>
@@ -9672,7 +9790,7 @@
             <a:r>
               <a:rPr lang="en-US" sz="1050" dirty="0">
                 <a:solidFill>
-                  <a:srgbClr val="44566B"/>
+                  <a:srgbClr val="3B4356"/>
                 </a:solidFill>
                 <a:latin typeface="Calibri" pitchFamily="34" charset="0"/>
                 <a:ea typeface="Calibri" pitchFamily="34" charset="-122"/>
@@ -9698,7 +9816,7 @@
     <p:bg>
       <p:bgPr>
         <a:solidFill>
-          <a:srgbClr val="FFFFFF"/>
+          <a:srgbClr val="F2F3F8"/>
         </a:solidFill>
       </p:bgPr>
     </p:bg>
@@ -9724,7 +9842,7 @@
         </p:nvSpPr>
         <p:spPr>
           <a:xfrm>
-            <a:off x="566928" y="256032"/>
+            <a:off x="566928" y="237744"/>
             <a:ext cx="3657600" cy="274320"/>
           </a:xfrm>
           <a:prstGeom prst="rect">
@@ -9741,9 +9859,9 @@
               <a:buNone/>
             </a:pPr>
             <a:r>
-              <a:rPr lang="en-US" sz="1500" b="1" spc="140" kern="0" dirty="0">
-                <a:solidFill>
-                  <a:srgbClr val="0B2C5E"/>
+              <a:rPr lang="en-US" sz="1500" b="1" spc="130" kern="0" dirty="0">
+                <a:solidFill>
+                  <a:srgbClr val="0D1B5E"/>
                 </a:solidFill>
                 <a:latin typeface="Arial" pitchFamily="34" charset="0"/>
                 <a:ea typeface="Arial" pitchFamily="34" charset="-122"/>
@@ -9763,7 +9881,7 @@
         </p:nvSpPr>
         <p:spPr>
           <a:xfrm>
-            <a:off x="566928" y="534924"/>
+            <a:off x="566928" y="516636"/>
             <a:ext cx="3657600" cy="219456"/>
           </a:xfrm>
           <a:prstGeom prst="rect">
@@ -9782,7 +9900,7 @@
             <a:r>
               <a:rPr lang="en-US" sz="950" dirty="0">
                 <a:solidFill>
-                  <a:srgbClr val="8494A5"/>
+                  <a:srgbClr val="8A93A5"/>
                 </a:solidFill>
                 <a:latin typeface="Calibri" pitchFamily="34" charset="0"/>
                 <a:ea typeface="Calibri" pitchFamily="34" charset="-122"/>
@@ -9802,8 +9920,8 @@
         </p:nvSpPr>
         <p:spPr>
           <a:xfrm>
-            <a:off x="566928" y="822960"/>
-            <a:ext cx="10241280" cy="868680"/>
+            <a:off x="566928" y="768096"/>
+            <a:ext cx="11057839" cy="420624"/>
           </a:xfrm>
           <a:prstGeom prst="rect">
             <a:avLst/>
@@ -9819,9 +9937,9 @@
               <a:buNone/>
             </a:pPr>
             <a:r>
-              <a:rPr lang="en-US" sz="2100" b="1" dirty="0">
-                <a:solidFill>
-                  <a:srgbClr val="0B2C5E"/>
+              <a:rPr lang="en-US" sz="1950" b="1" dirty="0">
+                <a:solidFill>
+                  <a:srgbClr val="0D1B5E"/>
                 </a:solidFill>
                 <a:latin typeface="Calibri" pitchFamily="34" charset="0"/>
                 <a:ea typeface="Calibri" pitchFamily="34" charset="-122"/>
@@ -9829,7 +9947,7 @@
               </a:rPr>
               <a:t>El concepto central de OASC: Mecanismos Mínimos de Interoperabilidad</a:t>
             </a:r>
-            <a:endParaRPr lang="en-US" sz="2100" dirty="0"/>
+            <a:endParaRPr lang="en-US" sz="1950" dirty="0"/>
           </a:p>
         </p:txBody>
       </p:sp>
@@ -9841,8 +9959,8 @@
         </p:nvSpPr>
         <p:spPr>
           <a:xfrm>
-            <a:off x="566928" y="1609344"/>
-            <a:ext cx="11057839" cy="457200"/>
+            <a:off x="566928" y="1170432"/>
+            <a:ext cx="11057839" cy="475488"/>
           </a:xfrm>
           <a:prstGeom prst="rect">
             <a:avLst/>
@@ -9856,14 +9974,14 @@
           <a:p>
             <a:pPr indent="0" marL="0">
               <a:lnSpc>
-                <a:spcPts val="1600"/>
+                <a:spcPts val="1650"/>
               </a:lnSpc>
               <a:buNone/>
             </a:pPr>
             <a:r>
-              <a:rPr lang="en-US" sz="1250" dirty="0">
-                <a:solidFill>
-                  <a:srgbClr val="44566B"/>
+              <a:rPr lang="en-US" sz="1250" b="1" dirty="0">
+                <a:solidFill>
+                  <a:srgbClr val="243C8F"/>
                 </a:solidFill>
                 <a:latin typeface="Calibri" pitchFamily="34" charset="0"/>
                 <a:ea typeface="Calibri" pitchFamily="34" charset="-122"/>
@@ -9883,18 +10001,19 @@
         </p:nvSpPr>
         <p:spPr>
           <a:xfrm>
-            <a:off x="566928" y="1965960"/>
-            <a:ext cx="5330952" cy="3154680"/>
-          </a:xfrm>
-          <a:prstGeom prst="roundRect">
-            <a:avLst>
-              <a:gd name="adj" fmla="val 1739"/>
-            </a:avLst>
-          </a:prstGeom>
-          <a:solidFill>
-            <a:srgbClr val="F3F7FB"/>
-          </a:solidFill>
-          <a:ln/>
+            <a:off x="5989320" y="1828800"/>
+            <a:ext cx="0" cy="3200400"/>
+          </a:xfrm>
+          <a:prstGeom prst="line">
+            <a:avLst/>
+          </a:prstGeom>
+          <a:noFill/>
+          <a:ln w="12700">
+            <a:solidFill>
+              <a:srgbClr val="CBD5E4"/>
+            </a:solidFill>
+            <a:prstDash val="solid"/>
+          </a:ln>
         </p:spPr>
       </p:sp>
       <p:sp>
@@ -9905,8 +10024,8 @@
         </p:nvSpPr>
         <p:spPr>
           <a:xfrm>
-            <a:off x="932688" y="2231136"/>
-            <a:ext cx="4599432" cy="292608"/>
+            <a:off x="566928" y="1828800"/>
+            <a:ext cx="4828032" cy="292608"/>
           </a:xfrm>
           <a:prstGeom prst="rect">
             <a:avLst/>
@@ -9924,7 +10043,7 @@
             <a:r>
               <a:rPr lang="en-US" sz="1350" b="1" dirty="0">
                 <a:solidFill>
-                  <a:srgbClr val="1668B8"/>
+                  <a:srgbClr val="243C8F"/>
                 </a:solidFill>
                 <a:latin typeface="Calibri" pitchFamily="34" charset="0"/>
                 <a:ea typeface="Calibri" pitchFamily="34" charset="-122"/>
@@ -9952,8 +10071,8 @@
         </p:blipFill>
         <p:spPr>
           <a:xfrm>
-            <a:off x="932688" y="2729484"/>
-            <a:ext cx="164592" cy="164592"/>
+            <a:off x="566928" y="2368296"/>
+            <a:ext cx="182880" cy="182880"/>
           </a:xfrm>
           <a:prstGeom prst="rect">
             <a:avLst/>
@@ -9968,8 +10087,8 @@
         </p:nvSpPr>
         <p:spPr>
           <a:xfrm>
-            <a:off x="1234440" y="2656332"/>
-            <a:ext cx="4297680" cy="467360"/>
+            <a:off x="877824" y="2295144"/>
+            <a:ext cx="4517136" cy="467360"/>
           </a:xfrm>
           <a:prstGeom prst="rect">
             <a:avLst/>
@@ -9990,7 +10109,7 @@
             <a:r>
               <a:rPr lang="en-US" sz="1100" dirty="0">
                 <a:solidFill>
-                  <a:srgbClr val="44566B"/>
+                  <a:srgbClr val="3B4356"/>
                 </a:solidFill>
                 <a:latin typeface="Calibri" pitchFamily="34" charset="0"/>
                 <a:ea typeface="Calibri" pitchFamily="34" charset="-122"/>
@@ -10018,8 +10137,8 @@
         </p:blipFill>
         <p:spPr>
           <a:xfrm>
-            <a:off x="932688" y="3324860"/>
-            <a:ext cx="164592" cy="164592"/>
+            <a:off x="566928" y="2981960"/>
+            <a:ext cx="182880" cy="182880"/>
           </a:xfrm>
           <a:prstGeom prst="rect">
             <a:avLst/>
@@ -10034,8 +10153,8 @@
         </p:nvSpPr>
         <p:spPr>
           <a:xfrm>
-            <a:off x="1234440" y="3251708"/>
-            <a:ext cx="4297680" cy="288544"/>
+            <a:off x="877824" y="2908808"/>
+            <a:ext cx="4517136" cy="288544"/>
           </a:xfrm>
           <a:prstGeom prst="rect">
             <a:avLst/>
@@ -10056,7 +10175,7 @@
             <a:r>
               <a:rPr lang="en-US" sz="1100" dirty="0">
                 <a:solidFill>
-                  <a:srgbClr val="44566B"/>
+                  <a:srgbClr val="3B4356"/>
                 </a:solidFill>
                 <a:latin typeface="Calibri" pitchFamily="34" charset="0"/>
                 <a:ea typeface="Calibri" pitchFamily="34" charset="-122"/>
@@ -10084,8 +10203,8 @@
         </p:blipFill>
         <p:spPr>
           <a:xfrm>
-            <a:off x="932688" y="3741420"/>
-            <a:ext cx="164592" cy="164592"/>
+            <a:off x="566928" y="3416808"/>
+            <a:ext cx="182880" cy="182880"/>
           </a:xfrm>
           <a:prstGeom prst="rect">
             <a:avLst/>
@@ -10100,8 +10219,8 @@
         </p:nvSpPr>
         <p:spPr>
           <a:xfrm>
-            <a:off x="1234440" y="3668268"/>
-            <a:ext cx="4297680" cy="467360"/>
+            <a:off x="877824" y="3343656"/>
+            <a:ext cx="4517136" cy="467360"/>
           </a:xfrm>
           <a:prstGeom prst="rect">
             <a:avLst/>
@@ -10122,7 +10241,7 @@
             <a:r>
               <a:rPr lang="en-US" sz="1100" dirty="0">
                 <a:solidFill>
-                  <a:srgbClr val="44566B"/>
+                  <a:srgbClr val="3B4356"/>
                 </a:solidFill>
                 <a:latin typeface="Calibri" pitchFamily="34" charset="0"/>
                 <a:ea typeface="Calibri" pitchFamily="34" charset="-122"/>
@@ -10150,8 +10269,8 @@
         </p:blipFill>
         <p:spPr>
           <a:xfrm>
-            <a:off x="932688" y="4336796"/>
-            <a:ext cx="164592" cy="164592"/>
+            <a:off x="566928" y="4030472"/>
+            <a:ext cx="182880" cy="182880"/>
           </a:xfrm>
           <a:prstGeom prst="rect">
             <a:avLst/>
@@ -10166,8 +10285,8 @@
         </p:nvSpPr>
         <p:spPr>
           <a:xfrm>
-            <a:off x="1234440" y="4263644"/>
-            <a:ext cx="4297680" cy="467360"/>
+            <a:off x="877824" y="3957320"/>
+            <a:ext cx="4517136" cy="288544"/>
           </a:xfrm>
           <a:prstGeom prst="rect">
             <a:avLst/>
@@ -10188,7 +10307,7 @@
             <a:r>
               <a:rPr lang="en-US" sz="1100" dirty="0">
                 <a:solidFill>
-                  <a:srgbClr val="44566B"/>
+                  <a:srgbClr val="3B4356"/>
                 </a:solidFill>
                 <a:latin typeface="Calibri" pitchFamily="34" charset="0"/>
                 <a:ea typeface="Calibri" pitchFamily="34" charset="-122"/>
@@ -10202,36 +10321,14 @@
       </p:sp>
       <p:sp>
         <p:nvSpPr>
-          <p:cNvPr id="16" name="Shape 10"/>
-          <p:cNvSpPr/>
-          <p:nvPr/>
-        </p:nvSpPr>
-        <p:spPr>
-          <a:xfrm>
-            <a:off x="6291072" y="1965960"/>
-            <a:ext cx="5330952" cy="3154680"/>
-          </a:xfrm>
-          <a:prstGeom prst="roundRect">
-            <a:avLst>
-              <a:gd name="adj" fmla="val 1739"/>
-            </a:avLst>
-          </a:prstGeom>
-          <a:solidFill>
-            <a:srgbClr val="F3F7FB"/>
-          </a:solidFill>
-          <a:ln/>
-        </p:spPr>
-      </p:sp>
-      <p:sp>
-        <p:nvSpPr>
-          <p:cNvPr id="17" name="Text 11"/>
-          <p:cNvSpPr/>
-          <p:nvPr/>
-        </p:nvSpPr>
-        <p:spPr>
-          <a:xfrm>
-            <a:off x="6656832" y="2231136"/>
-            <a:ext cx="4599432" cy="292608"/>
+          <p:cNvPr id="16" name="Text 10"/>
+          <p:cNvSpPr/>
+          <p:nvPr/>
+        </p:nvSpPr>
+        <p:spPr>
+          <a:xfrm>
+            <a:off x="6355080" y="1828800"/>
+            <a:ext cx="4828032" cy="292608"/>
           </a:xfrm>
           <a:prstGeom prst="rect">
             <a:avLst/>
@@ -10249,7 +10346,7 @@
             <a:r>
               <a:rPr lang="en-US" sz="1350" b="1" dirty="0">
                 <a:solidFill>
-                  <a:srgbClr val="1668B8"/>
+                  <a:srgbClr val="243C8F"/>
                 </a:solidFill>
                 <a:latin typeface="Calibri" pitchFamily="34" charset="0"/>
                 <a:ea typeface="Calibri" pitchFamily="34" charset="-122"/>
@@ -10263,7 +10360,7 @@
       </p:sp>
       <p:pic>
         <p:nvPicPr>
-          <p:cNvPr id="18" name="Image 4" descr="/home/user/bolt.diy/presentaciones/indotel-ciudades-inteligentes/src/icons/check_blue.png">    </p:cNvPr>
+          <p:cNvPr id="17" name="Image 4" descr="/home/user/bolt.diy/presentaciones/indotel-ciudades-inteligentes/src/icons/check_blue.png">    </p:cNvPr>
           <p:cNvPicPr>
             <a:picLocks noChangeAspect="1"/>
           </p:cNvPicPr>
@@ -10277,8 +10374,8 @@
         </p:blipFill>
         <p:spPr>
           <a:xfrm>
-            <a:off x="6656832" y="2729484"/>
-            <a:ext cx="164592" cy="164592"/>
+            <a:off x="6355080" y="2368296"/>
+            <a:ext cx="182880" cy="182880"/>
           </a:xfrm>
           <a:prstGeom prst="rect">
             <a:avLst/>
@@ -10287,14 +10384,14 @@
       </p:pic>
       <p:sp>
         <p:nvSpPr>
-          <p:cNvPr id="19" name="Text 12"/>
-          <p:cNvSpPr/>
-          <p:nvPr/>
-        </p:nvSpPr>
-        <p:spPr>
-          <a:xfrm>
-            <a:off x="6958584" y="2656332"/>
-            <a:ext cx="4297680" cy="288544"/>
+          <p:cNvPr id="18" name="Text 11"/>
+          <p:cNvSpPr/>
+          <p:nvPr/>
+        </p:nvSpPr>
+        <p:spPr>
+          <a:xfrm>
+            <a:off x="6665976" y="2295144"/>
+            <a:ext cx="4517136" cy="288544"/>
           </a:xfrm>
           <a:prstGeom prst="rect">
             <a:avLst/>
@@ -10315,7 +10412,7 @@
             <a:r>
               <a:rPr lang="en-US" sz="1100" dirty="0">
                 <a:solidFill>
-                  <a:srgbClr val="44566B"/>
+                  <a:srgbClr val="3B4356"/>
                 </a:solidFill>
                 <a:latin typeface="Calibri" pitchFamily="34" charset="0"/>
                 <a:ea typeface="Calibri" pitchFamily="34" charset="-122"/>
@@ -10329,7 +10426,7 @@
       </p:sp>
       <p:pic>
         <p:nvPicPr>
-          <p:cNvPr id="20" name="Image 5" descr="/home/user/bolt.diy/presentaciones/indotel-ciudades-inteligentes/src/icons/check_blue.png">    </p:cNvPr>
+          <p:cNvPr id="19" name="Image 5" descr="/home/user/bolt.diy/presentaciones/indotel-ciudades-inteligentes/src/icons/check_blue.png">    </p:cNvPr>
           <p:cNvPicPr>
             <a:picLocks noChangeAspect="1"/>
           </p:cNvPicPr>
@@ -10343,8 +10440,8 @@
         </p:blipFill>
         <p:spPr>
           <a:xfrm>
-            <a:off x="6656832" y="3146044"/>
-            <a:ext cx="164592" cy="164592"/>
+            <a:off x="6355080" y="2803144"/>
+            <a:ext cx="182880" cy="182880"/>
           </a:xfrm>
           <a:prstGeom prst="rect">
             <a:avLst/>
@@ -10353,14 +10450,14 @@
       </p:pic>
       <p:sp>
         <p:nvSpPr>
-          <p:cNvPr id="21" name="Text 13"/>
-          <p:cNvSpPr/>
-          <p:nvPr/>
-        </p:nvSpPr>
-        <p:spPr>
-          <a:xfrm>
-            <a:off x="6958584" y="3072892"/>
-            <a:ext cx="4297680" cy="467360"/>
+          <p:cNvPr id="20" name="Text 12"/>
+          <p:cNvSpPr/>
+          <p:nvPr/>
+        </p:nvSpPr>
+        <p:spPr>
+          <a:xfrm>
+            <a:off x="6665976" y="2729992"/>
+            <a:ext cx="4517136" cy="467360"/>
           </a:xfrm>
           <a:prstGeom prst="rect">
             <a:avLst/>
@@ -10381,7 +10478,7 @@
             <a:r>
               <a:rPr lang="en-US" sz="1100" dirty="0">
                 <a:solidFill>
-                  <a:srgbClr val="44566B"/>
+                  <a:srgbClr val="3B4356"/>
                 </a:solidFill>
                 <a:latin typeface="Calibri" pitchFamily="34" charset="0"/>
                 <a:ea typeface="Calibri" pitchFamily="34" charset="-122"/>
@@ -10395,7 +10492,7 @@
       </p:sp>
       <p:pic>
         <p:nvPicPr>
-          <p:cNvPr id="22" name="Image 6" descr="/home/user/bolt.diy/presentaciones/indotel-ciudades-inteligentes/src/icons/check_blue.png">    </p:cNvPr>
+          <p:cNvPr id="21" name="Image 6" descr="/home/user/bolt.diy/presentaciones/indotel-ciudades-inteligentes/src/icons/check_blue.png">    </p:cNvPr>
           <p:cNvPicPr>
             <a:picLocks noChangeAspect="1"/>
           </p:cNvPicPr>
@@ -10409,8 +10506,8 @@
         </p:blipFill>
         <p:spPr>
           <a:xfrm>
-            <a:off x="6656832" y="3741420"/>
-            <a:ext cx="164592" cy="164592"/>
+            <a:off x="6355080" y="3416808"/>
+            <a:ext cx="182880" cy="182880"/>
           </a:xfrm>
           <a:prstGeom prst="rect">
             <a:avLst/>
@@ -10419,14 +10516,14 @@
       </p:pic>
       <p:sp>
         <p:nvSpPr>
-          <p:cNvPr id="23" name="Text 14"/>
-          <p:cNvSpPr/>
-          <p:nvPr/>
-        </p:nvSpPr>
-        <p:spPr>
-          <a:xfrm>
-            <a:off x="6958584" y="3668268"/>
-            <a:ext cx="4297680" cy="467360"/>
+          <p:cNvPr id="22" name="Text 13"/>
+          <p:cNvSpPr/>
+          <p:nvPr/>
+        </p:nvSpPr>
+        <p:spPr>
+          <a:xfrm>
+            <a:off x="6665976" y="3343656"/>
+            <a:ext cx="4517136" cy="467360"/>
           </a:xfrm>
           <a:prstGeom prst="rect">
             <a:avLst/>
@@ -10447,7 +10544,7 @@
             <a:r>
               <a:rPr lang="en-US" sz="1100" dirty="0">
                 <a:solidFill>
-                  <a:srgbClr val="44566B"/>
+                  <a:srgbClr val="3B4356"/>
                 </a:solidFill>
                 <a:latin typeface="Calibri" pitchFamily="34" charset="0"/>
                 <a:ea typeface="Calibri" pitchFamily="34" charset="-122"/>
@@ -10461,22 +10558,42 @@
       </p:sp>
       <p:sp>
         <p:nvSpPr>
-          <p:cNvPr id="24" name="Shape 15"/>
-          <p:cNvSpPr/>
-          <p:nvPr/>
-        </p:nvSpPr>
-        <p:spPr>
-          <a:xfrm>
-            <a:off x="566928" y="5321808"/>
-            <a:ext cx="11057839" cy="777240"/>
+          <p:cNvPr id="23" name="Shape 14"/>
+          <p:cNvSpPr/>
+          <p:nvPr/>
+        </p:nvSpPr>
+        <p:spPr>
+          <a:xfrm>
+            <a:off x="566928" y="5230368"/>
+            <a:ext cx="11057839" cy="868680"/>
           </a:xfrm>
           <a:prstGeom prst="roundRect">
             <a:avLst>
-              <a:gd name="adj" fmla="val 7059"/>
+              <a:gd name="adj" fmla="val 7368"/>
             </a:avLst>
           </a:prstGeom>
           <a:solidFill>
-            <a:srgbClr val="E8F1FA"/>
+            <a:srgbClr val="E4EDF9"/>
+          </a:solidFill>
+          <a:ln/>
+        </p:spPr>
+      </p:sp>
+      <p:sp>
+        <p:nvSpPr>
+          <p:cNvPr id="24" name="Shape 15"/>
+          <p:cNvSpPr/>
+          <p:nvPr/>
+        </p:nvSpPr>
+        <p:spPr>
+          <a:xfrm>
+            <a:off x="896112" y="5458968"/>
+            <a:ext cx="420624" cy="420624"/>
+          </a:xfrm>
+          <a:prstGeom prst="ellipse">
+            <a:avLst/>
+          </a:prstGeom>
+          <a:solidFill>
+            <a:srgbClr val="0B4489"/>
           </a:solidFill>
           <a:ln/>
         </p:spPr>
@@ -10497,8 +10614,8 @@
         </p:blipFill>
         <p:spPr>
           <a:xfrm>
-            <a:off x="950976" y="5577840"/>
-            <a:ext cx="274320" cy="274320"/>
+            <a:off x="1005840" y="5568696"/>
+            <a:ext cx="201168" cy="201168"/>
           </a:xfrm>
           <a:prstGeom prst="rect">
             <a:avLst/>
@@ -10513,8 +10630,8 @@
         </p:nvSpPr>
         <p:spPr>
           <a:xfrm>
-            <a:off x="1408176" y="5321808"/>
-            <a:ext cx="9823399" cy="777240"/>
+            <a:off x="1499616" y="5230368"/>
+            <a:ext cx="9777679" cy="868680"/>
           </a:xfrm>
           <a:prstGeom prst="rect">
             <a:avLst/>
@@ -10528,23 +10645,43 @@
           <a:p>
             <a:pPr indent="0" marL="0">
               <a:lnSpc>
-                <a:spcPts val="1700"/>
+                <a:spcPts val="1800"/>
               </a:lnSpc>
               <a:buNone/>
             </a:pPr>
             <a:r>
-              <a:rPr lang="en-US" sz="1250" i="1" dirty="0">
-                <a:solidFill>
-                  <a:srgbClr val="0B2C5E"/>
-                </a:solidFill>
-                <a:latin typeface="Calibri" pitchFamily="34" charset="0"/>
-                <a:ea typeface="Calibri" pitchFamily="34" charset="-122"/>
-                <a:cs typeface="Calibri" pitchFamily="34" charset="-120"/>
-              </a:rPr>
-              <a:t>“Los MIMs convierten la ciudad inteligente en gestión pública más eficiente, no en tecnología aislada.”</a:t>
+              <a:rPr lang="en-US" sz="1250" b="1" dirty="0">
+                <a:solidFill>
+                  <a:srgbClr val="243C8F"/>
+                </a:solidFill>
+                <a:latin typeface="Calibri" pitchFamily="34" charset="0"/>
+                <a:ea typeface="Calibri" pitchFamily="34" charset="-122"/>
+                <a:cs typeface="Calibri" pitchFamily="34" charset="-120"/>
+              </a:rPr>
+              <a:t>“Los MIMs convierten la ciudad inteligente en gestión pública más eficiente,</a:t>
             </a:r>
             <a:endParaRPr lang="en-US" sz="1250" dirty="0"/>
           </a:p>
+          <a:p>
+            <a:pPr indent="0" marL="0">
+              <a:lnSpc>
+                <a:spcPts val="1800"/>
+              </a:lnSpc>
+              <a:buNone/>
+            </a:pPr>
+            <a:r>
+              <a:rPr lang="en-US" sz="1250" b="1" dirty="0">
+                <a:solidFill>
+                  <a:srgbClr val="243C8F"/>
+                </a:solidFill>
+                <a:latin typeface="Calibri" pitchFamily="34" charset="0"/>
+                <a:ea typeface="Calibri" pitchFamily="34" charset="-122"/>
+                <a:cs typeface="Calibri" pitchFamily="34" charset="-120"/>
+              </a:rPr>
+              <a:t>no en tecnología aislada.”</a:t>
+            </a:r>
+            <a:endParaRPr lang="en-US" sz="1250" dirty="0"/>
+          </a:p>
         </p:txBody>
       </p:sp>
       <p:sp>
@@ -10555,8 +10692,8 @@
         </p:nvSpPr>
         <p:spPr>
           <a:xfrm>
-            <a:off x="566928" y="6400800"/>
-            <a:ext cx="10234879" cy="237744"/>
+            <a:off x="566928" y="6437376"/>
+            <a:ext cx="10143439" cy="237744"/>
           </a:xfrm>
           <a:prstGeom prst="rect">
             <a:avLst/>
@@ -10572,9 +10709,9 @@
               <a:buNone/>
             </a:pPr>
             <a:r>
-              <a:rPr lang="en-US" sz="850" i="1" dirty="0">
-                <a:solidFill>
-                  <a:srgbClr val="8494A5"/>
+              <a:rPr lang="en-US" sz="850" dirty="0">
+                <a:solidFill>
+                  <a:srgbClr val="8A93A5"/>
                 </a:solidFill>
                 <a:latin typeface="Calibri" pitchFamily="34" charset="0"/>
                 <a:ea typeface="Calibri" pitchFamily="34" charset="-122"/>
@@ -10594,14 +10731,14 @@
         </p:nvSpPr>
         <p:spPr>
           <a:xfrm>
-            <a:off x="11624767" y="6327648"/>
-            <a:ext cx="274320" cy="274320"/>
+            <a:off x="11661343" y="6364224"/>
+            <a:ext cx="310896" cy="310896"/>
           </a:xfrm>
           <a:prstGeom prst="rect">
             <a:avLst/>
           </a:prstGeom>
           <a:solidFill>
-            <a:srgbClr val="0B2C5E"/>
+            <a:srgbClr val="0A2E7A"/>
           </a:solidFill>
           <a:ln/>
         </p:spPr>
@@ -10614,8 +10751,8 @@
         </p:nvSpPr>
         <p:spPr>
           <a:xfrm>
-            <a:off x="11624767" y="6327648"/>
-            <a:ext cx="274320" cy="274320"/>
+            <a:off x="11661343" y="6364224"/>
+            <a:ext cx="310896" cy="310896"/>
           </a:xfrm>
           <a:prstGeom prst="rect">
             <a:avLst/>
@@ -10631,7 +10768,7 @@
               <a:buNone/>
             </a:pPr>
             <a:r>
-              <a:rPr lang="en-US" sz="950" b="1" dirty="0">
+              <a:rPr lang="en-US" sz="1000" b="1" dirty="0">
                 <a:solidFill>
                   <a:srgbClr val="FFFFFF"/>
                 </a:solidFill>
@@ -10641,7 +10778,7 @@
               </a:rPr>
               <a:t>7</a:t>
             </a:r>
-            <a:endParaRPr lang="en-US" sz="950" dirty="0"/>
+            <a:endParaRPr lang="en-US" sz="1000" dirty="0"/>
           </a:p>
         </p:txBody>
       </p:sp>
@@ -10659,7 +10796,7 @@
     <p:bg>
       <p:bgPr>
         <a:solidFill>
-          <a:srgbClr val="FFFFFF"/>
+          <a:srgbClr val="F2F3F8"/>
         </a:solidFill>
       </p:bgPr>
     </p:bg>
@@ -10685,7 +10822,7 @@
         </p:nvSpPr>
         <p:spPr>
           <a:xfrm>
-            <a:off x="566928" y="256032"/>
+            <a:off x="566928" y="237744"/>
             <a:ext cx="3657600" cy="274320"/>
           </a:xfrm>
           <a:prstGeom prst="rect">
@@ -10702,9 +10839,9 @@
               <a:buNone/>
             </a:pPr>
             <a:r>
-              <a:rPr lang="en-US" sz="1500" b="1" spc="140" kern="0" dirty="0">
-                <a:solidFill>
-                  <a:srgbClr val="0B2C5E"/>
+              <a:rPr lang="en-US" sz="1500" b="1" spc="130" kern="0" dirty="0">
+                <a:solidFill>
+                  <a:srgbClr val="0D1B5E"/>
                 </a:solidFill>
                 <a:latin typeface="Arial" pitchFamily="34" charset="0"/>
                 <a:ea typeface="Arial" pitchFamily="34" charset="-122"/>
@@ -10724,7 +10861,7 @@
         </p:nvSpPr>
         <p:spPr>
           <a:xfrm>
-            <a:off x="566928" y="534924"/>
+            <a:off x="566928" y="516636"/>
             <a:ext cx="3657600" cy="219456"/>
           </a:xfrm>
           <a:prstGeom prst="rect">
@@ -10743,7 +10880,7 @@
             <a:r>
               <a:rPr lang="en-US" sz="950" dirty="0">
                 <a:solidFill>
-                  <a:srgbClr val="8494A5"/>
+                  <a:srgbClr val="8A93A5"/>
                 </a:solidFill>
                 <a:latin typeface="Calibri" pitchFamily="34" charset="0"/>
                 <a:ea typeface="Calibri" pitchFamily="34" charset="-122"/>
@@ -10763,7 +10900,7 @@
         </p:nvSpPr>
         <p:spPr>
           <a:xfrm>
-            <a:off x="566928" y="822960"/>
+            <a:off x="566928" y="768096"/>
             <a:ext cx="11057839" cy="420624"/>
           </a:xfrm>
           <a:prstGeom prst="rect">
@@ -10780,9 +10917,9 @@
               <a:buNone/>
             </a:pPr>
             <a:r>
-              <a:rPr lang="en-US" sz="2500" b="1" dirty="0">
-                <a:solidFill>
-                  <a:srgbClr val="0B2C5E"/>
+              <a:rPr lang="en-US" sz="2450" b="1" dirty="0">
+                <a:solidFill>
+                  <a:srgbClr val="0D1B5E"/>
                 </a:solidFill>
                 <a:latin typeface="Calibri" pitchFamily="34" charset="0"/>
                 <a:ea typeface="Calibri" pitchFamily="34" charset="-122"/>
@@ -10790,7 +10927,7 @@
               </a:rPr>
               <a:t>¿Cómo opera OASC?</a:t>
             </a:r>
-            <a:endParaRPr lang="en-US" sz="2500" dirty="0"/>
+            <a:endParaRPr lang="en-US" sz="2450" dirty="0"/>
           </a:p>
         </p:txBody>
       </p:sp>
@@ -10802,8 +10939,8 @@
         </p:nvSpPr>
         <p:spPr>
           <a:xfrm>
-            <a:off x="566928" y="1280160"/>
-            <a:ext cx="11057839" cy="457200"/>
+            <a:off x="566928" y="1234440"/>
+            <a:ext cx="11057839" cy="475488"/>
           </a:xfrm>
           <a:prstGeom prst="rect">
             <a:avLst/>
@@ -10817,14 +10954,14 @@
           <a:p>
             <a:pPr indent="0" marL="0">
               <a:lnSpc>
-                <a:spcPts val="1600"/>
+                <a:spcPts val="1650"/>
               </a:lnSpc>
               <a:buNone/>
             </a:pPr>
             <a:r>
-              <a:rPr lang="en-US" sz="1250" dirty="0">
-                <a:solidFill>
-                  <a:srgbClr val="44566B"/>
+              <a:rPr lang="en-US" sz="1250" b="1" dirty="0">
+                <a:solidFill>
+                  <a:srgbClr val="243C8F"/>
                 </a:solidFill>
                 <a:latin typeface="Calibri" pitchFamily="34" charset="0"/>
                 <a:ea typeface="Calibri" pitchFamily="34" charset="-122"/>
@@ -10844,14 +10981,14 @@
         </p:nvSpPr>
         <p:spPr>
           <a:xfrm>
-            <a:off x="11624767" y="6327648"/>
-            <a:ext cx="274320" cy="274320"/>
+            <a:off x="11661343" y="6364224"/>
+            <a:ext cx="310896" cy="310896"/>
           </a:xfrm>
           <a:prstGeom prst="rect">
             <a:avLst/>
           </a:prstGeom>
           <a:solidFill>
-            <a:srgbClr val="0B2C5E"/>
+            <a:srgbClr val="0A2E7A"/>
           </a:solidFill>
           <a:ln/>
         </p:spPr>
@@ -10864,8 +11001,8 @@
         </p:nvSpPr>
         <p:spPr>
           <a:xfrm>
-            <a:off x="11624767" y="6327648"/>
-            <a:ext cx="274320" cy="274320"/>
+            <a:off x="11661343" y="6364224"/>
+            <a:ext cx="310896" cy="310896"/>
           </a:xfrm>
           <a:prstGeom prst="rect">
             <a:avLst/>
@@ -10881,7 +11018,7 @@
               <a:buNone/>
             </a:pPr>
             <a:r>
-              <a:rPr lang="en-US" sz="950" b="1" dirty="0">
+              <a:rPr lang="en-US" sz="1000" b="1" dirty="0">
                 <a:solidFill>
                   <a:srgbClr val="FFFFFF"/>
                 </a:solidFill>
@@ -10891,35 +11028,13 @@
               </a:rPr>
               <a:t>8</a:t>
             </a:r>
-            <a:endParaRPr lang="en-US" sz="950" dirty="0"/>
-          </a:p>
-        </p:txBody>
-      </p:sp>
-      <p:sp>
-        <p:nvSpPr>
-          <p:cNvPr id="8" name="Shape 6"/>
-          <p:cNvSpPr/>
-          <p:nvPr/>
-        </p:nvSpPr>
-        <p:spPr>
-          <a:xfrm>
-            <a:off x="566928" y="2148840"/>
-            <a:ext cx="11057839" cy="3520440"/>
-          </a:xfrm>
-          <a:prstGeom prst="roundRect">
-            <a:avLst>
-              <a:gd name="adj" fmla="val 1818"/>
-            </a:avLst>
-          </a:prstGeom>
-          <a:solidFill>
-            <a:srgbClr val="F3F7FB"/>
-          </a:solidFill>
-          <a:ln/>
-        </p:spPr>
+            <a:endParaRPr lang="en-US" sz="1000" dirty="0"/>
+          </a:p>
+        </p:txBody>
       </p:sp>
       <p:pic>
         <p:nvPicPr>
-          <p:cNvPr id="9" name="Image 0" descr="/home/user/bolt.diy/presentaciones/indotel-ciudades-inteligentes/src/icons/s8_gobernanza.png">    </p:cNvPr>
+          <p:cNvPr id="8" name="Image 0" descr="/home/user/bolt.diy/presentaciones/indotel-ciudades-inteligentes/src/icons/s8_gobernanza.png">    </p:cNvPr>
           <p:cNvPicPr>
             <a:picLocks noChangeAspect="1"/>
           </p:cNvPicPr>
@@ -10933,8 +11048,8 @@
         </p:blipFill>
         <p:spPr>
           <a:xfrm>
-            <a:off x="1491958" y="2651760"/>
-            <a:ext cx="914400" cy="914400"/>
+            <a:off x="1446238" y="2331720"/>
+            <a:ext cx="1005840" cy="1005840"/>
           </a:xfrm>
           <a:prstGeom prst="rect">
             <a:avLst/>
@@ -10943,53 +11058,53 @@
       </p:pic>
       <p:sp>
         <p:nvSpPr>
+          <p:cNvPr id="9" name="Text 6"/>
+          <p:cNvSpPr/>
+          <p:nvPr/>
+        </p:nvSpPr>
+        <p:spPr>
+          <a:xfrm>
+            <a:off x="566928" y="3611880"/>
+            <a:ext cx="2764460" cy="310896"/>
+          </a:xfrm>
+          <a:prstGeom prst="rect">
+            <a:avLst/>
+          </a:prstGeom>
+          <a:noFill/>
+          <a:ln/>
+        </p:spPr>
+        <p:txBody>
+          <a:bodyPr wrap="square" lIns="0" tIns="0" rIns="0" bIns="0" rtlCol="0" anchor="ctr"/>
+          <a:lstStyle/>
+          <a:p>
+            <a:pPr algn="ctr" indent="0" marL="0">
+              <a:buNone/>
+            </a:pPr>
+            <a:r>
+              <a:rPr lang="en-US" sz="1300" b="1" spc="90" kern="0" dirty="0">
+                <a:solidFill>
+                  <a:srgbClr val="243C8F"/>
+                </a:solidFill>
+                <a:latin typeface="Calibri" pitchFamily="34" charset="0"/>
+                <a:ea typeface="Calibri" pitchFamily="34" charset="-122"/>
+                <a:cs typeface="Calibri" pitchFamily="34" charset="-120"/>
+              </a:rPr>
+              <a:t>GOBERNANZA</a:t>
+            </a:r>
+            <a:endParaRPr lang="en-US" sz="1300" dirty="0"/>
+          </a:p>
+        </p:txBody>
+      </p:sp>
+      <p:sp>
+        <p:nvSpPr>
           <p:cNvPr id="10" name="Text 7"/>
           <p:cNvSpPr/>
           <p:nvPr/>
         </p:nvSpPr>
         <p:spPr>
           <a:xfrm>
-            <a:off x="676656" y="3822192"/>
-            <a:ext cx="2545004" cy="292608"/>
-          </a:xfrm>
-          <a:prstGeom prst="rect">
-            <a:avLst/>
-          </a:prstGeom>
-          <a:noFill/>
-          <a:ln/>
-        </p:spPr>
-        <p:txBody>
-          <a:bodyPr wrap="square" lIns="0" tIns="0" rIns="0" bIns="0" rtlCol="0" anchor="ctr"/>
-          <a:lstStyle/>
-          <a:p>
-            <a:pPr algn="ctr" indent="0" marL="0">
-              <a:buNone/>
-            </a:pPr>
-            <a:r>
-              <a:rPr lang="en-US" sz="1300" b="1" spc="90" kern="0" dirty="0">
-                <a:solidFill>
-                  <a:srgbClr val="0B2C5E"/>
-                </a:solidFill>
-                <a:latin typeface="Calibri" pitchFamily="34" charset="0"/>
-                <a:ea typeface="Calibri" pitchFamily="34" charset="-122"/>
-                <a:cs typeface="Calibri" pitchFamily="34" charset="-120"/>
-              </a:rPr>
-              <a:t>GOBERNANZA</a:t>
-            </a:r>
-            <a:endParaRPr lang="en-US" sz="1300" dirty="0"/>
-          </a:p>
-        </p:txBody>
-      </p:sp>
-      <p:sp>
-        <p:nvSpPr>
-          <p:cNvPr id="11" name="Text 8"/>
-          <p:cNvSpPr/>
-          <p:nvPr/>
-        </p:nvSpPr>
-        <p:spPr>
-          <a:xfrm>
-            <a:off x="841248" y="4224528"/>
-            <a:ext cx="2215820" cy="1280160"/>
+            <a:off x="859536" y="4041648"/>
+            <a:ext cx="2179244" cy="1280160"/>
           </a:xfrm>
           <a:prstGeom prst="rect">
             <a:avLst/>
@@ -11010,7 +11125,7 @@
             <a:r>
               <a:rPr lang="en-US" sz="1150" dirty="0">
                 <a:solidFill>
-                  <a:srgbClr val="44566B"/>
+                  <a:srgbClr val="3B4356"/>
                 </a:solidFill>
                 <a:latin typeface="Calibri" pitchFamily="34" charset="0"/>
                 <a:ea typeface="Calibri" pitchFamily="34" charset="-122"/>
@@ -11024,7 +11139,7 @@
       </p:sp>
       <p:pic>
         <p:nvPicPr>
-          <p:cNvPr id="12" name="Image 1" descr="/home/user/bolt.diy/presentaciones/indotel-ciudades-inteligentes/src/icons/s8_servicios.png">    </p:cNvPr>
+          <p:cNvPr id="11" name="Image 1" descr="/home/user/bolt.diy/presentaciones/indotel-ciudades-inteligentes/src/icons/s8_servicios.png">    </p:cNvPr>
           <p:cNvPicPr>
             <a:picLocks noChangeAspect="1"/>
           </p:cNvPicPr>
@@ -11038,8 +11153,8 @@
         </p:blipFill>
         <p:spPr>
           <a:xfrm>
-            <a:off x="4256418" y="2651760"/>
-            <a:ext cx="914400" cy="914400"/>
+            <a:off x="4210698" y="2331720"/>
+            <a:ext cx="1005840" cy="1005840"/>
           </a:xfrm>
           <a:prstGeom prst="rect">
             <a:avLst/>
@@ -11048,53 +11163,53 @@
       </p:pic>
       <p:sp>
         <p:nvSpPr>
+          <p:cNvPr id="12" name="Text 8"/>
+          <p:cNvSpPr/>
+          <p:nvPr/>
+        </p:nvSpPr>
+        <p:spPr>
+          <a:xfrm>
+            <a:off x="3331388" y="3611880"/>
+            <a:ext cx="2764460" cy="310896"/>
+          </a:xfrm>
+          <a:prstGeom prst="rect">
+            <a:avLst/>
+          </a:prstGeom>
+          <a:noFill/>
+          <a:ln/>
+        </p:spPr>
+        <p:txBody>
+          <a:bodyPr wrap="square" lIns="0" tIns="0" rIns="0" bIns="0" rtlCol="0" anchor="ctr"/>
+          <a:lstStyle/>
+          <a:p>
+            <a:pPr algn="ctr" indent="0" marL="0">
+              <a:buNone/>
+            </a:pPr>
+            <a:r>
+              <a:rPr lang="en-US" sz="1300" b="1" spc="90" kern="0" dirty="0">
+                <a:solidFill>
+                  <a:srgbClr val="243C8F"/>
+                </a:solidFill>
+                <a:latin typeface="Calibri" pitchFamily="34" charset="0"/>
+                <a:ea typeface="Calibri" pitchFamily="34" charset="-122"/>
+                <a:cs typeface="Calibri" pitchFamily="34" charset="-120"/>
+              </a:rPr>
+              <a:t>SERVICIOS</a:t>
+            </a:r>
+            <a:endParaRPr lang="en-US" sz="1300" dirty="0"/>
+          </a:p>
+        </p:txBody>
+      </p:sp>
+      <p:sp>
+        <p:nvSpPr>
           <p:cNvPr id="13" name="Text 9"/>
           <p:cNvSpPr/>
           <p:nvPr/>
         </p:nvSpPr>
         <p:spPr>
           <a:xfrm>
-            <a:off x="3441116" y="3822192"/>
-            <a:ext cx="2545004" cy="292608"/>
-          </a:xfrm>
-          <a:prstGeom prst="rect">
-            <a:avLst/>
-          </a:prstGeom>
-          <a:noFill/>
-          <a:ln/>
-        </p:spPr>
-        <p:txBody>
-          <a:bodyPr wrap="square" lIns="0" tIns="0" rIns="0" bIns="0" rtlCol="0" anchor="ctr"/>
-          <a:lstStyle/>
-          <a:p>
-            <a:pPr algn="ctr" indent="0" marL="0">
-              <a:buNone/>
-            </a:pPr>
-            <a:r>
-              <a:rPr lang="en-US" sz="1300" b="1" spc="90" kern="0" dirty="0">
-                <a:solidFill>
-                  <a:srgbClr val="0B2C5E"/>
-                </a:solidFill>
-                <a:latin typeface="Calibri" pitchFamily="34" charset="0"/>
-                <a:ea typeface="Calibri" pitchFamily="34" charset="-122"/>
-                <a:cs typeface="Calibri" pitchFamily="34" charset="-120"/>
-              </a:rPr>
-              <a:t>SERVICIOS</a:t>
-            </a:r>
-            <a:endParaRPr lang="en-US" sz="1300" dirty="0"/>
-          </a:p>
-        </p:txBody>
-      </p:sp>
-      <p:sp>
-        <p:nvSpPr>
-          <p:cNvPr id="14" name="Text 10"/>
-          <p:cNvSpPr/>
-          <p:nvPr/>
-        </p:nvSpPr>
-        <p:spPr>
-          <a:xfrm>
-            <a:off x="3605708" y="4224528"/>
-            <a:ext cx="2215820" cy="1280160"/>
+            <a:off x="3623996" y="4041648"/>
+            <a:ext cx="2179244" cy="1280160"/>
           </a:xfrm>
           <a:prstGeom prst="rect">
             <a:avLst/>
@@ -11115,7 +11230,7 @@
             <a:r>
               <a:rPr lang="en-US" sz="1150" dirty="0">
                 <a:solidFill>
-                  <a:srgbClr val="44566B"/>
+                  <a:srgbClr val="3B4356"/>
                 </a:solidFill>
                 <a:latin typeface="Calibri" pitchFamily="34" charset="0"/>
                 <a:ea typeface="Calibri" pitchFamily="34" charset="-122"/>
@@ -11129,14 +11244,14 @@
       </p:sp>
       <p:sp>
         <p:nvSpPr>
-          <p:cNvPr id="15" name="Shape 11"/>
-          <p:cNvSpPr/>
-          <p:nvPr/>
-        </p:nvSpPr>
-        <p:spPr>
-          <a:xfrm>
-            <a:off x="3331388" y="2578608"/>
-            <a:ext cx="0" cy="2697480"/>
+          <p:cNvPr id="14" name="Shape 10"/>
+          <p:cNvSpPr/>
+          <p:nvPr/>
+        </p:nvSpPr>
+        <p:spPr>
+          <a:xfrm>
+            <a:off x="3331388" y="2395728"/>
+            <a:ext cx="0" cy="2926080"/>
           </a:xfrm>
           <a:prstGeom prst="line">
             <a:avLst/>
@@ -11144,7 +11259,7 @@
           <a:noFill/>
           <a:ln w="12700">
             <a:solidFill>
-              <a:srgbClr val="C9D8E6"/>
+              <a:srgbClr val="CBD5E4"/>
             </a:solidFill>
             <a:prstDash val="solid"/>
           </a:ln>
@@ -11152,7 +11267,7 @@
       </p:sp>
       <p:pic>
         <p:nvPicPr>
-          <p:cNvPr id="16" name="Image 2" descr="/home/user/bolt.diy/presentaciones/indotel-ciudades-inteligentes/src/icons/s8_proyectos.png">    </p:cNvPr>
+          <p:cNvPr id="15" name="Image 2" descr="/home/user/bolt.diy/presentaciones/indotel-ciudades-inteligentes/src/icons/s8_proyectos.png">    </p:cNvPr>
           <p:cNvPicPr>
             <a:picLocks noChangeAspect="1"/>
           </p:cNvPicPr>
@@ -11166,8 +11281,8 @@
         </p:blipFill>
         <p:spPr>
           <a:xfrm>
-            <a:off x="7020878" y="2651760"/>
-            <a:ext cx="914400" cy="914400"/>
+            <a:off x="6975158" y="2331720"/>
+            <a:ext cx="1005840" cy="1005840"/>
           </a:xfrm>
           <a:prstGeom prst="rect">
             <a:avLst/>
@@ -11176,53 +11291,53 @@
       </p:pic>
       <p:sp>
         <p:nvSpPr>
+          <p:cNvPr id="16" name="Text 11"/>
+          <p:cNvSpPr/>
+          <p:nvPr/>
+        </p:nvSpPr>
+        <p:spPr>
+          <a:xfrm>
+            <a:off x="6095848" y="3611880"/>
+            <a:ext cx="2764460" cy="310896"/>
+          </a:xfrm>
+          <a:prstGeom prst="rect">
+            <a:avLst/>
+          </a:prstGeom>
+          <a:noFill/>
+          <a:ln/>
+        </p:spPr>
+        <p:txBody>
+          <a:bodyPr wrap="square" lIns="0" tIns="0" rIns="0" bIns="0" rtlCol="0" anchor="ctr"/>
+          <a:lstStyle/>
+          <a:p>
+            <a:pPr algn="ctr" indent="0" marL="0">
+              <a:buNone/>
+            </a:pPr>
+            <a:r>
+              <a:rPr lang="en-US" sz="1300" b="1" spc="90" kern="0" dirty="0">
+                <a:solidFill>
+                  <a:srgbClr val="243C8F"/>
+                </a:solidFill>
+                <a:latin typeface="Calibri" pitchFamily="34" charset="0"/>
+                <a:ea typeface="Calibri" pitchFamily="34" charset="-122"/>
+                <a:cs typeface="Calibri" pitchFamily="34" charset="-120"/>
+              </a:rPr>
+              <a:t>PROYECTOS</a:t>
+            </a:r>
+            <a:endParaRPr lang="en-US" sz="1300" dirty="0"/>
+          </a:p>
+        </p:txBody>
+      </p:sp>
+      <p:sp>
+        <p:nvSpPr>
           <p:cNvPr id="17" name="Text 12"/>
           <p:cNvSpPr/>
           <p:nvPr/>
         </p:nvSpPr>
         <p:spPr>
           <a:xfrm>
-            <a:off x="6205576" y="3822192"/>
-            <a:ext cx="2545004" cy="292608"/>
-          </a:xfrm>
-          <a:prstGeom prst="rect">
-            <a:avLst/>
-          </a:prstGeom>
-          <a:noFill/>
-          <a:ln/>
-        </p:spPr>
-        <p:txBody>
-          <a:bodyPr wrap="square" lIns="0" tIns="0" rIns="0" bIns="0" rtlCol="0" anchor="ctr"/>
-          <a:lstStyle/>
-          <a:p>
-            <a:pPr algn="ctr" indent="0" marL="0">
-              <a:buNone/>
-            </a:pPr>
-            <a:r>
-              <a:rPr lang="en-US" sz="1300" b="1" spc="90" kern="0" dirty="0">
-                <a:solidFill>
-                  <a:srgbClr val="0B2C5E"/>
-                </a:solidFill>
-                <a:latin typeface="Calibri" pitchFamily="34" charset="0"/>
-                <a:ea typeface="Calibri" pitchFamily="34" charset="-122"/>
-                <a:cs typeface="Calibri" pitchFamily="34" charset="-120"/>
-              </a:rPr>
-              <a:t>PROYECTOS</a:t>
-            </a:r>
-            <a:endParaRPr lang="en-US" sz="1300" dirty="0"/>
-          </a:p>
-        </p:txBody>
-      </p:sp>
-      <p:sp>
-        <p:nvSpPr>
-          <p:cNvPr id="18" name="Text 13"/>
-          <p:cNvSpPr/>
-          <p:nvPr/>
-        </p:nvSpPr>
-        <p:spPr>
-          <a:xfrm>
-            <a:off x="6370168" y="4224528"/>
-            <a:ext cx="2215820" cy="1280160"/>
+            <a:off x="6388456" y="4041648"/>
+            <a:ext cx="2179244" cy="1280160"/>
           </a:xfrm>
           <a:prstGeom prst="rect">
             <a:avLst/>
@@ -11243,7 +11358,7 @@
             <a:r>
               <a:rPr lang="en-US" sz="1150" dirty="0">
                 <a:solidFill>
-                  <a:srgbClr val="44566B"/>
+                  <a:srgbClr val="3B4356"/>
                 </a:solidFill>
                 <a:latin typeface="Calibri" pitchFamily="34" charset="0"/>
                 <a:ea typeface="Calibri" pitchFamily="34" charset="-122"/>
@@ -11257,14 +11372,14 @@
       </p:sp>
       <p:sp>
         <p:nvSpPr>
-          <p:cNvPr id="19" name="Shape 14"/>
-          <p:cNvSpPr/>
-          <p:nvPr/>
-        </p:nvSpPr>
-        <p:spPr>
-          <a:xfrm>
-            <a:off x="6095848" y="2578608"/>
-            <a:ext cx="0" cy="2697480"/>
+          <p:cNvPr id="18" name="Shape 13"/>
+          <p:cNvSpPr/>
+          <p:nvPr/>
+        </p:nvSpPr>
+        <p:spPr>
+          <a:xfrm>
+            <a:off x="6095848" y="2395728"/>
+            <a:ext cx="0" cy="2926080"/>
           </a:xfrm>
           <a:prstGeom prst="line">
             <a:avLst/>
@@ -11272,7 +11387,7 @@
           <a:noFill/>
           <a:ln w="12700">
             <a:solidFill>
-              <a:srgbClr val="C9D8E6"/>
+              <a:srgbClr val="CBD5E4"/>
             </a:solidFill>
             <a:prstDash val="solid"/>
           </a:ln>
@@ -11280,7 +11395,7 @@
       </p:sp>
       <p:pic>
         <p:nvPicPr>
-          <p:cNvPr id="20" name="Image 3" descr="/home/user/bolt.diy/presentaciones/indotel-ciudades-inteligentes/src/icons/s8_alianzas.png">    </p:cNvPr>
+          <p:cNvPr id="19" name="Image 3" descr="/home/user/bolt.diy/presentaciones/indotel-ciudades-inteligentes/src/icons/s8_alianzas.png">    </p:cNvPr>
           <p:cNvPicPr>
             <a:picLocks noChangeAspect="1"/>
           </p:cNvPicPr>
@@ -11294,8 +11409,8 @@
         </p:blipFill>
         <p:spPr>
           <a:xfrm>
-            <a:off x="9785337" y="2651760"/>
-            <a:ext cx="914400" cy="914400"/>
+            <a:off x="9739617" y="2331720"/>
+            <a:ext cx="1005840" cy="1005840"/>
           </a:xfrm>
           <a:prstGeom prst="rect">
             <a:avLst/>
@@ -11304,53 +11419,53 @@
       </p:pic>
       <p:sp>
         <p:nvSpPr>
+          <p:cNvPr id="20" name="Text 14"/>
+          <p:cNvSpPr/>
+          <p:nvPr/>
+        </p:nvSpPr>
+        <p:spPr>
+          <a:xfrm>
+            <a:off x="8860307" y="3611880"/>
+            <a:ext cx="2764460" cy="310896"/>
+          </a:xfrm>
+          <a:prstGeom prst="rect">
+            <a:avLst/>
+          </a:prstGeom>
+          <a:noFill/>
+          <a:ln/>
+        </p:spPr>
+        <p:txBody>
+          <a:bodyPr wrap="square" lIns="0" tIns="0" rIns="0" bIns="0" rtlCol="0" anchor="ctr"/>
+          <a:lstStyle/>
+          <a:p>
+            <a:pPr algn="ctr" indent="0" marL="0">
+              <a:buNone/>
+            </a:pPr>
+            <a:r>
+              <a:rPr lang="en-US" sz="1300" b="1" spc="90" kern="0" dirty="0">
+                <a:solidFill>
+                  <a:srgbClr val="243C8F"/>
+                </a:solidFill>
+                <a:latin typeface="Calibri" pitchFamily="34" charset="0"/>
+                <a:ea typeface="Calibri" pitchFamily="34" charset="-122"/>
+                <a:cs typeface="Calibri" pitchFamily="34" charset="-120"/>
+              </a:rPr>
+              <a:t>ALIANZAS</a:t>
+            </a:r>
+            <a:endParaRPr lang="en-US" sz="1300" dirty="0"/>
+          </a:p>
+        </p:txBody>
+      </p:sp>
+      <p:sp>
+        <p:nvSpPr>
           <p:cNvPr id="21" name="Text 15"/>
           <p:cNvSpPr/>
           <p:nvPr/>
         </p:nvSpPr>
         <p:spPr>
           <a:xfrm>
-            <a:off x="8970035" y="3822192"/>
-            <a:ext cx="2545004" cy="292608"/>
-          </a:xfrm>
-          <a:prstGeom prst="rect">
-            <a:avLst/>
-          </a:prstGeom>
-          <a:noFill/>
-          <a:ln/>
-        </p:spPr>
-        <p:txBody>
-          <a:bodyPr wrap="square" lIns="0" tIns="0" rIns="0" bIns="0" rtlCol="0" anchor="ctr"/>
-          <a:lstStyle/>
-          <a:p>
-            <a:pPr algn="ctr" indent="0" marL="0">
-              <a:buNone/>
-            </a:pPr>
-            <a:r>
-              <a:rPr lang="en-US" sz="1300" b="1" spc="90" kern="0" dirty="0">
-                <a:solidFill>
-                  <a:srgbClr val="0B2C5E"/>
-                </a:solidFill>
-                <a:latin typeface="Calibri" pitchFamily="34" charset="0"/>
-                <a:ea typeface="Calibri" pitchFamily="34" charset="-122"/>
-                <a:cs typeface="Calibri" pitchFamily="34" charset="-120"/>
-              </a:rPr>
-              <a:t>ALIANZAS</a:t>
-            </a:r>
-            <a:endParaRPr lang="en-US" sz="1300" dirty="0"/>
-          </a:p>
-        </p:txBody>
-      </p:sp>
-      <p:sp>
-        <p:nvSpPr>
-          <p:cNvPr id="22" name="Text 16"/>
-          <p:cNvSpPr/>
-          <p:nvPr/>
-        </p:nvSpPr>
-        <p:spPr>
-          <a:xfrm>
-            <a:off x="9134627" y="4224528"/>
-            <a:ext cx="2215820" cy="1280160"/>
+            <a:off x="9152915" y="4041648"/>
+            <a:ext cx="2179244" cy="1280160"/>
           </a:xfrm>
           <a:prstGeom prst="rect">
             <a:avLst/>
@@ -11371,7 +11486,7 @@
             <a:r>
               <a:rPr lang="en-US" sz="1150" dirty="0">
                 <a:solidFill>
-                  <a:srgbClr val="44566B"/>
+                  <a:srgbClr val="3B4356"/>
                 </a:solidFill>
                 <a:latin typeface="Calibri" pitchFamily="34" charset="0"/>
                 <a:ea typeface="Calibri" pitchFamily="34" charset="-122"/>
@@ -11385,14 +11500,14 @@
       </p:sp>
       <p:sp>
         <p:nvSpPr>
-          <p:cNvPr id="23" name="Shape 17"/>
-          <p:cNvSpPr/>
-          <p:nvPr/>
-        </p:nvSpPr>
-        <p:spPr>
-          <a:xfrm>
-            <a:off x="8860307" y="2578608"/>
-            <a:ext cx="0" cy="2697480"/>
+          <p:cNvPr id="22" name="Shape 16"/>
+          <p:cNvSpPr/>
+          <p:nvPr/>
+        </p:nvSpPr>
+        <p:spPr>
+          <a:xfrm>
+            <a:off x="8860307" y="2395728"/>
+            <a:ext cx="0" cy="2926080"/>
           </a:xfrm>
           <a:prstGeom prst="line">
             <a:avLst/>
@@ -11400,7 +11515,7 @@
           <a:noFill/>
           <a:ln w="12700">
             <a:solidFill>
-              <a:srgbClr val="C9D8E6"/>
+              <a:srgbClr val="CBD5E4"/>
             </a:solidFill>
             <a:prstDash val="solid"/>
           </a:ln>
@@ -11420,7 +11535,7 @@
     <p:bg>
       <p:bgPr>
         <a:solidFill>
-          <a:srgbClr val="FFFFFF"/>
+          <a:srgbClr val="F2F3F8"/>
         </a:solidFill>
       </p:bgPr>
     </p:bg>
@@ -11438,15 +11553,39 @@
           <a:chExt cx="0" cy="0"/>
         </a:xfrm>
       </p:grpSpPr>
-      <p:sp>
-        <p:nvSpPr>
-          <p:cNvPr id="2" name="Text 0"/>
-          <p:cNvSpPr/>
-          <p:nvPr/>
-        </p:nvSpPr>
-        <p:spPr>
-          <a:xfrm>
-            <a:off x="566928" y="256032"/>
+      <p:pic>
+        <p:nvPicPr>
+          <p:cNvPr id="2" name="Image 0" descr="/home/user/bolt.diy/presentaciones/indotel-ciudades-inteligentes/src/derived/mims_soft.jpg">    </p:cNvPr>
+          <p:cNvPicPr>
+            <a:picLocks noChangeAspect="1"/>
+          </p:cNvPicPr>
+          <p:nvPr/>
+        </p:nvPicPr>
+        <p:blipFill>
+          <a:blip r:embed="rId1"/>
+          <a:stretch>
+            <a:fillRect/>
+          </a:stretch>
+        </p:blipFill>
+        <p:spPr>
+          <a:xfrm>
+            <a:off x="-457200" y="1719072"/>
+            <a:ext cx="7040880" cy="4700016"/>
+          </a:xfrm>
+          <a:prstGeom prst="rect">
+            <a:avLst/>
+          </a:prstGeom>
+        </p:spPr>
+      </p:pic>
+      <p:sp>
+        <p:nvSpPr>
+          <p:cNvPr id="3" name="Text 0"/>
+          <p:cNvSpPr/>
+          <p:nvPr/>
+        </p:nvSpPr>
+        <p:spPr>
+          <a:xfrm>
+            <a:off x="566928" y="237744"/>
             <a:ext cx="3657600" cy="274320"/>
           </a:xfrm>
           <a:prstGeom prst="rect">
@@ -11463,9 +11602,9 @@
               <a:buNone/>
             </a:pPr>
             <a:r>
-              <a:rPr lang="en-US" sz="1500" b="1" spc="140" kern="0" dirty="0">
-                <a:solidFill>
-                  <a:srgbClr val="0B2C5E"/>
+              <a:rPr lang="en-US" sz="1500" b="1" spc="130" kern="0" dirty="0">
+                <a:solidFill>
+                  <a:srgbClr val="0D1B5E"/>
                 </a:solidFill>
                 <a:latin typeface="Arial" pitchFamily="34" charset="0"/>
                 <a:ea typeface="Arial" pitchFamily="34" charset="-122"/>
@@ -11479,13 +11618,13 @@
       </p:sp>
       <p:sp>
         <p:nvSpPr>
-          <p:cNvPr id="3" name="Text 1"/>
-          <p:cNvSpPr/>
-          <p:nvPr/>
-        </p:nvSpPr>
-        <p:spPr>
-          <a:xfrm>
-            <a:off x="566928" y="534924"/>
+          <p:cNvPr id="4" name="Text 1"/>
+          <p:cNvSpPr/>
+          <p:nvPr/>
+        </p:nvSpPr>
+        <p:spPr>
+          <a:xfrm>
+            <a:off x="566928" y="516636"/>
             <a:ext cx="3657600" cy="219456"/>
           </a:xfrm>
           <a:prstGeom prst="rect">
@@ -11504,7 +11643,7 @@
             <a:r>
               <a:rPr lang="en-US" sz="950" dirty="0">
                 <a:solidFill>
-                  <a:srgbClr val="8494A5"/>
+                  <a:srgbClr val="8A93A5"/>
                 </a:solidFill>
                 <a:latin typeface="Calibri" pitchFamily="34" charset="0"/>
                 <a:ea typeface="Calibri" pitchFamily="34" charset="-122"/>
@@ -11518,13 +11657,13 @@
       </p:sp>
       <p:sp>
         <p:nvSpPr>
-          <p:cNvPr id="4" name="Text 2"/>
-          <p:cNvSpPr/>
-          <p:nvPr/>
-        </p:nvSpPr>
-        <p:spPr>
-          <a:xfrm>
-            <a:off x="566928" y="822960"/>
+          <p:cNvPr id="5" name="Text 2"/>
+          <p:cNvSpPr/>
+          <p:nvPr/>
+        </p:nvSpPr>
+        <p:spPr>
+          <a:xfrm>
+            <a:off x="566928" y="768096"/>
             <a:ext cx="11057839" cy="420624"/>
           </a:xfrm>
           <a:prstGeom prst="rect">
@@ -11541,9 +11680,9 @@
               <a:buNone/>
             </a:pPr>
             <a:r>
-              <a:rPr lang="en-US" sz="2500" b="1" dirty="0">
-                <a:solidFill>
-                  <a:srgbClr val="0B2C5E"/>
+              <a:rPr lang="en-US" sz="2450" b="1" dirty="0">
+                <a:solidFill>
+                  <a:srgbClr val="0D1B5E"/>
                 </a:solidFill>
                 <a:latin typeface="Calibri" pitchFamily="34" charset="0"/>
                 <a:ea typeface="Calibri" pitchFamily="34" charset="-122"/>
@@ -11551,20 +11690,20 @@
               </a:rPr>
               <a:t>El concepto clave: MIMs</a:t>
             </a:r>
-            <a:endParaRPr lang="en-US" sz="2500" dirty="0"/>
-          </a:p>
-        </p:txBody>
-      </p:sp>
-      <p:sp>
-        <p:nvSpPr>
-          <p:cNvPr id="5" name="Text 3"/>
-          <p:cNvSpPr/>
-          <p:nvPr/>
-        </p:nvSpPr>
-        <p:spPr>
-          <a:xfrm>
-            <a:off x="566928" y="1280160"/>
-            <a:ext cx="7315200" cy="457200"/>
+            <a:endParaRPr lang="en-US" sz="2450" dirty="0"/>
+          </a:p>
+        </p:txBody>
+      </p:sp>
+      <p:sp>
+        <p:nvSpPr>
+          <p:cNvPr id="6" name="Text 3"/>
+          <p:cNvSpPr/>
+          <p:nvPr/>
+        </p:nvSpPr>
+        <p:spPr>
+          <a:xfrm>
+            <a:off x="566928" y="1234440"/>
+            <a:ext cx="8961120" cy="475488"/>
           </a:xfrm>
           <a:prstGeom prst="rect">
             <a:avLst/>
@@ -11578,14 +11717,14 @@
           <a:p>
             <a:pPr indent="0" marL="0">
               <a:lnSpc>
-                <a:spcPts val="1600"/>
+                <a:spcPts val="1650"/>
               </a:lnSpc>
               <a:buNone/>
             </a:pPr>
             <a:r>
-              <a:rPr lang="en-US" sz="1250" dirty="0">
-                <a:solidFill>
-                  <a:srgbClr val="44566B"/>
+              <a:rPr lang="en-US" sz="1250" b="1" dirty="0">
+                <a:solidFill>
+                  <a:srgbClr val="243C8F"/>
                 </a:solidFill>
                 <a:latin typeface="Calibri" pitchFamily="34" charset="0"/>
                 <a:ea typeface="Calibri" pitchFamily="34" charset="-122"/>
@@ -11599,34 +11738,34 @@
       </p:sp>
       <p:sp>
         <p:nvSpPr>
-          <p:cNvPr id="6" name="Shape 4"/>
-          <p:cNvSpPr/>
-          <p:nvPr/>
-        </p:nvSpPr>
-        <p:spPr>
-          <a:xfrm>
-            <a:off x="11624767" y="6327648"/>
-            <a:ext cx="274320" cy="274320"/>
+          <p:cNvPr id="7" name="Shape 4"/>
+          <p:cNvSpPr/>
+          <p:nvPr/>
+        </p:nvSpPr>
+        <p:spPr>
+          <a:xfrm>
+            <a:off x="11661343" y="6364224"/>
+            <a:ext cx="310896" cy="310896"/>
           </a:xfrm>
           <a:prstGeom prst="rect">
             <a:avLst/>
           </a:prstGeom>
           <a:solidFill>
-            <a:srgbClr val="0B2C5E"/>
+            <a:srgbClr val="0A2E7A"/>
           </a:solidFill>
           <a:ln/>
         </p:spPr>
       </p:sp>
       <p:sp>
         <p:nvSpPr>
-          <p:cNvPr id="7" name="Text 5"/>
-          <p:cNvSpPr/>
-          <p:nvPr/>
-        </p:nvSpPr>
-        <p:spPr>
-          <a:xfrm>
-            <a:off x="11624767" y="6327648"/>
-            <a:ext cx="274320" cy="274320"/>
+          <p:cNvPr id="8" name="Text 5"/>
+          <p:cNvSpPr/>
+          <p:nvPr/>
+        </p:nvSpPr>
+        <p:spPr>
+          <a:xfrm>
+            <a:off x="11661343" y="6364224"/>
+            <a:ext cx="310896" cy="310896"/>
           </a:xfrm>
           <a:prstGeom prst="rect">
             <a:avLst/>
@@ -11642,7 +11781,7 @@
               <a:buNone/>
             </a:pPr>
             <a:r>
-              <a:rPr lang="en-US" sz="950" b="1" dirty="0">
+              <a:rPr lang="en-US" sz="1000" b="1" dirty="0">
                 <a:solidFill>
                   <a:srgbClr val="FFFFFF"/>
                 </a:solidFill>
@@ -11652,33 +11791,10 @@
               </a:rPr>
               <a:t>9</a:t>
             </a:r>
-            <a:endParaRPr lang="en-US" sz="950" dirty="0"/>
-          </a:p>
-        </p:txBody>
-      </p:sp>
-      <p:pic>
-        <p:nvPicPr>
-          <p:cNvPr id="8" name="Image 0" descr="/home/user/bolt.diy/presentaciones/indotel-ciudades-inteligentes/src/derived/mims.jpg">    </p:cNvPr>
-          <p:cNvPicPr>
-            <a:picLocks noChangeAspect="1"/>
-          </p:cNvPicPr>
-          <p:nvPr/>
-        </p:nvPicPr>
-        <p:blipFill>
-          <a:blip r:embed="rId1"/>
-          <a:srcRect l="0" r="0" t="0" b="0"/>
-          <a:stretch/>
-        </p:blipFill>
-        <p:spPr>
-          <a:xfrm>
-            <a:off x="566928" y="1737360"/>
-            <a:ext cx="6903720" cy="4160520"/>
-          </a:xfrm>
-          <a:prstGeom prst="rect">
-            <a:avLst/>
-          </a:prstGeom>
-        </p:spPr>
-      </p:pic>
+            <a:endParaRPr lang="en-US" sz="1000" dirty="0"/>
+          </a:p>
+        </p:txBody>
+      </p:sp>
       <p:pic>
         <p:nvPicPr>
           <p:cNvPr id="9" name="Image 1" descr="/home/user/bolt.diy/presentaciones/indotel-ciudades-inteligentes/src/icons/check_green.png">    </p:cNvPr>
@@ -11695,8 +11811,8 @@
         </p:blipFill>
         <p:spPr>
           <a:xfrm>
-            <a:off x="7772400" y="2427732"/>
-            <a:ext cx="164592" cy="164592"/>
+            <a:off x="7406640" y="2514600"/>
+            <a:ext cx="182880" cy="182880"/>
           </a:xfrm>
           <a:prstGeom prst="rect">
             <a:avLst/>
@@ -11711,8 +11827,8 @@
         </p:nvSpPr>
         <p:spPr>
           <a:xfrm>
-            <a:off x="8101584" y="2354580"/>
-            <a:ext cx="3511296" cy="499872"/>
+            <a:off x="7772400" y="2441448"/>
+            <a:ext cx="3840480" cy="304800"/>
           </a:xfrm>
           <a:prstGeom prst="rect">
             <a:avLst/>
@@ -11733,7 +11849,7 @@
             <a:r>
               <a:rPr lang="en-US" sz="1200" dirty="0">
                 <a:solidFill>
-                  <a:srgbClr val="44566B"/>
+                  <a:srgbClr val="3B4356"/>
                 </a:solidFill>
                 <a:latin typeface="Calibri" pitchFamily="34" charset="0"/>
                 <a:ea typeface="Calibri" pitchFamily="34" charset="-122"/>
@@ -11761,8 +11877,8 @@
         </p:blipFill>
         <p:spPr>
           <a:xfrm>
-            <a:off x="7772400" y="3348228"/>
-            <a:ext cx="164592" cy="164592"/>
+            <a:off x="7406640" y="3212592"/>
+            <a:ext cx="182880" cy="182880"/>
           </a:xfrm>
           <a:prstGeom prst="rect">
             <a:avLst/>
@@ -11777,8 +11893,8 @@
         </p:nvSpPr>
         <p:spPr>
           <a:xfrm>
-            <a:off x="8101584" y="3275076"/>
-            <a:ext cx="3511296" cy="304800"/>
+            <a:off x="7772400" y="3139440"/>
+            <a:ext cx="3840480" cy="304800"/>
           </a:xfrm>
           <a:prstGeom prst="rect">
             <a:avLst/>
@@ -11799,7 +11915,7 @@
             <a:r>
               <a:rPr lang="en-US" sz="1200" dirty="0">
                 <a:solidFill>
-                  <a:srgbClr val="44566B"/>
+                  <a:srgbClr val="3B4356"/>
                 </a:solidFill>
                 <a:latin typeface="Calibri" pitchFamily="34" charset="0"/>
                 <a:ea typeface="Calibri" pitchFamily="34" charset="-122"/>
@@ -11827,8 +11943,8 @@
         </p:blipFill>
         <p:spPr>
           <a:xfrm>
-            <a:off x="7772400" y="4073652"/>
-            <a:ext cx="164592" cy="164592"/>
+            <a:off x="7406640" y="3910584"/>
+            <a:ext cx="182880" cy="182880"/>
           </a:xfrm>
           <a:prstGeom prst="rect">
             <a:avLst/>
@@ -11843,8 +11959,8 @@
         </p:nvSpPr>
         <p:spPr>
           <a:xfrm>
-            <a:off x="8101584" y="4000500"/>
-            <a:ext cx="3511296" cy="304800"/>
+            <a:off x="7772400" y="3837432"/>
+            <a:ext cx="3840480" cy="304800"/>
           </a:xfrm>
           <a:prstGeom prst="rect">
             <a:avLst/>
@@ -11865,7 +11981,7 @@
             <a:r>
               <a:rPr lang="en-US" sz="1200" dirty="0">
                 <a:solidFill>
-                  <a:srgbClr val="44566B"/>
+                  <a:srgbClr val="3B4356"/>
                 </a:solidFill>
                 <a:latin typeface="Calibri" pitchFamily="34" charset="0"/>
                 <a:ea typeface="Calibri" pitchFamily="34" charset="-122"/>
@@ -11893,8 +12009,8 @@
         </p:blipFill>
         <p:spPr>
           <a:xfrm>
-            <a:off x="7772400" y="4799076"/>
-            <a:ext cx="164592" cy="164592"/>
+            <a:off x="7406640" y="4608576"/>
+            <a:ext cx="182880" cy="182880"/>
           </a:xfrm>
           <a:prstGeom prst="rect">
             <a:avLst/>
@@ -11909,8 +12025,8 @@
         </p:nvSpPr>
         <p:spPr>
           <a:xfrm>
-            <a:off x="8101584" y="4725924"/>
-            <a:ext cx="3511296" cy="499872"/>
+            <a:off x="7772400" y="4535424"/>
+            <a:ext cx="3840480" cy="499872"/>
           </a:xfrm>
           <a:prstGeom prst="rect">
             <a:avLst/>
@@ -11931,7 +12047,7 @@
             <a:r>
               <a:rPr lang="en-US" sz="1200" dirty="0">
                 <a:solidFill>
-                  <a:srgbClr val="44566B"/>
+                  <a:srgbClr val="3B4356"/>
                 </a:solidFill>
                 <a:latin typeface="Calibri" pitchFamily="34" charset="0"/>
                 <a:ea typeface="Calibri" pitchFamily="34" charset="-122"/>
